--- a/reference_material/slides/012_Errors.pptx
+++ b/reference_material/slides/012_Errors.pptx
@@ -6,18 +6,24 @@
   </p:sldMasterIdLst>
   <p:sldIdLst>
     <p:sldId id="263" r:id="rId2"/>
-    <p:sldId id="256" r:id="rId3"/>
-    <p:sldId id="268" r:id="rId4"/>
-    <p:sldId id="266" r:id="rId5"/>
-    <p:sldId id="257" r:id="rId6"/>
-    <p:sldId id="258" r:id="rId7"/>
-    <p:sldId id="265" r:id="rId8"/>
-    <p:sldId id="264" r:id="rId9"/>
-    <p:sldId id="267" r:id="rId10"/>
-    <p:sldId id="259" r:id="rId11"/>
-    <p:sldId id="260" r:id="rId12"/>
-    <p:sldId id="262" r:id="rId13"/>
-    <p:sldId id="261" r:id="rId14"/>
+    <p:sldId id="269" r:id="rId3"/>
+    <p:sldId id="270" r:id="rId4"/>
+    <p:sldId id="271" r:id="rId5"/>
+    <p:sldId id="256" r:id="rId6"/>
+    <p:sldId id="268" r:id="rId7"/>
+    <p:sldId id="274" r:id="rId8"/>
+    <p:sldId id="266" r:id="rId9"/>
+    <p:sldId id="272" r:id="rId10"/>
+    <p:sldId id="257" r:id="rId11"/>
+    <p:sldId id="258" r:id="rId12"/>
+    <p:sldId id="265" r:id="rId13"/>
+    <p:sldId id="264" r:id="rId14"/>
+    <p:sldId id="267" r:id="rId15"/>
+    <p:sldId id="259" r:id="rId16"/>
+    <p:sldId id="260" r:id="rId17"/>
+    <p:sldId id="273" r:id="rId18"/>
+    <p:sldId id="262" r:id="rId19"/>
+    <p:sldId id="261" r:id="rId20"/>
   </p:sldIdLst>
   <p:sldSz cx="12192000" cy="6858000"/>
   <p:notesSz cx="6858000" cy="9144000"/>
@@ -263,7 +269,7 @@
           <a:p>
             <a:fld id="{1F89F9F6-FB88-AB4E-BC2D-28DEF802BDFE}" type="datetimeFigureOut">
               <a:rPr lang="en-US" smtClean="0"/>
-              <a:t>10/14/22</a:t>
+              <a:t>10/4/25</a:t>
             </a:fld>
             <a:endParaRPr lang="en-US"/>
           </a:p>
@@ -474,7 +480,7 @@
           <a:p>
             <a:fld id="{1F89F9F6-FB88-AB4E-BC2D-28DEF802BDFE}" type="datetimeFigureOut">
               <a:rPr lang="en-US" smtClean="0"/>
-              <a:t>10/14/22</a:t>
+              <a:t>10/4/25</a:t>
             </a:fld>
             <a:endParaRPr lang="en-US"/>
           </a:p>
@@ -689,7 +695,7 @@
           <a:p>
             <a:fld id="{1F89F9F6-FB88-AB4E-BC2D-28DEF802BDFE}" type="datetimeFigureOut">
               <a:rPr lang="en-US" smtClean="0"/>
-              <a:t>10/14/22</a:t>
+              <a:t>10/4/25</a:t>
             </a:fld>
             <a:endParaRPr lang="en-US"/>
           </a:p>
@@ -890,7 +896,7 @@
           <a:p>
             <a:fld id="{1F89F9F6-FB88-AB4E-BC2D-28DEF802BDFE}" type="datetimeFigureOut">
               <a:rPr lang="en-US" smtClean="0"/>
-              <a:t>10/14/22</a:t>
+              <a:t>10/4/25</a:t>
             </a:fld>
             <a:endParaRPr lang="en-US"/>
           </a:p>
@@ -1169,7 +1175,7 @@
           <a:p>
             <a:fld id="{1F89F9F6-FB88-AB4E-BC2D-28DEF802BDFE}" type="datetimeFigureOut">
               <a:rPr lang="en-US" smtClean="0"/>
-              <a:t>10/14/22</a:t>
+              <a:t>10/4/25</a:t>
             </a:fld>
             <a:endParaRPr lang="en-US"/>
           </a:p>
@@ -1437,7 +1443,7 @@
           <a:p>
             <a:fld id="{1F89F9F6-FB88-AB4E-BC2D-28DEF802BDFE}" type="datetimeFigureOut">
               <a:rPr lang="en-US" smtClean="0"/>
-              <a:t>10/14/22</a:t>
+              <a:t>10/4/25</a:t>
             </a:fld>
             <a:endParaRPr lang="en-US"/>
           </a:p>
@@ -1853,7 +1859,7 @@
           <a:p>
             <a:fld id="{1F89F9F6-FB88-AB4E-BC2D-28DEF802BDFE}" type="datetimeFigureOut">
               <a:rPr lang="en-US" smtClean="0"/>
-              <a:t>10/14/22</a:t>
+              <a:t>10/4/25</a:t>
             </a:fld>
             <a:endParaRPr lang="en-US"/>
           </a:p>
@@ -2002,7 +2008,7 @@
           <a:p>
             <a:fld id="{1F89F9F6-FB88-AB4E-BC2D-28DEF802BDFE}" type="datetimeFigureOut">
               <a:rPr lang="en-US" smtClean="0"/>
-              <a:t>10/14/22</a:t>
+              <a:t>10/4/25</a:t>
             </a:fld>
             <a:endParaRPr lang="en-US"/>
           </a:p>
@@ -2128,7 +2134,7 @@
           <a:p>
             <a:fld id="{1F89F9F6-FB88-AB4E-BC2D-28DEF802BDFE}" type="datetimeFigureOut">
               <a:rPr lang="en-US" smtClean="0"/>
-              <a:t>10/14/22</a:t>
+              <a:t>10/4/25</a:t>
             </a:fld>
             <a:endParaRPr lang="en-US"/>
           </a:p>
@@ -2379,7 +2385,7 @@
           <a:p>
             <a:fld id="{1F89F9F6-FB88-AB4E-BC2D-28DEF802BDFE}" type="datetimeFigureOut">
               <a:rPr lang="en-US" smtClean="0"/>
-              <a:t>10/14/22</a:t>
+              <a:t>10/4/25</a:t>
             </a:fld>
             <a:endParaRPr lang="en-US"/>
           </a:p>
@@ -2824,7 +2830,7 @@
           <a:p>
             <a:fld id="{1F89F9F6-FB88-AB4E-BC2D-28DEF802BDFE}" type="datetimeFigureOut">
               <a:rPr lang="en-US" smtClean="0"/>
-              <a:t>10/14/22</a:t>
+              <a:t>10/4/25</a:t>
             </a:fld>
             <a:endParaRPr lang="en-US"/>
           </a:p>
@@ -3151,7 +3157,7 @@
           <a:p>
             <a:fld id="{1F89F9F6-FB88-AB4E-BC2D-28DEF802BDFE}" type="datetimeFigureOut">
               <a:rPr lang="en-US" smtClean="0"/>
-              <a:t>10/14/22</a:t>
+              <a:t>10/4/25</a:t>
             </a:fld>
             <a:endParaRPr lang="en-US"/>
           </a:p>
@@ -3621,7 +3627,7 @@
 </file>
 
 <file path=ppt/slides/slide1.xml><?xml version="1.0" encoding="utf-8"?>
-<p:sld xmlns:a="http://schemas.openxmlformats.org/drawingml/2006/main" xmlns:r="http://schemas.openxmlformats.org/officeDocument/2006/relationships" xmlns:p="http://schemas.openxmlformats.org/presentationml/2006/main">
+<p:sld xmlns:a="http://schemas.openxmlformats.org/drawingml/2006/main" xmlns:r="http://schemas.openxmlformats.org/officeDocument/2006/relationships" xmlns:p="http://schemas.openxmlformats.org/presentationml/2006/main" show="0">
   <p:cSld>
     <p:spTree>
       <p:nvGrpSpPr>
@@ -3802,7 +3808,7 @@
           <p:cNvPr id="2" name="Title 1">
             <a:extLst>
               <a:ext uri="{FF2B5EF4-FFF2-40B4-BE49-F238E27FC236}">
-                <a16:creationId xmlns:a16="http://schemas.microsoft.com/office/drawing/2014/main" id="{387B9AE9-C7BA-7C94-52F0-B3F727BF728E}"/>
+                <a16:creationId xmlns:a16="http://schemas.microsoft.com/office/drawing/2014/main" id="{482C6352-913A-80C4-CF7E-B8EC17246DCA}"/>
               </a:ext>
             </a:extLst>
           </p:cNvPr>
@@ -3820,7 +3826,7 @@
           <a:p>
             <a:r>
               <a:rPr lang="en-US" dirty="0"/>
-              <a:t>Summarization of Errors</a:t>
+              <a:t>Errors</a:t>
             </a:r>
           </a:p>
         </p:txBody>
@@ -3830,7 +3836,7 @@
           <p:cNvPr id="3" name="Content Placeholder 2">
             <a:extLst>
               <a:ext uri="{FF2B5EF4-FFF2-40B4-BE49-F238E27FC236}">
-                <a16:creationId xmlns:a16="http://schemas.microsoft.com/office/drawing/2014/main" id="{3436DCAA-7675-6826-7BFF-726EC4BF5418}"/>
+                <a16:creationId xmlns:a16="http://schemas.microsoft.com/office/drawing/2014/main" id="{95389208-C1D8-D820-95A6-46333A5231BD}"/>
               </a:ext>
             </a:extLst>
           </p:cNvPr>
@@ -3843,126 +3849,67 @@
         </p:nvSpPr>
         <p:spPr>
           <a:xfrm>
-            <a:off x="144967" y="1934598"/>
-            <a:ext cx="10909888" cy="4198573"/>
-          </a:xfrm>
-        </p:spPr>
-        <p:txBody>
-          <a:bodyPr>
-            <a:normAutofit/>
-          </a:bodyPr>
-          <a:lstStyle/>
-          <a:p>
-            <a:r>
-              <a:rPr lang="en-US" dirty="0"/>
-              <a:t>When dealing with many points, a list of residuals is impractical. </a:t>
+            <a:off x="1451579" y="2015732"/>
+            <a:ext cx="9603275" cy="4037749"/>
+          </a:xfrm>
+        </p:spPr>
+        <p:txBody>
+          <a:bodyPr/>
+          <a:lstStyle/>
+          <a:p>
+            <a:r>
+              <a:rPr lang="en-US" dirty="0"/>
+              <a:t>When matching empirical data to analytical distributions our match is never perfect. </a:t>
+            </a:r>
+          </a:p>
+          <a:p>
+            <a:r>
+              <a:rPr lang="en-US" dirty="0"/>
+              <a:t>Each point is “off” the analytical distribution by some amount. </a:t>
+            </a:r>
+          </a:p>
+          <a:p>
+            <a:r>
+              <a:rPr lang="en-US" dirty="0"/>
+              <a:t>The less the total amount of “off” is, the more closely matched the distribution. </a:t>
+            </a:r>
+          </a:p>
+          <a:p>
+            <a:endParaRPr lang="en-US" dirty="0"/>
+          </a:p>
+          <a:p>
+            <a:r>
+              <a:rPr lang="en-US" dirty="0"/>
+              <a:t>Predictions work the same way:</a:t>
             </a:r>
           </a:p>
           <a:p>
             <a:pPr lvl="1"/>
             <a:r>
               <a:rPr lang="en-US" dirty="0"/>
-              <a:t>Think of a dataset with 10,000,000 rows – a list of that many residuals is impractical. </a:t>
-            </a:r>
-          </a:p>
-          <a:p>
-            <a:r>
-              <a:rPr lang="en-US" dirty="0"/>
-              <a:t>We can summarize residuals into one measure of error. </a:t>
-            </a:r>
-          </a:p>
-          <a:p>
-            <a:r>
-              <a:rPr lang="en-US" dirty="0"/>
-              <a:t>There are several ways to summarize error, e.g.</a:t>
+              <a:t>Predict what a value should be. </a:t>
             </a:r>
           </a:p>
           <a:p>
             <a:pPr lvl="1"/>
             <a:r>
               <a:rPr lang="en-US" dirty="0"/>
-              <a:t>MSE – Mean squared error. Square residuals and average them.</a:t>
+              <a:t>Measure our error.</a:t>
             </a:r>
           </a:p>
           <a:p>
             <a:pPr lvl="1"/>
             <a:r>
               <a:rPr lang="en-US" dirty="0"/>
-              <a:t>RMSE – Root mean squared error. Take the square root of MSE. </a:t>
-            </a:r>
-          </a:p>
-          <a:p>
-            <a:pPr lvl="1"/>
-            <a:r>
-              <a:rPr lang="en-US" dirty="0"/>
-              <a:t>MAE – Mean absolute error. Average the absolute values of the residuals. </a:t>
-            </a:r>
-          </a:p>
-          <a:p>
-            <a:r>
-              <a:rPr lang="en-US" dirty="0"/>
-              <a:t>RMSE is the most common error measure for us. </a:t>
-            </a:r>
-          </a:p>
-          <a:p>
-            <a:r>
-              <a:rPr lang="en-US" dirty="0"/>
-              <a:t>Lower error amounts tell us that the model and the empirical are similar. </a:t>
-            </a:r>
-          </a:p>
-        </p:txBody>
-      </p:sp>
-      <p:pic>
-        <p:nvPicPr>
-          <p:cNvPr id="1028" name="Picture 4" descr="Root-Mean-Square Error in R Programming - GeeksforGeeks">
-            <a:extLst>
-              <a:ext uri="{FF2B5EF4-FFF2-40B4-BE49-F238E27FC236}">
-                <a16:creationId xmlns:a16="http://schemas.microsoft.com/office/drawing/2014/main" id="{82A2C651-69B6-1EF8-D924-8DA01DD3B648}"/>
-              </a:ext>
-            </a:extLst>
-          </p:cNvPr>
-          <p:cNvPicPr>
-            <a:picLocks noChangeAspect="1" noChangeArrowheads="1"/>
-          </p:cNvPicPr>
-          <p:nvPr/>
-        </p:nvPicPr>
-        <p:blipFill>
-          <a:blip r:embed="rId2">
-            <a:extLst>
-              <a:ext uri="{28A0092B-C50C-407E-A947-70E740481C1C}">
-                <a14:useLocalDpi xmlns:a14="http://schemas.microsoft.com/office/drawing/2010/main" val="0"/>
-              </a:ext>
-            </a:extLst>
-          </a:blip>
-          <a:srcRect/>
-          <a:stretch>
-            <a:fillRect/>
-          </a:stretch>
-        </p:blipFill>
-        <p:spPr bwMode="auto">
-          <a:xfrm>
-            <a:off x="7251700" y="2902989"/>
-            <a:ext cx="4940300" cy="1651000"/>
-          </a:xfrm>
-          <a:prstGeom prst="rect">
-            <a:avLst/>
-          </a:prstGeom>
-          <a:noFill/>
-          <a:extLst>
-            <a:ext uri="{909E8E84-426E-40DD-AFC4-6F175D3DCCD1}">
-              <a14:hiddenFill xmlns:a14="http://schemas.microsoft.com/office/drawing/2010/main">
-                <a:solidFill>
-                  <a:srgbClr val="FFFFFF"/>
-                </a:solidFill>
-              </a14:hiddenFill>
-            </a:ext>
-          </a:extLst>
-        </p:spPr>
-      </p:pic>
+              <a:t>Summarize these errors to estimate overall accuracy. </a:t>
+            </a:r>
+          </a:p>
+        </p:txBody>
+      </p:sp>
     </p:spTree>
     <p:extLst>
       <p:ext uri="{BB962C8B-B14F-4D97-AF65-F5344CB8AC3E}">
-        <p14:creationId xmlns:p14="http://schemas.microsoft.com/office/powerpoint/2010/main" val="3737122044"/>
+        <p14:creationId xmlns:p14="http://schemas.microsoft.com/office/powerpoint/2010/main" val="3134869059"/>
       </p:ext>
     </p:extLst>
   </p:cSld>
@@ -3994,7 +3941,7 @@
           <p:cNvPr id="2" name="Title 1">
             <a:extLst>
               <a:ext uri="{FF2B5EF4-FFF2-40B4-BE49-F238E27FC236}">
-                <a16:creationId xmlns:a16="http://schemas.microsoft.com/office/drawing/2014/main" id="{E9356086-BE05-B01B-10A4-6D1976445E25}"/>
+                <a16:creationId xmlns:a16="http://schemas.microsoft.com/office/drawing/2014/main" id="{26EF6B96-4AC2-5366-6E64-4FCABD653C4B}"/>
               </a:ext>
             </a:extLst>
           </p:cNvPr>
@@ -4012,7 +3959,7 @@
           <a:p>
             <a:r>
               <a:rPr lang="en-US" dirty="0"/>
-              <a:t>Why Squared?</a:t>
+              <a:t>Residuals</a:t>
             </a:r>
           </a:p>
         </p:txBody>
@@ -4022,7 +3969,7 @@
           <p:cNvPr id="3" name="Content Placeholder 2">
             <a:extLst>
               <a:ext uri="{FF2B5EF4-FFF2-40B4-BE49-F238E27FC236}">
-                <a16:creationId xmlns:a16="http://schemas.microsoft.com/office/drawing/2014/main" id="{BC34DD8C-2FBC-A875-6B61-74B2788B9CD3}"/>
+                <a16:creationId xmlns:a16="http://schemas.microsoft.com/office/drawing/2014/main" id="{5F735C24-FC39-2D6E-5A15-E5DC7C3D6B7D}"/>
               </a:ext>
             </a:extLst>
           </p:cNvPr>
@@ -4035,78 +3982,75 @@
         </p:nvSpPr>
         <p:spPr>
           <a:xfrm>
-            <a:off x="1451579" y="2015732"/>
-            <a:ext cx="9603275" cy="4037749"/>
-          </a:xfrm>
-        </p:spPr>
-        <p:txBody>
-          <a:bodyPr>
-            <a:normAutofit lnSpcReduction="10000"/>
-          </a:bodyPr>
-          <a:lstStyle/>
-          <a:p>
-            <a:r>
-              <a:rPr lang="en-US" dirty="0"/>
-              <a:t>The error measures either squared or took the absolute value of the residual. </a:t>
-            </a:r>
-          </a:p>
-          <a:p>
-            <a:r>
-              <a:rPr lang="en-US" dirty="0"/>
-              <a:t>Squaring does a couple of things:</a:t>
-            </a:r>
-          </a:p>
-          <a:p>
-            <a:pPr lvl="1"/>
-            <a:r>
-              <a:rPr lang="en-US" dirty="0"/>
-              <a:t>Eliminates negatives. We get a measure of the magnitude. (MAE* also does this.)</a:t>
-            </a:r>
-          </a:p>
-          <a:p>
-            <a:pPr lvl="1"/>
-            <a:r>
-              <a:rPr lang="en-US" dirty="0"/>
-              <a:t>Penalizes large residuals. </a:t>
-            </a:r>
-          </a:p>
-          <a:p>
-            <a:r>
-              <a:rPr lang="en-US" dirty="0"/>
-              <a:t>Having residuals that are small are good, even though they’ll never be perfect. </a:t>
-            </a:r>
-          </a:p>
-          <a:p>
-            <a:r>
-              <a:rPr lang="en-US" dirty="0"/>
-              <a:t>Having large residuals indicates massive misses. </a:t>
-            </a:r>
-          </a:p>
-          <a:p>
-            <a:r>
-              <a:rPr lang="en-US" dirty="0"/>
-              <a:t>MSE/RMSE tends to reward models without many large residuals. </a:t>
-            </a:r>
-          </a:p>
-          <a:p>
-            <a:pPr lvl="1"/>
-            <a:r>
-              <a:rPr lang="en-US" dirty="0"/>
-              <a:t>Few large misses. </a:t>
-            </a:r>
-          </a:p>
-          <a:p>
-            <a:r>
-              <a:rPr lang="en-US" dirty="0"/>
-              <a:t>*Absolute values make for weird math, which is one reason it is less common. </a:t>
-            </a:r>
-          </a:p>
-        </p:txBody>
-      </p:sp>
+            <a:off x="111513" y="2015732"/>
+            <a:ext cx="4761570" cy="4037749"/>
+          </a:xfrm>
+        </p:spPr>
+        <p:txBody>
+          <a:bodyPr/>
+          <a:lstStyle/>
+          <a:p>
+            <a:r>
+              <a:rPr lang="en-US" dirty="0"/>
+              <a:t>A residual is how much one value is off from reality. </a:t>
+            </a:r>
+          </a:p>
+          <a:p>
+            <a:r>
+              <a:rPr lang="en-US" dirty="0"/>
+              <a:t>Each point in our data has its own residual – how “off” was the model vs that real value. </a:t>
+            </a:r>
+          </a:p>
+          <a:p>
+            <a:r>
+              <a:rPr lang="en-US" dirty="0"/>
+              <a:t>Here – </a:t>
+            </a:r>
+            <a:r>
+              <a:rPr lang="en-US" dirty="0" err="1"/>
+              <a:t>LoBF</a:t>
+            </a:r>
+            <a:r>
+              <a:rPr lang="en-US" dirty="0"/>
+              <a:t> is a model of the data.</a:t>
+            </a:r>
+          </a:p>
+        </p:txBody>
+      </p:sp>
+      <p:pic>
+        <p:nvPicPr>
+          <p:cNvPr id="4" name="Picture 3">
+            <a:extLst>
+              <a:ext uri="{FF2B5EF4-FFF2-40B4-BE49-F238E27FC236}">
+                <a16:creationId xmlns:a16="http://schemas.microsoft.com/office/drawing/2014/main" id="{D38F8C1F-A22D-924B-1803-6143A067A40C}"/>
+              </a:ext>
+            </a:extLst>
+          </p:cNvPr>
+          <p:cNvPicPr>
+            <a:picLocks noChangeAspect="1"/>
+          </p:cNvPicPr>
+          <p:nvPr/>
+        </p:nvPicPr>
+        <p:blipFill>
+          <a:blip r:embed="rId2"/>
+          <a:stretch>
+            <a:fillRect/>
+          </a:stretch>
+        </p:blipFill>
+        <p:spPr>
+          <a:xfrm>
+            <a:off x="4999492" y="1853754"/>
+            <a:ext cx="7140571" cy="4848129"/>
+          </a:xfrm>
+          <a:prstGeom prst="rect">
+            <a:avLst/>
+          </a:prstGeom>
+        </p:spPr>
+      </p:pic>
     </p:spTree>
     <p:extLst>
       <p:ext uri="{BB962C8B-B14F-4D97-AF65-F5344CB8AC3E}">
-        <p14:creationId xmlns:p14="http://schemas.microsoft.com/office/powerpoint/2010/main" val="3570164820"/>
+        <p14:creationId xmlns:p14="http://schemas.microsoft.com/office/powerpoint/2010/main" val="3811981501"/>
       </p:ext>
     </p:extLst>
   </p:cSld>
@@ -4138,7 +4082,7 @@
           <p:cNvPr id="2" name="Title 1">
             <a:extLst>
               <a:ext uri="{FF2B5EF4-FFF2-40B4-BE49-F238E27FC236}">
-                <a16:creationId xmlns:a16="http://schemas.microsoft.com/office/drawing/2014/main" id="{0D359CE7-4693-6CD4-9424-CF2757B5ECB0}"/>
+                <a16:creationId xmlns:a16="http://schemas.microsoft.com/office/drawing/2014/main" id="{41AFA2BA-264D-E3CA-EB08-A9F10BFD3E54}"/>
               </a:ext>
             </a:extLst>
           </p:cNvPr>
@@ -4156,7 +4100,7 @@
           <a:p>
             <a:r>
               <a:rPr lang="en-US" dirty="0"/>
-              <a:t>R-Squared</a:t>
+              <a:t>In Analytical Distributions</a:t>
             </a:r>
           </a:p>
         </p:txBody>
@@ -4166,7 +4110,7 @@
           <p:cNvPr id="3" name="Content Placeholder 2">
             <a:extLst>
               <a:ext uri="{FF2B5EF4-FFF2-40B4-BE49-F238E27FC236}">
-                <a16:creationId xmlns:a16="http://schemas.microsoft.com/office/drawing/2014/main" id="{7B48D358-DB04-D571-BCE4-C0FC85A2E2E6}"/>
+                <a16:creationId xmlns:a16="http://schemas.microsoft.com/office/drawing/2014/main" id="{14E14678-FC62-6CF2-A4FF-346E8C4DC145}"/>
               </a:ext>
             </a:extLst>
           </p:cNvPr>
@@ -4177,33 +4121,97 @@
             <p:ph idx="1"/>
           </p:nvPr>
         </p:nvSpPr>
-        <p:spPr/>
-        <p:txBody>
-          <a:bodyPr/>
-          <a:lstStyle/>
-          <a:p>
-            <a:r>
-              <a:rPr lang="en-US" dirty="0"/>
-              <a:t>R-squared is another measure of model quality. </a:t>
+        <p:spPr>
+          <a:xfrm>
+            <a:off x="1020199" y="2015732"/>
+            <a:ext cx="10034656" cy="4037749"/>
+          </a:xfrm>
+        </p:spPr>
+        <p:txBody>
+          <a:bodyPr/>
+          <a:lstStyle/>
+          <a:p>
+            <a:r>
+              <a:rPr lang="en-US" dirty="0"/>
+              <a:t>The idea of error works in the same way when matching empirical vs analytical distributions.</a:t>
             </a:r>
           </a:p>
           <a:p>
             <a:pPr lvl="1"/>
             <a:r>
               <a:rPr lang="en-US" dirty="0"/>
-              <a:t>Likely to pop-up if searching about this stuff. </a:t>
-            </a:r>
-          </a:p>
-          <a:p>
-            <a:r>
-              <a:rPr lang="en-US" dirty="0"/>
-              <a:t>We’ll deal with it later. </a:t>
-            </a:r>
-          </a:p>
-          <a:p>
-            <a:r>
-              <a:rPr lang="en-US" dirty="0"/>
-              <a:t>It is a measure of “how much” the model captures. </a:t>
+              <a:t>Empirical is the real data. </a:t>
+            </a:r>
+          </a:p>
+          <a:p>
+            <a:pPr lvl="1"/>
+            <a:r>
+              <a:rPr lang="en-US" dirty="0"/>
+              <a:t>The analytical distribution is the prediction.</a:t>
+            </a:r>
+          </a:p>
+          <a:p>
+            <a:r>
+              <a:rPr lang="en-US" dirty="0"/>
+              <a:t>E.g. Consider matching a lognormal looking distribution to the </a:t>
+            </a:r>
+            <a:r>
+              <a:rPr lang="en-US" dirty="0" err="1"/>
+              <a:t>lognorm</a:t>
+            </a:r>
+            <a:r>
+              <a:rPr lang="en-US" dirty="0"/>
+              <a:t> analytical one:</a:t>
+            </a:r>
+          </a:p>
+          <a:p>
+            <a:pPr lvl="1"/>
+            <a:r>
+              <a:rPr lang="en-US" dirty="0"/>
+              <a:t>Empirical data tells us how many values we have in a bin. </a:t>
+            </a:r>
+          </a:p>
+          <a:p>
+            <a:pPr lvl="1"/>
+            <a:r>
+              <a:rPr lang="en-US" dirty="0"/>
+              <a:t>The analytical distribution tells us how many we expect (if the data follows that </a:t>
+            </a:r>
+            <a:r>
+              <a:rPr lang="en-US" dirty="0" err="1"/>
+              <a:t>dist</a:t>
+            </a:r>
+            <a:r>
+              <a:rPr lang="en-US" dirty="0"/>
+              <a:t>). </a:t>
+            </a:r>
+          </a:p>
+          <a:p>
+            <a:pPr lvl="1"/>
+            <a:r>
+              <a:rPr lang="en-US" dirty="0"/>
+              <a:t>The difference between the two is the residual, or amount of error. </a:t>
+            </a:r>
+          </a:p>
+          <a:p>
+            <a:r>
+              <a:rPr lang="en-US" dirty="0"/>
+              <a:t>This error is the ‘</a:t>
+            </a:r>
+            <a:r>
+              <a:rPr lang="en-US" dirty="0" err="1"/>
+              <a:t>miss’</a:t>
+            </a:r>
+            <a:r>
+              <a:rPr lang="en-US" dirty="0"/>
+              <a:t> of the model – it isn’t capturing the empirical pattern accurately. </a:t>
+            </a:r>
+          </a:p>
+          <a:p>
+            <a:pPr lvl="1"/>
+            <a:r>
+              <a:rPr lang="en-US" dirty="0"/>
+              <a:t>This could be due to the model not fitting, or due to actual variation from normal in data. </a:t>
             </a:r>
           </a:p>
         </p:txBody>
@@ -4211,7 +4219,7 @@
     </p:spTree>
     <p:extLst>
       <p:ext uri="{BB962C8B-B14F-4D97-AF65-F5344CB8AC3E}">
-        <p14:creationId xmlns:p14="http://schemas.microsoft.com/office/powerpoint/2010/main" val="1528308286"/>
+        <p14:creationId xmlns:p14="http://schemas.microsoft.com/office/powerpoint/2010/main" val="193075141"/>
       </p:ext>
     </p:extLst>
   </p:cSld>
@@ -4243,6 +4251,977 @@
           <p:cNvPr id="2" name="Title 1">
             <a:extLst>
               <a:ext uri="{FF2B5EF4-FFF2-40B4-BE49-F238E27FC236}">
+                <a16:creationId xmlns:a16="http://schemas.microsoft.com/office/drawing/2014/main" id="{D9EE0CC7-13E3-E839-CD79-3E2C824204A1}"/>
+              </a:ext>
+            </a:extLst>
+          </p:cNvPr>
+          <p:cNvSpPr>
+            <a:spLocks noGrp="1"/>
+          </p:cNvSpPr>
+          <p:nvPr>
+            <p:ph type="title"/>
+          </p:nvPr>
+        </p:nvSpPr>
+        <p:spPr/>
+        <p:txBody>
+          <a:bodyPr/>
+          <a:lstStyle/>
+          <a:p>
+            <a:endParaRPr lang="en-US"/>
+          </a:p>
+        </p:txBody>
+      </p:sp>
+      <p:sp>
+        <p:nvSpPr>
+          <p:cNvPr id="3" name="Content Placeholder 2">
+            <a:extLst>
+              <a:ext uri="{FF2B5EF4-FFF2-40B4-BE49-F238E27FC236}">
+                <a16:creationId xmlns:a16="http://schemas.microsoft.com/office/drawing/2014/main" id="{E018A355-9E85-BB63-D825-EB997BE32FE4}"/>
+              </a:ext>
+            </a:extLst>
+          </p:cNvPr>
+          <p:cNvSpPr>
+            <a:spLocks noGrp="1"/>
+          </p:cNvSpPr>
+          <p:nvPr>
+            <p:ph idx="1"/>
+          </p:nvPr>
+        </p:nvSpPr>
+        <p:spPr/>
+        <p:txBody>
+          <a:bodyPr/>
+          <a:lstStyle/>
+          <a:p>
+            <a:endParaRPr lang="en-US"/>
+          </a:p>
+        </p:txBody>
+      </p:sp>
+      <p:pic>
+        <p:nvPicPr>
+          <p:cNvPr id="4" name="Picture 3">
+            <a:extLst>
+              <a:ext uri="{FF2B5EF4-FFF2-40B4-BE49-F238E27FC236}">
+                <a16:creationId xmlns:a16="http://schemas.microsoft.com/office/drawing/2014/main" id="{016E9D6D-B1E0-2455-A1E9-5F23DFE4B619}"/>
+              </a:ext>
+            </a:extLst>
+          </p:cNvPr>
+          <p:cNvPicPr>
+            <a:picLocks noChangeAspect="1"/>
+          </p:cNvPicPr>
+          <p:nvPr/>
+        </p:nvPicPr>
+        <p:blipFill>
+          <a:blip r:embed="rId2"/>
+          <a:stretch>
+            <a:fillRect/>
+          </a:stretch>
+        </p:blipFill>
+        <p:spPr>
+          <a:xfrm>
+            <a:off x="1137146" y="0"/>
+            <a:ext cx="9917708" cy="6892496"/>
+          </a:xfrm>
+          <a:prstGeom prst="rect">
+            <a:avLst/>
+          </a:prstGeom>
+        </p:spPr>
+      </p:pic>
+    </p:spTree>
+    <p:extLst>
+      <p:ext uri="{BB962C8B-B14F-4D97-AF65-F5344CB8AC3E}">
+        <p14:creationId xmlns:p14="http://schemas.microsoft.com/office/powerpoint/2010/main" val="3720487206"/>
+      </p:ext>
+    </p:extLst>
+  </p:cSld>
+  <p:clrMapOvr>
+    <a:masterClrMapping/>
+  </p:clrMapOvr>
+</p:sld>
+</file>
+
+<file path=ppt/slides/slide14.xml><?xml version="1.0" encoding="utf-8"?>
+<p:sld xmlns:a="http://schemas.openxmlformats.org/drawingml/2006/main" xmlns:r="http://schemas.openxmlformats.org/officeDocument/2006/relationships" xmlns:p="http://schemas.openxmlformats.org/presentationml/2006/main">
+  <p:cSld>
+    <p:spTree>
+      <p:nvGrpSpPr>
+        <p:cNvPr id="1" name=""/>
+        <p:cNvGrpSpPr/>
+        <p:nvPr/>
+      </p:nvGrpSpPr>
+      <p:grpSpPr>
+        <a:xfrm>
+          <a:off x="0" y="0"/>
+          <a:ext cx="0" cy="0"/>
+          <a:chOff x="0" y="0"/>
+          <a:chExt cx="0" cy="0"/>
+        </a:xfrm>
+      </p:grpSpPr>
+      <p:sp>
+        <p:nvSpPr>
+          <p:cNvPr id="2" name="Title 1">
+            <a:extLst>
+              <a:ext uri="{FF2B5EF4-FFF2-40B4-BE49-F238E27FC236}">
+                <a16:creationId xmlns:a16="http://schemas.microsoft.com/office/drawing/2014/main" id="{7EF9860B-DFF8-D259-8D4D-4227B9F0AE3A}"/>
+              </a:ext>
+            </a:extLst>
+          </p:cNvPr>
+          <p:cNvSpPr>
+            <a:spLocks noGrp="1"/>
+          </p:cNvSpPr>
+          <p:nvPr>
+            <p:ph type="title"/>
+          </p:nvPr>
+        </p:nvSpPr>
+        <p:spPr/>
+        <p:txBody>
+          <a:bodyPr/>
+          <a:lstStyle/>
+          <a:p>
+            <a:r>
+              <a:rPr lang="en-US" dirty="0"/>
+              <a:t>Calculating Residuals</a:t>
+            </a:r>
+          </a:p>
+        </p:txBody>
+      </p:sp>
+      <p:sp>
+        <p:nvSpPr>
+          <p:cNvPr id="3" name="Content Placeholder 2">
+            <a:extLst>
+              <a:ext uri="{FF2B5EF4-FFF2-40B4-BE49-F238E27FC236}">
+                <a16:creationId xmlns:a16="http://schemas.microsoft.com/office/drawing/2014/main" id="{377B42DD-CEC8-F15F-D887-AE5B66FD5DA7}"/>
+              </a:ext>
+            </a:extLst>
+          </p:cNvPr>
+          <p:cNvSpPr>
+            <a:spLocks noGrp="1"/>
+          </p:cNvSpPr>
+          <p:nvPr>
+            <p:ph idx="1"/>
+          </p:nvPr>
+        </p:nvSpPr>
+        <p:spPr>
+          <a:xfrm>
+            <a:off x="181369" y="2015732"/>
+            <a:ext cx="4080793" cy="4120572"/>
+          </a:xfrm>
+        </p:spPr>
+        <p:txBody>
+          <a:bodyPr>
+            <a:normAutofit/>
+          </a:bodyPr>
+          <a:lstStyle/>
+          <a:p>
+            <a:r>
+              <a:rPr lang="en-US" dirty="0"/>
+              <a:t>If we have an expectation (analytical model, ML prediction, guess) and a true (empirical) value, we can calculate the residual. </a:t>
+            </a:r>
+          </a:p>
+          <a:p>
+            <a:r>
+              <a:rPr lang="en-US" dirty="0"/>
+              <a:t>At each empirical point, how accurate is the model? </a:t>
+            </a:r>
+          </a:p>
+          <a:p>
+            <a:r>
+              <a:rPr lang="en-US" dirty="0"/>
+              <a:t>We get one residual for each row of data (point):</a:t>
+            </a:r>
+          </a:p>
+          <a:p>
+            <a:pPr lvl="1"/>
+            <a:r>
+              <a:rPr lang="en-US" dirty="0" err="1"/>
+              <a:t>Y_predicted</a:t>
+            </a:r>
+            <a:r>
+              <a:rPr lang="en-US" dirty="0"/>
+              <a:t> – </a:t>
+            </a:r>
+            <a:r>
+              <a:rPr lang="en-US" dirty="0" err="1"/>
+              <a:t>Y_actual</a:t>
+            </a:r>
+            <a:endParaRPr lang="en-US" dirty="0"/>
+          </a:p>
+          <a:p>
+            <a:pPr lvl="1"/>
+            <a:endParaRPr lang="en-US" dirty="0"/>
+          </a:p>
+        </p:txBody>
+      </p:sp>
+      <p:pic>
+        <p:nvPicPr>
+          <p:cNvPr id="2050" name="Picture 2" descr="Residual Plots Unit #8 - Statistics. - ppt video online download">
+            <a:extLst>
+              <a:ext uri="{FF2B5EF4-FFF2-40B4-BE49-F238E27FC236}">
+                <a16:creationId xmlns:a16="http://schemas.microsoft.com/office/drawing/2014/main" id="{DC915E80-688C-ECF9-B4E3-140FCB08D755}"/>
+              </a:ext>
+            </a:extLst>
+          </p:cNvPr>
+          <p:cNvPicPr>
+            <a:picLocks noChangeAspect="1" noChangeArrowheads="1"/>
+          </p:cNvPicPr>
+          <p:nvPr/>
+        </p:nvPicPr>
+        <p:blipFill rotWithShape="1">
+          <a:blip r:embed="rId2">
+            <a:extLst>
+              <a:ext uri="{28A0092B-C50C-407E-A947-70E740481C1C}">
+                <a14:useLocalDpi xmlns:a14="http://schemas.microsoft.com/office/drawing/2010/main" val="0"/>
+              </a:ext>
+            </a:extLst>
+          </a:blip>
+          <a:srcRect b="7548"/>
+          <a:stretch/>
+        </p:blipFill>
+        <p:spPr bwMode="auto">
+          <a:xfrm>
+            <a:off x="4426684" y="1473620"/>
+            <a:ext cx="7765315" cy="5384380"/>
+          </a:xfrm>
+          <a:prstGeom prst="rect">
+            <a:avLst/>
+          </a:prstGeom>
+          <a:noFill/>
+          <a:extLst>
+            <a:ext uri="{909E8E84-426E-40DD-AFC4-6F175D3DCCD1}">
+              <a14:hiddenFill xmlns:a14="http://schemas.microsoft.com/office/drawing/2010/main">
+                <a:solidFill>
+                  <a:srgbClr val="FFFFFF"/>
+                </a:solidFill>
+              </a14:hiddenFill>
+            </a:ext>
+          </a:extLst>
+        </p:spPr>
+      </p:pic>
+    </p:spTree>
+    <p:extLst>
+      <p:ext uri="{BB962C8B-B14F-4D97-AF65-F5344CB8AC3E}">
+        <p14:creationId xmlns:p14="http://schemas.microsoft.com/office/powerpoint/2010/main" val="1590843819"/>
+      </p:ext>
+    </p:extLst>
+  </p:cSld>
+  <p:clrMapOvr>
+    <a:masterClrMapping/>
+  </p:clrMapOvr>
+</p:sld>
+</file>
+
+<file path=ppt/slides/slide15.xml><?xml version="1.0" encoding="utf-8"?>
+<p:sld xmlns:a="http://schemas.openxmlformats.org/drawingml/2006/main" xmlns:r="http://schemas.openxmlformats.org/officeDocument/2006/relationships" xmlns:p="http://schemas.openxmlformats.org/presentationml/2006/main">
+  <p:cSld>
+    <p:spTree>
+      <p:nvGrpSpPr>
+        <p:cNvPr id="1" name=""/>
+        <p:cNvGrpSpPr/>
+        <p:nvPr/>
+      </p:nvGrpSpPr>
+      <p:grpSpPr>
+        <a:xfrm>
+          <a:off x="0" y="0"/>
+          <a:ext cx="0" cy="0"/>
+          <a:chOff x="0" y="0"/>
+          <a:chExt cx="0" cy="0"/>
+        </a:xfrm>
+      </p:grpSpPr>
+      <p:sp>
+        <p:nvSpPr>
+          <p:cNvPr id="2" name="Title 1">
+            <a:extLst>
+              <a:ext uri="{FF2B5EF4-FFF2-40B4-BE49-F238E27FC236}">
+                <a16:creationId xmlns:a16="http://schemas.microsoft.com/office/drawing/2014/main" id="{387B9AE9-C7BA-7C94-52F0-B3F727BF728E}"/>
+              </a:ext>
+            </a:extLst>
+          </p:cNvPr>
+          <p:cNvSpPr>
+            <a:spLocks noGrp="1"/>
+          </p:cNvSpPr>
+          <p:nvPr>
+            <p:ph type="title"/>
+          </p:nvPr>
+        </p:nvSpPr>
+        <p:spPr/>
+        <p:txBody>
+          <a:bodyPr/>
+          <a:lstStyle/>
+          <a:p>
+            <a:r>
+              <a:rPr lang="en-US" dirty="0"/>
+              <a:t>Summarization of Errors</a:t>
+            </a:r>
+          </a:p>
+        </p:txBody>
+      </p:sp>
+      <p:sp>
+        <p:nvSpPr>
+          <p:cNvPr id="3" name="Content Placeholder 2">
+            <a:extLst>
+              <a:ext uri="{FF2B5EF4-FFF2-40B4-BE49-F238E27FC236}">
+                <a16:creationId xmlns:a16="http://schemas.microsoft.com/office/drawing/2014/main" id="{3436DCAA-7675-6826-7BFF-726EC4BF5418}"/>
+              </a:ext>
+            </a:extLst>
+          </p:cNvPr>
+          <p:cNvSpPr>
+            <a:spLocks noGrp="1"/>
+          </p:cNvSpPr>
+          <p:nvPr>
+            <p:ph idx="1"/>
+          </p:nvPr>
+        </p:nvSpPr>
+        <p:spPr>
+          <a:xfrm>
+            <a:off x="144967" y="1934598"/>
+            <a:ext cx="10909888" cy="4198573"/>
+          </a:xfrm>
+        </p:spPr>
+        <p:txBody>
+          <a:bodyPr>
+            <a:normAutofit/>
+          </a:bodyPr>
+          <a:lstStyle/>
+          <a:p>
+            <a:r>
+              <a:rPr lang="en-US" dirty="0"/>
+              <a:t>When dealing with many points, a list of residuals is impractical. </a:t>
+            </a:r>
+          </a:p>
+          <a:p>
+            <a:pPr lvl="1"/>
+            <a:r>
+              <a:rPr lang="en-US" dirty="0"/>
+              <a:t>Think of a dataset with 10,000,000 rows – a list of that many residuals is impractical. </a:t>
+            </a:r>
+          </a:p>
+          <a:p>
+            <a:r>
+              <a:rPr lang="en-US" dirty="0"/>
+              <a:t>We can summarize residuals into one measure of error. </a:t>
+            </a:r>
+          </a:p>
+          <a:p>
+            <a:r>
+              <a:rPr lang="en-US" dirty="0"/>
+              <a:t>There are several ways to summarize error, e.g.</a:t>
+            </a:r>
+          </a:p>
+          <a:p>
+            <a:pPr lvl="1"/>
+            <a:r>
+              <a:rPr lang="en-US" dirty="0"/>
+              <a:t>MSE – Mean squared error. Square residuals and average them.</a:t>
+            </a:r>
+          </a:p>
+          <a:p>
+            <a:pPr lvl="1"/>
+            <a:r>
+              <a:rPr lang="en-US" dirty="0"/>
+              <a:t>RMSE – Root mean squared error. Take the square root of MSE. </a:t>
+            </a:r>
+          </a:p>
+          <a:p>
+            <a:pPr lvl="1"/>
+            <a:r>
+              <a:rPr lang="en-US" dirty="0"/>
+              <a:t>MAE – Mean absolute error. Average the absolute values of the residuals. </a:t>
+            </a:r>
+          </a:p>
+          <a:p>
+            <a:r>
+              <a:rPr lang="en-US" dirty="0"/>
+              <a:t>RMSE (or MSE) is the most common error measure for us. </a:t>
+            </a:r>
+          </a:p>
+          <a:p>
+            <a:r>
+              <a:rPr lang="en-US" dirty="0"/>
+              <a:t>Lower error amounts tell us that the model and the empirical are similar. </a:t>
+            </a:r>
+          </a:p>
+        </p:txBody>
+      </p:sp>
+      <p:pic>
+        <p:nvPicPr>
+          <p:cNvPr id="5122" name="Picture 2" descr="Essential Regression Evaluation Metrics: MSE, RMSE, MAE, R², and Adjusted  R² | by FARSHAD K | Medium">
+            <a:extLst>
+              <a:ext uri="{FF2B5EF4-FFF2-40B4-BE49-F238E27FC236}">
+                <a16:creationId xmlns:a16="http://schemas.microsoft.com/office/drawing/2014/main" id="{0BE68346-45FF-C8FD-AD8E-1C10139C6281}"/>
+              </a:ext>
+            </a:extLst>
+          </p:cNvPr>
+          <p:cNvPicPr>
+            <a:picLocks noChangeAspect="1" noChangeArrowheads="1"/>
+          </p:cNvPicPr>
+          <p:nvPr/>
+        </p:nvPicPr>
+        <p:blipFill rotWithShape="1">
+          <a:blip r:embed="rId2">
+            <a:extLst>
+              <a:ext uri="{28A0092B-C50C-407E-A947-70E740481C1C}">
+                <a14:useLocalDpi xmlns:a14="http://schemas.microsoft.com/office/drawing/2010/main" val="0"/>
+              </a:ext>
+            </a:extLst>
+          </a:blip>
+          <a:srcRect t="15073" b="18406"/>
+          <a:stretch>
+            <a:fillRect/>
+          </a:stretch>
+        </p:blipFill>
+        <p:spPr bwMode="auto">
+          <a:xfrm>
+            <a:off x="7251699" y="2725189"/>
+            <a:ext cx="4940301" cy="1848585"/>
+          </a:xfrm>
+          <a:prstGeom prst="rect">
+            <a:avLst/>
+          </a:prstGeom>
+          <a:noFill/>
+          <a:extLst>
+            <a:ext uri="{909E8E84-426E-40DD-AFC4-6F175D3DCCD1}">
+              <a14:hiddenFill xmlns:a14="http://schemas.microsoft.com/office/drawing/2010/main">
+                <a:solidFill>
+                  <a:srgbClr val="FFFFFF"/>
+                </a:solidFill>
+              </a14:hiddenFill>
+            </a:ext>
+          </a:extLst>
+        </p:spPr>
+      </p:pic>
+    </p:spTree>
+    <p:extLst>
+      <p:ext uri="{BB962C8B-B14F-4D97-AF65-F5344CB8AC3E}">
+        <p14:creationId xmlns:p14="http://schemas.microsoft.com/office/powerpoint/2010/main" val="3737122044"/>
+      </p:ext>
+    </p:extLst>
+  </p:cSld>
+  <p:clrMapOvr>
+    <a:masterClrMapping/>
+  </p:clrMapOvr>
+</p:sld>
+</file>
+
+<file path=ppt/slides/slide16.xml><?xml version="1.0" encoding="utf-8"?>
+<p:sld xmlns:a="http://schemas.openxmlformats.org/drawingml/2006/main" xmlns:r="http://schemas.openxmlformats.org/officeDocument/2006/relationships" xmlns:p="http://schemas.openxmlformats.org/presentationml/2006/main">
+  <p:cSld>
+    <p:spTree>
+      <p:nvGrpSpPr>
+        <p:cNvPr id="1" name=""/>
+        <p:cNvGrpSpPr/>
+        <p:nvPr/>
+      </p:nvGrpSpPr>
+      <p:grpSpPr>
+        <a:xfrm>
+          <a:off x="0" y="0"/>
+          <a:ext cx="0" cy="0"/>
+          <a:chOff x="0" y="0"/>
+          <a:chExt cx="0" cy="0"/>
+        </a:xfrm>
+      </p:grpSpPr>
+      <p:sp>
+        <p:nvSpPr>
+          <p:cNvPr id="2" name="Title 1">
+            <a:extLst>
+              <a:ext uri="{FF2B5EF4-FFF2-40B4-BE49-F238E27FC236}">
+                <a16:creationId xmlns:a16="http://schemas.microsoft.com/office/drawing/2014/main" id="{E9356086-BE05-B01B-10A4-6D1976445E25}"/>
+              </a:ext>
+            </a:extLst>
+          </p:cNvPr>
+          <p:cNvSpPr>
+            <a:spLocks noGrp="1"/>
+          </p:cNvSpPr>
+          <p:nvPr>
+            <p:ph type="title"/>
+          </p:nvPr>
+        </p:nvSpPr>
+        <p:spPr/>
+        <p:txBody>
+          <a:bodyPr/>
+          <a:lstStyle/>
+          <a:p>
+            <a:r>
+              <a:rPr lang="en-US" dirty="0"/>
+              <a:t>Why Squared?</a:t>
+            </a:r>
+          </a:p>
+        </p:txBody>
+      </p:sp>
+      <p:sp>
+        <p:nvSpPr>
+          <p:cNvPr id="3" name="Content Placeholder 2">
+            <a:extLst>
+              <a:ext uri="{FF2B5EF4-FFF2-40B4-BE49-F238E27FC236}">
+                <a16:creationId xmlns:a16="http://schemas.microsoft.com/office/drawing/2014/main" id="{BC34DD8C-2FBC-A875-6B61-74B2788B9CD3}"/>
+              </a:ext>
+            </a:extLst>
+          </p:cNvPr>
+          <p:cNvSpPr>
+            <a:spLocks noGrp="1"/>
+          </p:cNvSpPr>
+          <p:nvPr>
+            <p:ph idx="1"/>
+          </p:nvPr>
+        </p:nvSpPr>
+        <p:spPr>
+          <a:xfrm>
+            <a:off x="1451579" y="2015732"/>
+            <a:ext cx="9603275" cy="4037749"/>
+          </a:xfrm>
+        </p:spPr>
+        <p:txBody>
+          <a:bodyPr>
+            <a:normAutofit lnSpcReduction="10000"/>
+          </a:bodyPr>
+          <a:lstStyle/>
+          <a:p>
+            <a:r>
+              <a:rPr lang="en-US" dirty="0"/>
+              <a:t>The error measures either squared or took the absolute value of the residual. </a:t>
+            </a:r>
+          </a:p>
+          <a:p>
+            <a:r>
+              <a:rPr lang="en-US" dirty="0"/>
+              <a:t>Squaring does a couple of things:</a:t>
+            </a:r>
+          </a:p>
+          <a:p>
+            <a:pPr lvl="1"/>
+            <a:r>
+              <a:rPr lang="en-US" dirty="0"/>
+              <a:t>Eliminates negatives. We get a measure of the magnitude. (MAE* also does this.)</a:t>
+            </a:r>
+          </a:p>
+          <a:p>
+            <a:pPr lvl="1"/>
+            <a:r>
+              <a:rPr lang="en-US" dirty="0"/>
+              <a:t>Penalizes large residuals. </a:t>
+            </a:r>
+          </a:p>
+          <a:p>
+            <a:r>
+              <a:rPr lang="en-US" dirty="0"/>
+              <a:t>Having residuals that are small are good, even though they’ll never be perfect. </a:t>
+            </a:r>
+          </a:p>
+          <a:p>
+            <a:r>
+              <a:rPr lang="en-US" dirty="0"/>
+              <a:t>Having large residuals indicates massive misses. </a:t>
+            </a:r>
+          </a:p>
+          <a:p>
+            <a:r>
+              <a:rPr lang="en-US" dirty="0"/>
+              <a:t>MSE/RMSE tends to reward models without many large residuals. </a:t>
+            </a:r>
+          </a:p>
+          <a:p>
+            <a:pPr lvl="1"/>
+            <a:r>
+              <a:rPr lang="en-US" dirty="0"/>
+              <a:t>Few large misses. </a:t>
+            </a:r>
+          </a:p>
+          <a:p>
+            <a:r>
+              <a:rPr lang="en-US" dirty="0"/>
+              <a:t>*Absolute values make for weird math, which is one reason it is less common. </a:t>
+            </a:r>
+          </a:p>
+        </p:txBody>
+      </p:sp>
+    </p:spTree>
+    <p:extLst>
+      <p:ext uri="{BB962C8B-B14F-4D97-AF65-F5344CB8AC3E}">
+        <p14:creationId xmlns:p14="http://schemas.microsoft.com/office/powerpoint/2010/main" val="3570164820"/>
+      </p:ext>
+    </p:extLst>
+  </p:cSld>
+  <p:clrMapOvr>
+    <a:masterClrMapping/>
+  </p:clrMapOvr>
+</p:sld>
+</file>
+
+<file path=ppt/slides/slide17.xml><?xml version="1.0" encoding="utf-8"?>
+<p:sld xmlns:a="http://schemas.openxmlformats.org/drawingml/2006/main" xmlns:r="http://schemas.openxmlformats.org/officeDocument/2006/relationships" xmlns:p="http://schemas.openxmlformats.org/presentationml/2006/main">
+  <p:cSld>
+    <p:spTree>
+      <p:nvGrpSpPr>
+        <p:cNvPr id="1" name=""/>
+        <p:cNvGrpSpPr/>
+        <p:nvPr/>
+      </p:nvGrpSpPr>
+      <p:grpSpPr>
+        <a:xfrm>
+          <a:off x="0" y="0"/>
+          <a:ext cx="0" cy="0"/>
+          <a:chOff x="0" y="0"/>
+          <a:chExt cx="0" cy="0"/>
+        </a:xfrm>
+      </p:grpSpPr>
+      <p:sp>
+        <p:nvSpPr>
+          <p:cNvPr id="2" name="Title 1">
+            <a:extLst>
+              <a:ext uri="{FF2B5EF4-FFF2-40B4-BE49-F238E27FC236}">
+                <a16:creationId xmlns:a16="http://schemas.microsoft.com/office/drawing/2014/main" id="{F8D0BEBB-87B6-B031-54D9-7E3DD180EFBA}"/>
+              </a:ext>
+            </a:extLst>
+          </p:cNvPr>
+          <p:cNvSpPr>
+            <a:spLocks noGrp="1"/>
+          </p:cNvSpPr>
+          <p:nvPr>
+            <p:ph type="title"/>
+          </p:nvPr>
+        </p:nvSpPr>
+        <p:spPr/>
+        <p:txBody>
+          <a:bodyPr/>
+          <a:lstStyle/>
+          <a:p>
+            <a:r>
+              <a:rPr lang="en-US" dirty="0"/>
+              <a:t>Where’s the Error From?</a:t>
+            </a:r>
+          </a:p>
+        </p:txBody>
+      </p:sp>
+      <p:sp>
+        <p:nvSpPr>
+          <p:cNvPr id="3" name="Content Placeholder 2">
+            <a:extLst>
+              <a:ext uri="{FF2B5EF4-FFF2-40B4-BE49-F238E27FC236}">
+                <a16:creationId xmlns:a16="http://schemas.microsoft.com/office/drawing/2014/main" id="{B6092BB6-929A-CCAA-B290-DA2EB966A7B5}"/>
+              </a:ext>
+            </a:extLst>
+          </p:cNvPr>
+          <p:cNvSpPr>
+            <a:spLocks noGrp="1"/>
+          </p:cNvSpPr>
+          <p:nvPr>
+            <p:ph idx="1"/>
+          </p:nvPr>
+        </p:nvSpPr>
+        <p:spPr>
+          <a:xfrm>
+            <a:off x="5724497" y="1853754"/>
+            <a:ext cx="6467503" cy="4199727"/>
+          </a:xfrm>
+        </p:spPr>
+        <p:txBody>
+          <a:bodyPr>
+            <a:normAutofit/>
+          </a:bodyPr>
+          <a:lstStyle/>
+          <a:p>
+            <a:r>
+              <a:rPr lang="en-US" dirty="0"/>
+              <a:t>Error is just the difference between model and empirical. </a:t>
+            </a:r>
+          </a:p>
+          <a:p>
+            <a:pPr lvl="1"/>
+            <a:r>
+              <a:rPr lang="en-US" dirty="0"/>
+              <a:t>This isn’t an absolute statement of ‘truth’. </a:t>
+            </a:r>
+          </a:p>
+          <a:p>
+            <a:pPr lvl="1"/>
+            <a:r>
+              <a:rPr lang="en-US" dirty="0"/>
+              <a:t>Models are always approximations. </a:t>
+            </a:r>
+          </a:p>
+          <a:p>
+            <a:pPr lvl="1"/>
+            <a:r>
+              <a:rPr lang="en-US" dirty="0" err="1"/>
+              <a:t>A.k.a</a:t>
+            </a:r>
+            <a:r>
+              <a:rPr lang="en-US" dirty="0"/>
+              <a:t> difference between expectation and empirical. </a:t>
+            </a:r>
+          </a:p>
+          <a:p>
+            <a:r>
+              <a:rPr lang="en-US" dirty="0"/>
+              <a:t>Still need judgement. </a:t>
+            </a:r>
+          </a:p>
+          <a:p>
+            <a:pPr lvl="1"/>
+            <a:r>
+              <a:rPr lang="en-US" dirty="0"/>
+              <a:t>Is model good and data odd, or do we have wrong model? </a:t>
+            </a:r>
+          </a:p>
+          <a:p>
+            <a:r>
+              <a:rPr lang="en-US" dirty="0"/>
+              <a:t>E.g. are there actually more 9.5 and 12-13 people in reality or did we just randomly get a few more in our sample. </a:t>
+            </a:r>
+          </a:p>
+          <a:p>
+            <a:pPr lvl="1"/>
+            <a:r>
+              <a:rPr lang="en-US" dirty="0"/>
+              <a:t>Maybe model should be slightly fatter. </a:t>
+            </a:r>
+          </a:p>
+        </p:txBody>
+      </p:sp>
+      <p:pic>
+        <p:nvPicPr>
+          <p:cNvPr id="6146" name="Picture 2" descr="Distribution Of Men's Shoe Sizes | Fila Men's Galvanize Chef Providers Shoes">
+            <a:extLst>
+              <a:ext uri="{FF2B5EF4-FFF2-40B4-BE49-F238E27FC236}">
+                <a16:creationId xmlns:a16="http://schemas.microsoft.com/office/drawing/2014/main" id="{93598D7A-D7B3-5B9D-E376-FBC20D75F549}"/>
+              </a:ext>
+            </a:extLst>
+          </p:cNvPr>
+          <p:cNvPicPr>
+            <a:picLocks noChangeAspect="1" noChangeArrowheads="1"/>
+          </p:cNvPicPr>
+          <p:nvPr/>
+        </p:nvPicPr>
+        <p:blipFill>
+          <a:blip r:embed="rId2">
+            <a:extLst>
+              <a:ext uri="{28A0092B-C50C-407E-A947-70E740481C1C}">
+                <a14:useLocalDpi xmlns:a14="http://schemas.microsoft.com/office/drawing/2010/main" val="0"/>
+              </a:ext>
+            </a:extLst>
+          </a:blip>
+          <a:srcRect/>
+          <a:stretch>
+            <a:fillRect/>
+          </a:stretch>
+        </p:blipFill>
+        <p:spPr bwMode="auto">
+          <a:xfrm>
+            <a:off x="0" y="2146852"/>
+            <a:ext cx="5724497" cy="3866023"/>
+          </a:xfrm>
+          <a:prstGeom prst="rect">
+            <a:avLst/>
+          </a:prstGeom>
+          <a:noFill/>
+          <a:extLst>
+            <a:ext uri="{909E8E84-426E-40DD-AFC4-6F175D3DCCD1}">
+              <a14:hiddenFill xmlns:a14="http://schemas.microsoft.com/office/drawing/2010/main">
+                <a:solidFill>
+                  <a:srgbClr val="FFFFFF"/>
+                </a:solidFill>
+              </a14:hiddenFill>
+            </a:ext>
+          </a:extLst>
+        </p:spPr>
+      </p:pic>
+    </p:spTree>
+    <p:extLst>
+      <p:ext uri="{BB962C8B-B14F-4D97-AF65-F5344CB8AC3E}">
+        <p14:creationId xmlns:p14="http://schemas.microsoft.com/office/powerpoint/2010/main" val="3150067890"/>
+      </p:ext>
+    </p:extLst>
+  </p:cSld>
+  <p:clrMapOvr>
+    <a:masterClrMapping/>
+  </p:clrMapOvr>
+</p:sld>
+</file>
+
+<file path=ppt/slides/slide18.xml><?xml version="1.0" encoding="utf-8"?>
+<p:sld xmlns:a="http://schemas.openxmlformats.org/drawingml/2006/main" xmlns:r="http://schemas.openxmlformats.org/officeDocument/2006/relationships" xmlns:p="http://schemas.openxmlformats.org/presentationml/2006/main">
+  <p:cSld>
+    <p:spTree>
+      <p:nvGrpSpPr>
+        <p:cNvPr id="1" name=""/>
+        <p:cNvGrpSpPr/>
+        <p:nvPr/>
+      </p:nvGrpSpPr>
+      <p:grpSpPr>
+        <a:xfrm>
+          <a:off x="0" y="0"/>
+          <a:ext cx="0" cy="0"/>
+          <a:chOff x="0" y="0"/>
+          <a:chExt cx="0" cy="0"/>
+        </a:xfrm>
+      </p:grpSpPr>
+      <p:sp>
+        <p:nvSpPr>
+          <p:cNvPr id="2" name="Title 1">
+            <a:extLst>
+              <a:ext uri="{FF2B5EF4-FFF2-40B4-BE49-F238E27FC236}">
+                <a16:creationId xmlns:a16="http://schemas.microsoft.com/office/drawing/2014/main" id="{0D359CE7-4693-6CD4-9424-CF2757B5ECB0}"/>
+              </a:ext>
+            </a:extLst>
+          </p:cNvPr>
+          <p:cNvSpPr>
+            <a:spLocks noGrp="1"/>
+          </p:cNvSpPr>
+          <p:nvPr>
+            <p:ph type="title"/>
+          </p:nvPr>
+        </p:nvSpPr>
+        <p:spPr/>
+        <p:txBody>
+          <a:bodyPr/>
+          <a:lstStyle/>
+          <a:p>
+            <a:r>
+              <a:rPr lang="en-US" dirty="0"/>
+              <a:t>R-Squared</a:t>
+            </a:r>
+          </a:p>
+        </p:txBody>
+      </p:sp>
+      <p:sp>
+        <p:nvSpPr>
+          <p:cNvPr id="3" name="Content Placeholder 2">
+            <a:extLst>
+              <a:ext uri="{FF2B5EF4-FFF2-40B4-BE49-F238E27FC236}">
+                <a16:creationId xmlns:a16="http://schemas.microsoft.com/office/drawing/2014/main" id="{7B48D358-DB04-D571-BCE4-C0FC85A2E2E6}"/>
+              </a:ext>
+            </a:extLst>
+          </p:cNvPr>
+          <p:cNvSpPr>
+            <a:spLocks noGrp="1"/>
+          </p:cNvSpPr>
+          <p:nvPr>
+            <p:ph idx="1"/>
+          </p:nvPr>
+        </p:nvSpPr>
+        <p:spPr>
+          <a:xfrm>
+            <a:off x="1451579" y="1853755"/>
+            <a:ext cx="9603275" cy="2251106"/>
+          </a:xfrm>
+        </p:spPr>
+        <p:txBody>
+          <a:bodyPr/>
+          <a:lstStyle/>
+          <a:p>
+            <a:r>
+              <a:rPr lang="en-US" dirty="0"/>
+              <a:t>R-squared is another measure of model quality. </a:t>
+            </a:r>
+          </a:p>
+          <a:p>
+            <a:pPr lvl="1"/>
+            <a:r>
+              <a:rPr lang="en-US" dirty="0"/>
+              <a:t>Likely to pop-up if searching about this stuff. </a:t>
+            </a:r>
+          </a:p>
+          <a:p>
+            <a:pPr lvl="1"/>
+            <a:r>
+              <a:rPr lang="en-US" dirty="0"/>
+              <a:t>Correlation squared. </a:t>
+            </a:r>
+          </a:p>
+          <a:p>
+            <a:r>
+              <a:rPr lang="en-US" dirty="0"/>
+              <a:t>We’ll deal with it later. </a:t>
+            </a:r>
+          </a:p>
+          <a:p>
+            <a:r>
+              <a:rPr lang="en-US" dirty="0"/>
+              <a:t>It is a measure of “how much” the model captures. </a:t>
+            </a:r>
+          </a:p>
+        </p:txBody>
+      </p:sp>
+      <p:pic>
+        <p:nvPicPr>
+          <p:cNvPr id="7170" name="Picture 2" descr="correlation - Simple linear regression: R2 not equal to squared Pearson  coefficient - Cross Validated">
+            <a:extLst>
+              <a:ext uri="{FF2B5EF4-FFF2-40B4-BE49-F238E27FC236}">
+                <a16:creationId xmlns:a16="http://schemas.microsoft.com/office/drawing/2014/main" id="{F175385C-E90F-6ECE-835F-9FF4C5382CAF}"/>
+              </a:ext>
+            </a:extLst>
+          </p:cNvPr>
+          <p:cNvPicPr>
+            <a:picLocks noChangeAspect="1" noChangeArrowheads="1"/>
+          </p:cNvPicPr>
+          <p:nvPr/>
+        </p:nvPicPr>
+        <p:blipFill>
+          <a:blip r:embed="rId2">
+            <a:extLst>
+              <a:ext uri="{28A0092B-C50C-407E-A947-70E740481C1C}">
+                <a14:useLocalDpi xmlns:a14="http://schemas.microsoft.com/office/drawing/2010/main" val="0"/>
+              </a:ext>
+            </a:extLst>
+          </a:blip>
+          <a:srcRect/>
+          <a:stretch>
+            <a:fillRect/>
+          </a:stretch>
+        </p:blipFill>
+        <p:spPr bwMode="auto">
+          <a:xfrm>
+            <a:off x="2552634" y="4104860"/>
+            <a:ext cx="8187787" cy="2681287"/>
+          </a:xfrm>
+          <a:prstGeom prst="rect">
+            <a:avLst/>
+          </a:prstGeom>
+          <a:noFill/>
+          <a:extLst>
+            <a:ext uri="{909E8E84-426E-40DD-AFC4-6F175D3DCCD1}">
+              <a14:hiddenFill xmlns:a14="http://schemas.microsoft.com/office/drawing/2010/main">
+                <a:solidFill>
+                  <a:srgbClr val="FFFFFF"/>
+                </a:solidFill>
+              </a14:hiddenFill>
+            </a:ext>
+          </a:extLst>
+        </p:spPr>
+      </p:pic>
+    </p:spTree>
+    <p:extLst>
+      <p:ext uri="{BB962C8B-B14F-4D97-AF65-F5344CB8AC3E}">
+        <p14:creationId xmlns:p14="http://schemas.microsoft.com/office/powerpoint/2010/main" val="1528308286"/>
+      </p:ext>
+    </p:extLst>
+  </p:cSld>
+  <p:clrMapOvr>
+    <a:masterClrMapping/>
+  </p:clrMapOvr>
+</p:sld>
+</file>
+
+<file path=ppt/slides/slide19.xml><?xml version="1.0" encoding="utf-8"?>
+<p:sld xmlns:a="http://schemas.openxmlformats.org/drawingml/2006/main" xmlns:r="http://schemas.openxmlformats.org/officeDocument/2006/relationships" xmlns:p="http://schemas.openxmlformats.org/presentationml/2006/main">
+  <p:cSld>
+    <p:spTree>
+      <p:nvGrpSpPr>
+        <p:cNvPr id="1" name=""/>
+        <p:cNvGrpSpPr/>
+        <p:nvPr/>
+      </p:nvGrpSpPr>
+      <p:grpSpPr>
+        <a:xfrm>
+          <a:off x="0" y="0"/>
+          <a:ext cx="0" cy="0"/>
+          <a:chOff x="0" y="0"/>
+          <a:chExt cx="0" cy="0"/>
+        </a:xfrm>
+      </p:grpSpPr>
+      <p:sp>
+        <p:nvSpPr>
+          <p:cNvPr id="2" name="Title 1">
+            <a:extLst>
+              <a:ext uri="{FF2B5EF4-FFF2-40B4-BE49-F238E27FC236}">
                 <a16:creationId xmlns:a16="http://schemas.microsoft.com/office/drawing/2014/main" id="{2568E2FB-8FB8-AFFD-AF14-EB856BEDBEDD}"/>
               </a:ext>
             </a:extLst>
@@ -4284,7 +5263,9 @@
         </p:nvSpPr>
         <p:spPr/>
         <p:txBody>
-          <a:bodyPr/>
+          <a:bodyPr>
+            <a:normAutofit lnSpcReduction="10000"/>
+          </a:bodyPr>
           <a:lstStyle/>
           <a:p>
             <a:r>
@@ -4306,6 +5287,18 @@
             </a:r>
           </a:p>
           <a:p>
+            <a:pPr lvl="1"/>
+            <a:r>
+              <a:rPr lang="en-US" dirty="0"/>
+              <a:t>Data isn’t cosmically bound to follow a distribution, we </a:t>
+            </a:r>
+            <a:r>
+              <a:rPr lang="en-US"/>
+              <a:t>are approximating. </a:t>
+            </a:r>
+            <a:endParaRPr lang="en-US" dirty="0"/>
+          </a:p>
+          <a:p>
             <a:r>
               <a:rPr lang="en-US" dirty="0"/>
               <a:t>Less error = closer match between expectations and reality. </a:t>
@@ -4323,13 +5316,8 @@
           <a:p>
             <a:r>
               <a:rPr lang="en-US" dirty="0"/>
-              <a:t>This stuff carries over directly to the error calculations we </a:t>
-            </a:r>
-            <a:r>
-              <a:rPr lang="en-US"/>
-              <a:t>need for ML. </a:t>
-            </a:r>
-            <a:endParaRPr lang="en-US" dirty="0"/>
+              <a:t>This stuff carries over directly to the error calculations we need for ML. </a:t>
+            </a:r>
           </a:p>
         </p:txBody>
       </p:sp>
@@ -4368,7 +5356,7 @@
           <p:cNvPr id="2" name="Title 1">
             <a:extLst>
               <a:ext uri="{FF2B5EF4-FFF2-40B4-BE49-F238E27FC236}">
-                <a16:creationId xmlns:a16="http://schemas.microsoft.com/office/drawing/2014/main" id="{3E306A6D-B04D-DFFC-21B2-BD44396FA49F}"/>
+                <a16:creationId xmlns:a16="http://schemas.microsoft.com/office/drawing/2014/main" id="{4494A4BB-E7D6-4328-BED4-DB9171C762B6}"/>
               </a:ext>
             </a:extLst>
           </p:cNvPr>
@@ -4376,7 +5364,7 @@
             <a:spLocks noGrp="1"/>
           </p:cNvSpPr>
           <p:nvPr>
-            <p:ph type="ctrTitle"/>
+            <p:ph type="title"/>
           </p:nvPr>
         </p:nvSpPr>
         <p:spPr/>
@@ -4386,17 +5374,17 @@
           <a:p>
             <a:r>
               <a:rPr lang="en-US" dirty="0"/>
-              <a:t>Errors</a:t>
-            </a:r>
-          </a:p>
-        </p:txBody>
-      </p:sp>
-      <p:sp>
-        <p:nvSpPr>
-          <p:cNvPr id="3" name="Subtitle 2">
+              <a:t>Review - Correlations</a:t>
+            </a:r>
+          </a:p>
+        </p:txBody>
+      </p:sp>
+      <p:sp>
+        <p:nvSpPr>
+          <p:cNvPr id="3" name="Content Placeholder 2">
             <a:extLst>
               <a:ext uri="{FF2B5EF4-FFF2-40B4-BE49-F238E27FC236}">
-                <a16:creationId xmlns:a16="http://schemas.microsoft.com/office/drawing/2014/main" id="{55636125-717A-D5AD-1708-CB7F24EC715A}"/>
+                <a16:creationId xmlns:a16="http://schemas.microsoft.com/office/drawing/2014/main" id="{7B88312E-2768-AEBF-D834-7E21833E6112}"/>
               </a:ext>
             </a:extLst>
           </p:cNvPr>
@@ -4404,22 +5392,122 @@
             <a:spLocks noGrp="1"/>
           </p:cNvSpPr>
           <p:nvPr>
-            <p:ph type="subTitle" idx="1"/>
-          </p:nvPr>
-        </p:nvSpPr>
-        <p:spPr/>
-        <p:txBody>
-          <a:bodyPr/>
-          <a:lstStyle/>
-          <a:p>
-            <a:endParaRPr lang="en-US"/>
-          </a:p>
-        </p:txBody>
-      </p:sp>
+            <p:ph idx="1"/>
+          </p:nvPr>
+        </p:nvSpPr>
+        <p:spPr>
+          <a:xfrm>
+            <a:off x="5295290" y="1938130"/>
+            <a:ext cx="6896710" cy="4115351"/>
+          </a:xfrm>
+        </p:spPr>
+        <p:txBody>
+          <a:bodyPr/>
+          <a:lstStyle/>
+          <a:p>
+            <a:r>
+              <a:rPr lang="en-US" dirty="0"/>
+              <a:t>Last time we looked at relationships between two numerical variables. </a:t>
+            </a:r>
+          </a:p>
+          <a:p>
+            <a:r>
+              <a:rPr lang="en-US" dirty="0"/>
+              <a:t>We can measure covariance – how much Y varies as X varies. </a:t>
+            </a:r>
+          </a:p>
+          <a:p>
+            <a:r>
+              <a:rPr lang="en-US" dirty="0"/>
+              <a:t>This can be translated into correlation. </a:t>
+            </a:r>
+          </a:p>
+          <a:p>
+            <a:pPr lvl="1"/>
+            <a:r>
+              <a:rPr lang="en-US" dirty="0"/>
+              <a:t>0 is none, -/+ 1 is perfect. </a:t>
+            </a:r>
+          </a:p>
+          <a:p>
+            <a:r>
+              <a:rPr lang="en-US" dirty="0"/>
+              <a:t>Can spot visually on scatter or calculate. </a:t>
+            </a:r>
+          </a:p>
+          <a:p>
+            <a:pPr lvl="1"/>
+            <a:r>
+              <a:rPr lang="en-US" dirty="0"/>
+              <a:t>Pearson or spearman. </a:t>
+            </a:r>
+          </a:p>
+          <a:p>
+            <a:r>
+              <a:rPr lang="en-US" dirty="0"/>
+              <a:t>Predictively – if we know X, how well do I know Y?</a:t>
+            </a:r>
+          </a:p>
+          <a:p>
+            <a:pPr lvl="1"/>
+            <a:r>
+              <a:rPr lang="en-US" dirty="0"/>
+              <a:t>How much of the variance in Y is explained? </a:t>
+            </a:r>
+          </a:p>
+        </p:txBody>
+      </p:sp>
+      <p:pic>
+        <p:nvPicPr>
+          <p:cNvPr id="1026" name="Picture 2" descr="Correlation and Regression Analysis – Statistics Through an Equity Lens  [Revised Edition]">
+            <a:extLst>
+              <a:ext uri="{FF2B5EF4-FFF2-40B4-BE49-F238E27FC236}">
+                <a16:creationId xmlns:a16="http://schemas.microsoft.com/office/drawing/2014/main" id="{D3BC77AA-0F42-5DF1-7B3E-DE82B441E462}"/>
+              </a:ext>
+            </a:extLst>
+          </p:cNvPr>
+          <p:cNvPicPr>
+            <a:picLocks noChangeAspect="1" noChangeArrowheads="1"/>
+          </p:cNvPicPr>
+          <p:nvPr/>
+        </p:nvPicPr>
+        <p:blipFill>
+          <a:blip r:embed="rId2">
+            <a:extLst>
+              <a:ext uri="{28A0092B-C50C-407E-A947-70E740481C1C}">
+                <a14:useLocalDpi xmlns:a14="http://schemas.microsoft.com/office/drawing/2010/main" val="0"/>
+              </a:ext>
+            </a:extLst>
+          </a:blip>
+          <a:srcRect/>
+          <a:stretch>
+            <a:fillRect/>
+          </a:stretch>
+        </p:blipFill>
+        <p:spPr bwMode="auto">
+          <a:xfrm>
+            <a:off x="-80909" y="1752522"/>
+            <a:ext cx="5376199" cy="4300959"/>
+          </a:xfrm>
+          <a:prstGeom prst="rect">
+            <a:avLst/>
+          </a:prstGeom>
+          <a:noFill/>
+          <a:extLst>
+            <a:ext uri="{909E8E84-426E-40DD-AFC4-6F175D3DCCD1}">
+              <a14:hiddenFill xmlns:a14="http://schemas.microsoft.com/office/drawing/2010/main">
+                <a:solidFill>
+                  <a:srgbClr val="FFFFFF"/>
+                </a:solidFill>
+              </a14:hiddenFill>
+            </a:ext>
+          </a:extLst>
+        </p:spPr>
+      </p:pic>
     </p:spTree>
     <p:extLst>
       <p:ext uri="{BB962C8B-B14F-4D97-AF65-F5344CB8AC3E}">
-        <p14:creationId xmlns:p14="http://schemas.microsoft.com/office/powerpoint/2010/main" val="2329615472"/>
+        <p14:creationId xmlns:p14="http://schemas.microsoft.com/office/powerpoint/2010/main" val="1087220410"/>
       </p:ext>
     </p:extLst>
   </p:cSld>
@@ -4451,6 +5539,476 @@
           <p:cNvPr id="2" name="Title 1">
             <a:extLst>
               <a:ext uri="{FF2B5EF4-FFF2-40B4-BE49-F238E27FC236}">
+                <a16:creationId xmlns:a16="http://schemas.microsoft.com/office/drawing/2014/main" id="{5FDB7826-B72A-BF9A-0D85-6830E306042A}"/>
+              </a:ext>
+            </a:extLst>
+          </p:cNvPr>
+          <p:cNvSpPr>
+            <a:spLocks noGrp="1"/>
+          </p:cNvSpPr>
+          <p:nvPr>
+            <p:ph type="title"/>
+          </p:nvPr>
+        </p:nvSpPr>
+        <p:spPr/>
+        <p:txBody>
+          <a:bodyPr/>
+          <a:lstStyle/>
+          <a:p>
+            <a:r>
+              <a:rPr lang="en-US" dirty="0"/>
+              <a:t>Correlation Strength</a:t>
+            </a:r>
+          </a:p>
+        </p:txBody>
+      </p:sp>
+      <p:sp>
+        <p:nvSpPr>
+          <p:cNvPr id="3" name="Content Placeholder 2">
+            <a:extLst>
+              <a:ext uri="{FF2B5EF4-FFF2-40B4-BE49-F238E27FC236}">
+                <a16:creationId xmlns:a16="http://schemas.microsoft.com/office/drawing/2014/main" id="{CBDC8E43-F246-E18C-2AC2-FF72E9D0E420}"/>
+              </a:ext>
+            </a:extLst>
+          </p:cNvPr>
+          <p:cNvSpPr>
+            <a:spLocks noGrp="1"/>
+          </p:cNvSpPr>
+          <p:nvPr>
+            <p:ph idx="1"/>
+          </p:nvPr>
+        </p:nvSpPr>
+        <p:spPr>
+          <a:xfrm>
+            <a:off x="1192696" y="1958010"/>
+            <a:ext cx="5976495" cy="4020484"/>
+          </a:xfrm>
+        </p:spPr>
+        <p:txBody>
+          <a:bodyPr/>
+          <a:lstStyle/>
+          <a:p>
+            <a:r>
+              <a:rPr lang="en-US" dirty="0"/>
+              <a:t>Knowing correlation is important for several reasons. </a:t>
+            </a:r>
+          </a:p>
+          <a:p>
+            <a:r>
+              <a:rPr lang="en-US" dirty="0"/>
+              <a:t>We can see things that have a connection. </a:t>
+            </a:r>
+          </a:p>
+          <a:p>
+            <a:r>
+              <a:rPr lang="en-US" dirty="0"/>
+              <a:t>We can validate new measures. </a:t>
+            </a:r>
+          </a:p>
+          <a:p>
+            <a:r>
+              <a:rPr lang="en-US" dirty="0"/>
+              <a:t>We can predict trends. </a:t>
+            </a:r>
+          </a:p>
+          <a:p>
+            <a:r>
+              <a:rPr lang="en-US" dirty="0"/>
+              <a:t>In exploring data for ML, we want to know:</a:t>
+            </a:r>
+          </a:p>
+          <a:p>
+            <a:pPr lvl="1"/>
+            <a:r>
+              <a:rPr lang="en-US" dirty="0"/>
+              <a:t>Things correlated with target.</a:t>
+            </a:r>
+          </a:p>
+          <a:p>
+            <a:pPr lvl="1"/>
+            <a:r>
+              <a:rPr lang="en-US" dirty="0"/>
+              <a:t>Things correlated with each other. </a:t>
+            </a:r>
+          </a:p>
+          <a:p>
+            <a:r>
+              <a:rPr lang="en-US" dirty="0"/>
+              <a:t>Later in ML – how do several </a:t>
+            </a:r>
+            <a:r>
+              <a:rPr lang="en-US" dirty="0" err="1"/>
+              <a:t>Xs</a:t>
+            </a:r>
+            <a:r>
+              <a:rPr lang="en-US" dirty="0"/>
+              <a:t> explain Y. </a:t>
+            </a:r>
+          </a:p>
+          <a:p>
+            <a:pPr lvl="1"/>
+            <a:endParaRPr lang="en-US" dirty="0"/>
+          </a:p>
+        </p:txBody>
+      </p:sp>
+      <p:pic>
+        <p:nvPicPr>
+          <p:cNvPr id="2050" name="Picture 2" descr="Correlation coefficient and correlation test in R - Stats and R">
+            <a:extLst>
+              <a:ext uri="{FF2B5EF4-FFF2-40B4-BE49-F238E27FC236}">
+                <a16:creationId xmlns:a16="http://schemas.microsoft.com/office/drawing/2014/main" id="{70FF6B6D-DB3B-8A21-FE5D-F2701694FD4D}"/>
+              </a:ext>
+            </a:extLst>
+          </p:cNvPr>
+          <p:cNvPicPr>
+            <a:picLocks noChangeAspect="1" noChangeArrowheads="1"/>
+          </p:cNvPicPr>
+          <p:nvPr/>
+        </p:nvPicPr>
+        <p:blipFill rotWithShape="1">
+          <a:blip r:embed="rId2">
+            <a:extLst>
+              <a:ext uri="{28A0092B-C50C-407E-A947-70E740481C1C}">
+                <a14:useLocalDpi xmlns:a14="http://schemas.microsoft.com/office/drawing/2010/main" val="0"/>
+              </a:ext>
+            </a:extLst>
+          </a:blip>
+          <a:srcRect l="8143" r="8006"/>
+          <a:stretch>
+            <a:fillRect/>
+          </a:stretch>
+        </p:blipFill>
+        <p:spPr bwMode="auto">
+          <a:xfrm>
+            <a:off x="7169191" y="1853754"/>
+            <a:ext cx="5022809" cy="4278689"/>
+          </a:xfrm>
+          <a:prstGeom prst="rect">
+            <a:avLst/>
+          </a:prstGeom>
+          <a:noFill/>
+          <a:extLst>
+            <a:ext uri="{909E8E84-426E-40DD-AFC4-6F175D3DCCD1}">
+              <a14:hiddenFill xmlns:a14="http://schemas.microsoft.com/office/drawing/2010/main">
+                <a:solidFill>
+                  <a:srgbClr val="FFFFFF"/>
+                </a:solidFill>
+              </a14:hiddenFill>
+            </a:ext>
+          </a:extLst>
+        </p:spPr>
+      </p:pic>
+    </p:spTree>
+    <p:extLst>
+      <p:ext uri="{BB962C8B-B14F-4D97-AF65-F5344CB8AC3E}">
+        <p14:creationId xmlns:p14="http://schemas.microsoft.com/office/powerpoint/2010/main" val="1712035068"/>
+      </p:ext>
+    </p:extLst>
+  </p:cSld>
+  <p:clrMapOvr>
+    <a:masterClrMapping/>
+  </p:clrMapOvr>
+</p:sld>
+</file>
+
+<file path=ppt/slides/slide4.xml><?xml version="1.0" encoding="utf-8"?>
+<p:sld xmlns:a="http://schemas.openxmlformats.org/drawingml/2006/main" xmlns:r="http://schemas.openxmlformats.org/officeDocument/2006/relationships" xmlns:p="http://schemas.openxmlformats.org/presentationml/2006/main">
+  <p:cSld>
+    <p:spTree>
+      <p:nvGrpSpPr>
+        <p:cNvPr id="1" name=""/>
+        <p:cNvGrpSpPr/>
+        <p:nvPr/>
+      </p:nvGrpSpPr>
+      <p:grpSpPr>
+        <a:xfrm>
+          <a:off x="0" y="0"/>
+          <a:ext cx="0" cy="0"/>
+          <a:chOff x="0" y="0"/>
+          <a:chExt cx="0" cy="0"/>
+        </a:xfrm>
+      </p:grpSpPr>
+      <p:sp>
+        <p:nvSpPr>
+          <p:cNvPr id="2" name="Title 1">
+            <a:extLst>
+              <a:ext uri="{FF2B5EF4-FFF2-40B4-BE49-F238E27FC236}">
+                <a16:creationId xmlns:a16="http://schemas.microsoft.com/office/drawing/2014/main" id="{7DF42489-CB19-A811-64CE-926441B1C910}"/>
+              </a:ext>
+            </a:extLst>
+          </p:cNvPr>
+          <p:cNvSpPr>
+            <a:spLocks noGrp="1"/>
+          </p:cNvSpPr>
+          <p:nvPr>
+            <p:ph type="title"/>
+          </p:nvPr>
+        </p:nvSpPr>
+        <p:spPr/>
+        <p:txBody>
+          <a:bodyPr/>
+          <a:lstStyle/>
+          <a:p>
+            <a:r>
+              <a:rPr lang="en-US" dirty="0"/>
+              <a:t>Explained Variance</a:t>
+            </a:r>
+          </a:p>
+        </p:txBody>
+      </p:sp>
+      <p:sp>
+        <p:nvSpPr>
+          <p:cNvPr id="3" name="Content Placeholder 2">
+            <a:extLst>
+              <a:ext uri="{FF2B5EF4-FFF2-40B4-BE49-F238E27FC236}">
+                <a16:creationId xmlns:a16="http://schemas.microsoft.com/office/drawing/2014/main" id="{DA2EBEAE-0A15-AE03-A8A8-4B0A2395B380}"/>
+              </a:ext>
+            </a:extLst>
+          </p:cNvPr>
+          <p:cNvSpPr>
+            <a:spLocks noGrp="1"/>
+          </p:cNvSpPr>
+          <p:nvPr>
+            <p:ph idx="1"/>
+          </p:nvPr>
+        </p:nvSpPr>
+        <p:spPr>
+          <a:xfrm>
+            <a:off x="5799482" y="1853754"/>
+            <a:ext cx="6297480" cy="4278689"/>
+          </a:xfrm>
+        </p:spPr>
+        <p:txBody>
+          <a:bodyPr>
+            <a:normAutofit/>
+          </a:bodyPr>
+          <a:lstStyle/>
+          <a:p>
+            <a:r>
+              <a:rPr lang="en-US" dirty="0"/>
+              <a:t>I think its easiest to frame in terms of Variance Explained. </a:t>
+            </a:r>
+          </a:p>
+          <a:p>
+            <a:r>
+              <a:rPr lang="en-US" dirty="0"/>
+              <a:t>Each variable varies (literally) in value.</a:t>
+            </a:r>
+          </a:p>
+          <a:p>
+            <a:pPr lvl="1"/>
+            <a:r>
+              <a:rPr lang="en-US" dirty="0"/>
+              <a:t>Unchanging variable is easy to explain – just the mean. </a:t>
+            </a:r>
+          </a:p>
+          <a:p>
+            <a:pPr lvl="1"/>
+            <a:r>
+              <a:rPr lang="en-US" dirty="0"/>
+              <a:t>Variable that varies is harder – mean +/- some variation. </a:t>
+            </a:r>
+          </a:p>
+          <a:p>
+            <a:r>
+              <a:rPr lang="en-US" dirty="0"/>
+              <a:t>Correlation tells how much of that variance is explained.</a:t>
+            </a:r>
+          </a:p>
+          <a:p>
+            <a:pPr lvl="1"/>
+            <a:r>
+              <a:rPr lang="en-US" dirty="0"/>
+              <a:t>I want to know Y, Y data varies in value some amount. </a:t>
+            </a:r>
+          </a:p>
+          <a:p>
+            <a:pPr lvl="1"/>
+            <a:r>
+              <a:rPr lang="en-US" dirty="0"/>
+              <a:t>X gives us (explains) some information on Y’s value. </a:t>
+            </a:r>
+          </a:p>
+          <a:p>
+            <a:pPr lvl="1"/>
+            <a:r>
+              <a:rPr lang="en-US" dirty="0"/>
+              <a:t>If correlation is 1, X explains all of Y’s variance – we know 100% of Y’s value (no ambiguity). </a:t>
+            </a:r>
+          </a:p>
+          <a:p>
+            <a:r>
+              <a:rPr lang="en-US" dirty="0"/>
+              <a:t>Y is target, X is input – how well can we get Y from X. </a:t>
+            </a:r>
+          </a:p>
+        </p:txBody>
+      </p:sp>
+      <p:pic>
+        <p:nvPicPr>
+          <p:cNvPr id="3074" name="Picture 2" descr="Are There Any Variants of Scatter Plots ? - Advance Innovation Group - Blog">
+            <a:extLst>
+              <a:ext uri="{FF2B5EF4-FFF2-40B4-BE49-F238E27FC236}">
+                <a16:creationId xmlns:a16="http://schemas.microsoft.com/office/drawing/2014/main" id="{E8FBFD00-FF3C-2EF4-82AD-BFF37F70C5E3}"/>
+              </a:ext>
+            </a:extLst>
+          </p:cNvPr>
+          <p:cNvPicPr>
+            <a:picLocks noChangeAspect="1" noChangeArrowheads="1"/>
+          </p:cNvPicPr>
+          <p:nvPr/>
+        </p:nvPicPr>
+        <p:blipFill>
+          <a:blip r:embed="rId2">
+            <a:extLst>
+              <a:ext uri="{28A0092B-C50C-407E-A947-70E740481C1C}">
+                <a14:useLocalDpi xmlns:a14="http://schemas.microsoft.com/office/drawing/2010/main" val="0"/>
+              </a:ext>
+            </a:extLst>
+          </a:blip>
+          <a:srcRect/>
+          <a:stretch>
+            <a:fillRect/>
+          </a:stretch>
+        </p:blipFill>
+        <p:spPr bwMode="auto">
+          <a:xfrm>
+            <a:off x="95038" y="2067338"/>
+            <a:ext cx="5704444" cy="3491120"/>
+          </a:xfrm>
+          <a:prstGeom prst="rect">
+            <a:avLst/>
+          </a:prstGeom>
+          <a:noFill/>
+          <a:extLst>
+            <a:ext uri="{909E8E84-426E-40DD-AFC4-6F175D3DCCD1}">
+              <a14:hiddenFill xmlns:a14="http://schemas.microsoft.com/office/drawing/2010/main">
+                <a:solidFill>
+                  <a:srgbClr val="FFFFFF"/>
+                </a:solidFill>
+              </a14:hiddenFill>
+            </a:ext>
+          </a:extLst>
+        </p:spPr>
+      </p:pic>
+    </p:spTree>
+    <p:extLst>
+      <p:ext uri="{BB962C8B-B14F-4D97-AF65-F5344CB8AC3E}">
+        <p14:creationId xmlns:p14="http://schemas.microsoft.com/office/powerpoint/2010/main" val="2597670375"/>
+      </p:ext>
+    </p:extLst>
+  </p:cSld>
+  <p:clrMapOvr>
+    <a:masterClrMapping/>
+  </p:clrMapOvr>
+</p:sld>
+</file>
+
+<file path=ppt/slides/slide5.xml><?xml version="1.0" encoding="utf-8"?>
+<p:sld xmlns:a="http://schemas.openxmlformats.org/drawingml/2006/main" xmlns:r="http://schemas.openxmlformats.org/officeDocument/2006/relationships" xmlns:p="http://schemas.openxmlformats.org/presentationml/2006/main">
+  <p:cSld>
+    <p:spTree>
+      <p:nvGrpSpPr>
+        <p:cNvPr id="1" name=""/>
+        <p:cNvGrpSpPr/>
+        <p:nvPr/>
+      </p:nvGrpSpPr>
+      <p:grpSpPr>
+        <a:xfrm>
+          <a:off x="0" y="0"/>
+          <a:ext cx="0" cy="0"/>
+          <a:chOff x="0" y="0"/>
+          <a:chExt cx="0" cy="0"/>
+        </a:xfrm>
+      </p:grpSpPr>
+      <p:sp>
+        <p:nvSpPr>
+          <p:cNvPr id="2" name="Title 1">
+            <a:extLst>
+              <a:ext uri="{FF2B5EF4-FFF2-40B4-BE49-F238E27FC236}">
+                <a16:creationId xmlns:a16="http://schemas.microsoft.com/office/drawing/2014/main" id="{3E306A6D-B04D-DFFC-21B2-BD44396FA49F}"/>
+              </a:ext>
+            </a:extLst>
+          </p:cNvPr>
+          <p:cNvSpPr>
+            <a:spLocks noGrp="1"/>
+          </p:cNvSpPr>
+          <p:nvPr>
+            <p:ph type="ctrTitle"/>
+          </p:nvPr>
+        </p:nvSpPr>
+        <p:spPr/>
+        <p:txBody>
+          <a:bodyPr/>
+          <a:lstStyle/>
+          <a:p>
+            <a:r>
+              <a:rPr lang="en-US" dirty="0"/>
+              <a:t>Errors</a:t>
+            </a:r>
+          </a:p>
+        </p:txBody>
+      </p:sp>
+      <p:sp>
+        <p:nvSpPr>
+          <p:cNvPr id="3" name="Subtitle 2">
+            <a:extLst>
+              <a:ext uri="{FF2B5EF4-FFF2-40B4-BE49-F238E27FC236}">
+                <a16:creationId xmlns:a16="http://schemas.microsoft.com/office/drawing/2014/main" id="{55636125-717A-D5AD-1708-CB7F24EC715A}"/>
+              </a:ext>
+            </a:extLst>
+          </p:cNvPr>
+          <p:cNvSpPr>
+            <a:spLocks noGrp="1"/>
+          </p:cNvSpPr>
+          <p:nvPr>
+            <p:ph type="subTitle" idx="1"/>
+          </p:nvPr>
+        </p:nvSpPr>
+        <p:spPr/>
+        <p:txBody>
+          <a:bodyPr/>
+          <a:lstStyle/>
+          <a:p>
+            <a:endParaRPr lang="en-US"/>
+          </a:p>
+        </p:txBody>
+      </p:sp>
+    </p:spTree>
+    <p:extLst>
+      <p:ext uri="{BB962C8B-B14F-4D97-AF65-F5344CB8AC3E}">
+        <p14:creationId xmlns:p14="http://schemas.microsoft.com/office/powerpoint/2010/main" val="2329615472"/>
+      </p:ext>
+    </p:extLst>
+  </p:cSld>
+  <p:clrMapOvr>
+    <a:masterClrMapping/>
+  </p:clrMapOvr>
+</p:sld>
+</file>
+
+<file path=ppt/slides/slide6.xml><?xml version="1.0" encoding="utf-8"?>
+<p:sld xmlns:a="http://schemas.openxmlformats.org/drawingml/2006/main" xmlns:r="http://schemas.openxmlformats.org/officeDocument/2006/relationships" xmlns:p="http://schemas.openxmlformats.org/presentationml/2006/main">
+  <p:cSld>
+    <p:spTree>
+      <p:nvGrpSpPr>
+        <p:cNvPr id="1" name=""/>
+        <p:cNvGrpSpPr/>
+        <p:nvPr/>
+      </p:nvGrpSpPr>
+      <p:grpSpPr>
+        <a:xfrm>
+          <a:off x="0" y="0"/>
+          <a:ext cx="0" cy="0"/>
+          <a:chOff x="0" y="0"/>
+          <a:chExt cx="0" cy="0"/>
+        </a:xfrm>
+      </p:grpSpPr>
+      <p:sp>
+        <p:nvSpPr>
+          <p:cNvPr id="2" name="Title 1">
+            <a:extLst>
+              <a:ext uri="{FF2B5EF4-FFF2-40B4-BE49-F238E27FC236}">
                 <a16:creationId xmlns:a16="http://schemas.microsoft.com/office/drawing/2014/main" id="{8E6D282D-5B87-7E8C-8634-093003DF86FC}"/>
               </a:ext>
             </a:extLst>
@@ -4540,14 +6098,7 @@
           <a:p>
             <a:r>
               <a:rPr lang="en-US" dirty="0"/>
-              <a:t>We want to use our models to make predictions:</a:t>
-            </a:r>
-          </a:p>
-          <a:p>
-            <a:pPr lvl="1"/>
-            <a:r>
-              <a:rPr lang="en-US" dirty="0"/>
-              <a:t>If we do, how can we measure if those predictions are accurate?</a:t>
+              <a:t>How do we evaluate how good a model is? </a:t>
             </a:r>
           </a:p>
         </p:txBody>
@@ -4565,7 +6116,185 @@
 </p:sld>
 </file>
 
-<file path=ppt/slides/slide4.xml><?xml version="1.0" encoding="utf-8"?>
+<file path=ppt/slides/slide7.xml><?xml version="1.0" encoding="utf-8"?>
+<p:sld xmlns:a="http://schemas.openxmlformats.org/drawingml/2006/main" xmlns:r="http://schemas.openxmlformats.org/officeDocument/2006/relationships" xmlns:p="http://schemas.openxmlformats.org/presentationml/2006/main">
+  <p:cSld>
+    <p:spTree>
+      <p:nvGrpSpPr>
+        <p:cNvPr id="1" name=""/>
+        <p:cNvGrpSpPr/>
+        <p:nvPr/>
+      </p:nvGrpSpPr>
+      <p:grpSpPr>
+        <a:xfrm>
+          <a:off x="0" y="0"/>
+          <a:ext cx="0" cy="0"/>
+          <a:chOff x="0" y="0"/>
+          <a:chExt cx="0" cy="0"/>
+        </a:xfrm>
+      </p:grpSpPr>
+      <p:sp>
+        <p:nvSpPr>
+          <p:cNvPr id="2" name="Title 1">
+            <a:extLst>
+              <a:ext uri="{FF2B5EF4-FFF2-40B4-BE49-F238E27FC236}">
+                <a16:creationId xmlns:a16="http://schemas.microsoft.com/office/drawing/2014/main" id="{490857AF-E27A-214B-AEA1-7E64C3ED6145}"/>
+              </a:ext>
+            </a:extLst>
+          </p:cNvPr>
+          <p:cNvSpPr>
+            <a:spLocks noGrp="1"/>
+          </p:cNvSpPr>
+          <p:nvPr>
+            <p:ph type="title"/>
+          </p:nvPr>
+        </p:nvSpPr>
+        <p:spPr/>
+        <p:txBody>
+          <a:bodyPr/>
+          <a:lstStyle/>
+          <a:p>
+            <a:r>
+              <a:rPr lang="en-US" dirty="0"/>
+              <a:t>Analytical Distributions And Models</a:t>
+            </a:r>
+          </a:p>
+        </p:txBody>
+      </p:sp>
+      <p:sp>
+        <p:nvSpPr>
+          <p:cNvPr id="3" name="Content Placeholder 2">
+            <a:extLst>
+              <a:ext uri="{FF2B5EF4-FFF2-40B4-BE49-F238E27FC236}">
+                <a16:creationId xmlns:a16="http://schemas.microsoft.com/office/drawing/2014/main" id="{768491DD-4138-2F8E-2866-D8E389DAF880}"/>
+              </a:ext>
+            </a:extLst>
+          </p:cNvPr>
+          <p:cNvSpPr>
+            <a:spLocks noGrp="1"/>
+          </p:cNvSpPr>
+          <p:nvPr>
+            <p:ph idx="1"/>
+          </p:nvPr>
+        </p:nvSpPr>
+        <p:spPr>
+          <a:xfrm>
+            <a:off x="5776499" y="2015732"/>
+            <a:ext cx="6276353" cy="4037749"/>
+          </a:xfrm>
+        </p:spPr>
+        <p:txBody>
+          <a:bodyPr/>
+          <a:lstStyle/>
+          <a:p>
+            <a:r>
+              <a:rPr lang="en-US" dirty="0"/>
+              <a:t>Our analytical distributions are models. </a:t>
+            </a:r>
+          </a:p>
+          <a:p>
+            <a:pPr lvl="1"/>
+            <a:r>
+              <a:rPr lang="en-US" dirty="0"/>
+              <a:t>Mathematical representation of our data. </a:t>
+            </a:r>
+          </a:p>
+          <a:p>
+            <a:pPr lvl="1"/>
+            <a:r>
+              <a:rPr lang="en-US" dirty="0"/>
+              <a:t>Defined by some equation rather than collection of data. </a:t>
+            </a:r>
+          </a:p>
+          <a:p>
+            <a:r>
+              <a:rPr lang="en-US" dirty="0"/>
+              <a:t>Models aren’t perfect, they’re simplifications. </a:t>
+            </a:r>
+          </a:p>
+          <a:p>
+            <a:pPr lvl="1"/>
+            <a:r>
+              <a:rPr lang="en-US" dirty="0"/>
+              <a:t>We expect some difference between data and model. </a:t>
+            </a:r>
+          </a:p>
+          <a:p>
+            <a:r>
+              <a:rPr lang="en-US" dirty="0"/>
+              <a:t>Any other model works the same way. </a:t>
+            </a:r>
+          </a:p>
+          <a:p>
+            <a:pPr lvl="1"/>
+            <a:r>
+              <a:rPr lang="en-US" dirty="0"/>
+              <a:t>It gives a simple version of what we see in data. </a:t>
+            </a:r>
+          </a:p>
+        </p:txBody>
+      </p:sp>
+      <p:pic>
+        <p:nvPicPr>
+          <p:cNvPr id="8194" name="Picture 2" descr="The Ultimate Guide to Statistical Distributions: Normal, Uniform, Binomial,  Poisson &amp; More | by Rohan Mistry | Aug, 2025 | Medium">
+            <a:extLst>
+              <a:ext uri="{FF2B5EF4-FFF2-40B4-BE49-F238E27FC236}">
+                <a16:creationId xmlns:a16="http://schemas.microsoft.com/office/drawing/2014/main" id="{768A53FD-A4AC-8060-573C-E3193E459D26}"/>
+              </a:ext>
+            </a:extLst>
+          </p:cNvPr>
+          <p:cNvPicPr>
+            <a:picLocks noChangeAspect="1" noChangeArrowheads="1"/>
+          </p:cNvPicPr>
+          <p:nvPr/>
+        </p:nvPicPr>
+        <p:blipFill>
+          <a:blip r:embed="rId2">
+            <a:extLst>
+              <a:ext uri="{28A0092B-C50C-407E-A947-70E740481C1C}">
+                <a14:useLocalDpi xmlns:a14="http://schemas.microsoft.com/office/drawing/2010/main" val="0"/>
+              </a:ext>
+            </a:extLst>
+          </a:blip>
+          <a:srcRect/>
+          <a:stretch>
+            <a:fillRect/>
+          </a:stretch>
+        </p:blipFill>
+        <p:spPr bwMode="auto">
+          <a:xfrm>
+            <a:off x="139148" y="1853754"/>
+            <a:ext cx="5637351" cy="3905911"/>
+          </a:xfrm>
+          <a:prstGeom prst="rect">
+            <a:avLst/>
+          </a:prstGeom>
+          <a:noFill/>
+          <a:extLst>
+            <a:ext uri="{909E8E84-426E-40DD-AFC4-6F175D3DCCD1}">
+              <a14:hiddenFill xmlns:a14="http://schemas.microsoft.com/office/drawing/2010/main">
+                <a:solidFill>
+                  <a:srgbClr val="FFFFFF"/>
+                </a:solidFill>
+              </a14:hiddenFill>
+            </a:ext>
+          </a:extLst>
+        </p:spPr>
+      </p:pic>
+    </p:spTree>
+    <p:extLst>
+      <p:ext uri="{BB962C8B-B14F-4D97-AF65-F5344CB8AC3E}">
+        <p14:creationId xmlns:p14="http://schemas.microsoft.com/office/powerpoint/2010/main" val="2301019072"/>
+      </p:ext>
+    </p:extLst>
+  </p:cSld>
+  <p:clrMapOvr>
+    <a:masterClrMapping/>
+  </p:clrMapOvr>
+</p:sld>
+</file>
+
+<file path=ppt/slides/slide8.xml><?xml version="1.0" encoding="utf-8"?>
 <p:sld xmlns:a="http://schemas.openxmlformats.org/drawingml/2006/main" xmlns:r="http://schemas.openxmlformats.org/officeDocument/2006/relationships" xmlns:p="http://schemas.openxmlformats.org/presentationml/2006/main">
   <p:cSld>
     <p:spTree>
@@ -4612,6 +6341,53 @@
           </a:prstGeom>
         </p:spPr>
       </p:pic>
+      <p:sp>
+        <p:nvSpPr>
+          <p:cNvPr id="2" name="TextBox 1">
+            <a:extLst>
+              <a:ext uri="{FF2B5EF4-FFF2-40B4-BE49-F238E27FC236}">
+                <a16:creationId xmlns:a16="http://schemas.microsoft.com/office/drawing/2014/main" id="{67B09457-7837-DDDE-819F-EACAED7EA4DF}"/>
+              </a:ext>
+            </a:extLst>
+          </p:cNvPr>
+          <p:cNvSpPr txBox="1"/>
+          <p:nvPr/>
+        </p:nvSpPr>
+        <p:spPr>
+          <a:xfrm>
+            <a:off x="2454965" y="815009"/>
+            <a:ext cx="4850296" cy="1077218"/>
+          </a:xfrm>
+          <a:prstGeom prst="rect">
+            <a:avLst/>
+          </a:prstGeom>
+          <a:noFill/>
+        </p:spPr>
+        <p:txBody>
+          <a:bodyPr wrap="square" rtlCol="0">
+            <a:spAutoFit/>
+          </a:bodyPr>
+          <a:lstStyle/>
+          <a:p>
+            <a:r>
+              <a:rPr lang="en-US" sz="2800" dirty="0"/>
+              <a:t>Another model:</a:t>
+            </a:r>
+          </a:p>
+          <a:p>
+            <a:r>
+              <a:rPr lang="en-US" dirty="0"/>
+              <a:t>Data – The dots. </a:t>
+            </a:r>
+          </a:p>
+          <a:p>
+            <a:r>
+              <a:rPr lang="en-US" dirty="0"/>
+              <a:t>Model – the line: y = m*x + b</a:t>
+            </a:r>
+          </a:p>
+        </p:txBody>
+      </p:sp>
     </p:spTree>
     <p:extLst>
       <p:ext uri="{BB962C8B-B14F-4D97-AF65-F5344CB8AC3E}">
@@ -4625,8 +6401,8 @@
 </p:sld>
 </file>
 
-<file path=ppt/slides/slide5.xml><?xml version="1.0" encoding="utf-8"?>
-<p:sld xmlns:a="http://schemas.openxmlformats.org/drawingml/2006/main" xmlns:r="http://schemas.openxmlformats.org/officeDocument/2006/relationships" xmlns:p="http://schemas.openxmlformats.org/presentationml/2006/main">
+<file path=ppt/slides/slide9.xml><?xml version="1.0" encoding="utf-8"?>
+<p:sld xmlns:a="http://schemas.openxmlformats.org/drawingml/2006/main" xmlns:r="http://schemas.openxmlformats.org/officeDocument/2006/relationships" xmlns:p="http://schemas.openxmlformats.org/presentationml/2006/main" show="0">
   <p:cSld>
     <p:spTree>
       <p:nvGrpSpPr>
@@ -4642,645 +6418,12 @@
           <a:chExt cx="0" cy="0"/>
         </a:xfrm>
       </p:grpSpPr>
-      <p:sp>
-        <p:nvSpPr>
-          <p:cNvPr id="2" name="Title 1">
+      <p:pic>
+        <p:nvPicPr>
+          <p:cNvPr id="4098" name="Picture 2" descr="machine learning - Linear Regression: how to discern a possible correlation  between observation errors from scatter plot - Cross Validated">
             <a:extLst>
               <a:ext uri="{FF2B5EF4-FFF2-40B4-BE49-F238E27FC236}">
-                <a16:creationId xmlns:a16="http://schemas.microsoft.com/office/drawing/2014/main" id="{482C6352-913A-80C4-CF7E-B8EC17246DCA}"/>
-              </a:ext>
-            </a:extLst>
-          </p:cNvPr>
-          <p:cNvSpPr>
-            <a:spLocks noGrp="1"/>
-          </p:cNvSpPr>
-          <p:nvPr>
-            <p:ph type="title"/>
-          </p:nvPr>
-        </p:nvSpPr>
-        <p:spPr/>
-        <p:txBody>
-          <a:bodyPr/>
-          <a:lstStyle/>
-          <a:p>
-            <a:r>
-              <a:rPr lang="en-US" dirty="0"/>
-              <a:t>Errors</a:t>
-            </a:r>
-          </a:p>
-        </p:txBody>
-      </p:sp>
-      <p:sp>
-        <p:nvSpPr>
-          <p:cNvPr id="3" name="Content Placeholder 2">
-            <a:extLst>
-              <a:ext uri="{FF2B5EF4-FFF2-40B4-BE49-F238E27FC236}">
-                <a16:creationId xmlns:a16="http://schemas.microsoft.com/office/drawing/2014/main" id="{95389208-C1D8-D820-95A6-46333A5231BD}"/>
-              </a:ext>
-            </a:extLst>
-          </p:cNvPr>
-          <p:cNvSpPr>
-            <a:spLocks noGrp="1"/>
-          </p:cNvSpPr>
-          <p:nvPr>
-            <p:ph idx="1"/>
-          </p:nvPr>
-        </p:nvSpPr>
-        <p:spPr>
-          <a:xfrm>
-            <a:off x="1451579" y="2015732"/>
-            <a:ext cx="9603275" cy="4037749"/>
-          </a:xfrm>
-        </p:spPr>
-        <p:txBody>
-          <a:bodyPr/>
-          <a:lstStyle/>
-          <a:p>
-            <a:r>
-              <a:rPr lang="en-US" dirty="0"/>
-              <a:t>When matching empirical data to analytical distributions our match is never perfect. </a:t>
-            </a:r>
-          </a:p>
-          <a:p>
-            <a:r>
-              <a:rPr lang="en-US" dirty="0"/>
-              <a:t>Each point is “off” the analytical distribution by some amount. </a:t>
-            </a:r>
-          </a:p>
-          <a:p>
-            <a:r>
-              <a:rPr lang="en-US" dirty="0"/>
-              <a:t>The less the total amount of “off” is, the more closely matched the distribution. </a:t>
-            </a:r>
-          </a:p>
-          <a:p>
-            <a:endParaRPr lang="en-US" dirty="0"/>
-          </a:p>
-          <a:p>
-            <a:r>
-              <a:rPr lang="en-US" dirty="0"/>
-              <a:t>Predictions work the same way:</a:t>
-            </a:r>
-          </a:p>
-          <a:p>
-            <a:pPr lvl="1"/>
-            <a:r>
-              <a:rPr lang="en-US" dirty="0"/>
-              <a:t>Predict what a value should be. </a:t>
-            </a:r>
-          </a:p>
-          <a:p>
-            <a:pPr lvl="1"/>
-            <a:r>
-              <a:rPr lang="en-US" dirty="0"/>
-              <a:t>Measure our error.</a:t>
-            </a:r>
-          </a:p>
-          <a:p>
-            <a:pPr lvl="1"/>
-            <a:r>
-              <a:rPr lang="en-US" dirty="0"/>
-              <a:t>Summarize these errors to estimate overall accuracy. </a:t>
-            </a:r>
-          </a:p>
-        </p:txBody>
-      </p:sp>
-    </p:spTree>
-    <p:extLst>
-      <p:ext uri="{BB962C8B-B14F-4D97-AF65-F5344CB8AC3E}">
-        <p14:creationId xmlns:p14="http://schemas.microsoft.com/office/powerpoint/2010/main" val="3134869059"/>
-      </p:ext>
-    </p:extLst>
-  </p:cSld>
-  <p:clrMapOvr>
-    <a:masterClrMapping/>
-  </p:clrMapOvr>
-</p:sld>
-</file>
-
-<file path=ppt/slides/slide6.xml><?xml version="1.0" encoding="utf-8"?>
-<p:sld xmlns:a="http://schemas.openxmlformats.org/drawingml/2006/main" xmlns:r="http://schemas.openxmlformats.org/officeDocument/2006/relationships" xmlns:p="http://schemas.openxmlformats.org/presentationml/2006/main">
-  <p:cSld>
-    <p:spTree>
-      <p:nvGrpSpPr>
-        <p:cNvPr id="1" name=""/>
-        <p:cNvGrpSpPr/>
-        <p:nvPr/>
-      </p:nvGrpSpPr>
-      <p:grpSpPr>
-        <a:xfrm>
-          <a:off x="0" y="0"/>
-          <a:ext cx="0" cy="0"/>
-          <a:chOff x="0" y="0"/>
-          <a:chExt cx="0" cy="0"/>
-        </a:xfrm>
-      </p:grpSpPr>
-      <p:sp>
-        <p:nvSpPr>
-          <p:cNvPr id="2" name="Title 1">
-            <a:extLst>
-              <a:ext uri="{FF2B5EF4-FFF2-40B4-BE49-F238E27FC236}">
-                <a16:creationId xmlns:a16="http://schemas.microsoft.com/office/drawing/2014/main" id="{26EF6B96-4AC2-5366-6E64-4FCABD653C4B}"/>
-              </a:ext>
-            </a:extLst>
-          </p:cNvPr>
-          <p:cNvSpPr>
-            <a:spLocks noGrp="1"/>
-          </p:cNvSpPr>
-          <p:nvPr>
-            <p:ph type="title"/>
-          </p:nvPr>
-        </p:nvSpPr>
-        <p:spPr/>
-        <p:txBody>
-          <a:bodyPr/>
-          <a:lstStyle/>
-          <a:p>
-            <a:r>
-              <a:rPr lang="en-US" dirty="0"/>
-              <a:t>Residuals</a:t>
-            </a:r>
-          </a:p>
-        </p:txBody>
-      </p:sp>
-      <p:sp>
-        <p:nvSpPr>
-          <p:cNvPr id="3" name="Content Placeholder 2">
-            <a:extLst>
-              <a:ext uri="{FF2B5EF4-FFF2-40B4-BE49-F238E27FC236}">
-                <a16:creationId xmlns:a16="http://schemas.microsoft.com/office/drawing/2014/main" id="{5F735C24-FC39-2D6E-5A15-E5DC7C3D6B7D}"/>
-              </a:ext>
-            </a:extLst>
-          </p:cNvPr>
-          <p:cNvSpPr>
-            <a:spLocks noGrp="1"/>
-          </p:cNvSpPr>
-          <p:nvPr>
-            <p:ph idx="1"/>
-          </p:nvPr>
-        </p:nvSpPr>
-        <p:spPr>
-          <a:xfrm>
-            <a:off x="111513" y="2015732"/>
-            <a:ext cx="4761570" cy="4037749"/>
-          </a:xfrm>
-        </p:spPr>
-        <p:txBody>
-          <a:bodyPr/>
-          <a:lstStyle/>
-          <a:p>
-            <a:r>
-              <a:rPr lang="en-US" dirty="0"/>
-              <a:t>A residual is how much one prediction is off from reality. </a:t>
-            </a:r>
-          </a:p>
-          <a:p>
-            <a:r>
-              <a:rPr lang="en-US" dirty="0"/>
-              <a:t>Each point in our data has its own residual – how “off” was the model vs that real value. </a:t>
-            </a:r>
-          </a:p>
-          <a:p>
-            <a:r>
-              <a:rPr lang="en-US" dirty="0"/>
-              <a:t>Here – </a:t>
-            </a:r>
-            <a:r>
-              <a:rPr lang="en-US" dirty="0" err="1"/>
-              <a:t>LoBF</a:t>
-            </a:r>
-            <a:r>
-              <a:rPr lang="en-US" dirty="0"/>
-              <a:t> is a prediction. </a:t>
-            </a:r>
-          </a:p>
-          <a:p>
-            <a:r>
-              <a:rPr lang="en-US" dirty="0"/>
-              <a:t>Next – Analytical model is a prediction. </a:t>
-            </a:r>
-          </a:p>
-        </p:txBody>
-      </p:sp>
-      <p:pic>
-        <p:nvPicPr>
-          <p:cNvPr id="4" name="Picture 3">
-            <a:extLst>
-              <a:ext uri="{FF2B5EF4-FFF2-40B4-BE49-F238E27FC236}">
-                <a16:creationId xmlns:a16="http://schemas.microsoft.com/office/drawing/2014/main" id="{D38F8C1F-A22D-924B-1803-6143A067A40C}"/>
-              </a:ext>
-            </a:extLst>
-          </p:cNvPr>
-          <p:cNvPicPr>
-            <a:picLocks noChangeAspect="1"/>
-          </p:cNvPicPr>
-          <p:nvPr/>
-        </p:nvPicPr>
-        <p:blipFill>
-          <a:blip r:embed="rId2"/>
-          <a:stretch>
-            <a:fillRect/>
-          </a:stretch>
-        </p:blipFill>
-        <p:spPr>
-          <a:xfrm>
-            <a:off x="4999492" y="1853754"/>
-            <a:ext cx="7140571" cy="4848129"/>
-          </a:xfrm>
-          <a:prstGeom prst="rect">
-            <a:avLst/>
-          </a:prstGeom>
-        </p:spPr>
-      </p:pic>
-    </p:spTree>
-    <p:extLst>
-      <p:ext uri="{BB962C8B-B14F-4D97-AF65-F5344CB8AC3E}">
-        <p14:creationId xmlns:p14="http://schemas.microsoft.com/office/powerpoint/2010/main" val="3811981501"/>
-      </p:ext>
-    </p:extLst>
-  </p:cSld>
-  <p:clrMapOvr>
-    <a:masterClrMapping/>
-  </p:clrMapOvr>
-</p:sld>
-</file>
-
-<file path=ppt/slides/slide7.xml><?xml version="1.0" encoding="utf-8"?>
-<p:sld xmlns:a="http://schemas.openxmlformats.org/drawingml/2006/main" xmlns:r="http://schemas.openxmlformats.org/officeDocument/2006/relationships" xmlns:p="http://schemas.openxmlformats.org/presentationml/2006/main">
-  <p:cSld>
-    <p:spTree>
-      <p:nvGrpSpPr>
-        <p:cNvPr id="1" name=""/>
-        <p:cNvGrpSpPr/>
-        <p:nvPr/>
-      </p:nvGrpSpPr>
-      <p:grpSpPr>
-        <a:xfrm>
-          <a:off x="0" y="0"/>
-          <a:ext cx="0" cy="0"/>
-          <a:chOff x="0" y="0"/>
-          <a:chExt cx="0" cy="0"/>
-        </a:xfrm>
-      </p:grpSpPr>
-      <p:sp>
-        <p:nvSpPr>
-          <p:cNvPr id="2" name="Title 1">
-            <a:extLst>
-              <a:ext uri="{FF2B5EF4-FFF2-40B4-BE49-F238E27FC236}">
-                <a16:creationId xmlns:a16="http://schemas.microsoft.com/office/drawing/2014/main" id="{41AFA2BA-264D-E3CA-EB08-A9F10BFD3E54}"/>
-              </a:ext>
-            </a:extLst>
-          </p:cNvPr>
-          <p:cNvSpPr>
-            <a:spLocks noGrp="1"/>
-          </p:cNvSpPr>
-          <p:nvPr>
-            <p:ph type="title"/>
-          </p:nvPr>
-        </p:nvSpPr>
-        <p:spPr/>
-        <p:txBody>
-          <a:bodyPr/>
-          <a:lstStyle/>
-          <a:p>
-            <a:r>
-              <a:rPr lang="en-US" dirty="0"/>
-              <a:t>In Analytical Distributions</a:t>
-            </a:r>
-          </a:p>
-        </p:txBody>
-      </p:sp>
-      <p:sp>
-        <p:nvSpPr>
-          <p:cNvPr id="3" name="Content Placeholder 2">
-            <a:extLst>
-              <a:ext uri="{FF2B5EF4-FFF2-40B4-BE49-F238E27FC236}">
-                <a16:creationId xmlns:a16="http://schemas.microsoft.com/office/drawing/2014/main" id="{14E14678-FC62-6CF2-A4FF-346E8C4DC145}"/>
-              </a:ext>
-            </a:extLst>
-          </p:cNvPr>
-          <p:cNvSpPr>
-            <a:spLocks noGrp="1"/>
-          </p:cNvSpPr>
-          <p:nvPr>
-            <p:ph idx="1"/>
-          </p:nvPr>
-        </p:nvSpPr>
-        <p:spPr>
-          <a:xfrm>
-            <a:off x="1020199" y="2015732"/>
-            <a:ext cx="10034656" cy="3450613"/>
-          </a:xfrm>
-        </p:spPr>
-        <p:txBody>
-          <a:bodyPr/>
-          <a:lstStyle/>
-          <a:p>
-            <a:r>
-              <a:rPr lang="en-US" dirty="0"/>
-              <a:t>The idea of error works in the same way when matching empirical vs analytical distributions.</a:t>
-            </a:r>
-          </a:p>
-          <a:p>
-            <a:pPr lvl="1"/>
-            <a:r>
-              <a:rPr lang="en-US" dirty="0"/>
-              <a:t>Empirical is the real data. </a:t>
-            </a:r>
-          </a:p>
-          <a:p>
-            <a:pPr lvl="1"/>
-            <a:r>
-              <a:rPr lang="en-US" dirty="0"/>
-              <a:t>The analytical distribution is the prediction.</a:t>
-            </a:r>
-          </a:p>
-          <a:p>
-            <a:r>
-              <a:rPr lang="en-US" dirty="0"/>
-              <a:t>E.g. Consider matching a lognormal looking distribution to the </a:t>
-            </a:r>
-            <a:r>
-              <a:rPr lang="en-US" dirty="0" err="1"/>
-              <a:t>lognorm</a:t>
-            </a:r>
-            <a:r>
-              <a:rPr lang="en-US" dirty="0"/>
-              <a:t> analytical one:</a:t>
-            </a:r>
-          </a:p>
-          <a:p>
-            <a:pPr lvl="1"/>
-            <a:r>
-              <a:rPr lang="en-US" dirty="0"/>
-              <a:t>Empirical data tells us how many values we have in a bin. </a:t>
-            </a:r>
-          </a:p>
-          <a:p>
-            <a:pPr lvl="1"/>
-            <a:r>
-              <a:rPr lang="en-US" dirty="0"/>
-              <a:t>The analytical distribution tells us how many we expect (if the data follows that </a:t>
-            </a:r>
-            <a:r>
-              <a:rPr lang="en-US" dirty="0" err="1"/>
-              <a:t>dist</a:t>
-            </a:r>
-            <a:r>
-              <a:rPr lang="en-US" dirty="0"/>
-              <a:t>). </a:t>
-            </a:r>
-          </a:p>
-          <a:p>
-            <a:pPr lvl="1"/>
-            <a:r>
-              <a:rPr lang="en-US" dirty="0"/>
-              <a:t>The difference between the two is the residual, or amount of error. </a:t>
-            </a:r>
-          </a:p>
-        </p:txBody>
-      </p:sp>
-    </p:spTree>
-    <p:extLst>
-      <p:ext uri="{BB962C8B-B14F-4D97-AF65-F5344CB8AC3E}">
-        <p14:creationId xmlns:p14="http://schemas.microsoft.com/office/powerpoint/2010/main" val="193075141"/>
-      </p:ext>
-    </p:extLst>
-  </p:cSld>
-  <p:clrMapOvr>
-    <a:masterClrMapping/>
-  </p:clrMapOvr>
-</p:sld>
-</file>
-
-<file path=ppt/slides/slide8.xml><?xml version="1.0" encoding="utf-8"?>
-<p:sld xmlns:a="http://schemas.openxmlformats.org/drawingml/2006/main" xmlns:r="http://schemas.openxmlformats.org/officeDocument/2006/relationships" xmlns:p="http://schemas.openxmlformats.org/presentationml/2006/main">
-  <p:cSld>
-    <p:spTree>
-      <p:nvGrpSpPr>
-        <p:cNvPr id="1" name=""/>
-        <p:cNvGrpSpPr/>
-        <p:nvPr/>
-      </p:nvGrpSpPr>
-      <p:grpSpPr>
-        <a:xfrm>
-          <a:off x="0" y="0"/>
-          <a:ext cx="0" cy="0"/>
-          <a:chOff x="0" y="0"/>
-          <a:chExt cx="0" cy="0"/>
-        </a:xfrm>
-      </p:grpSpPr>
-      <p:sp>
-        <p:nvSpPr>
-          <p:cNvPr id="2" name="Title 1">
-            <a:extLst>
-              <a:ext uri="{FF2B5EF4-FFF2-40B4-BE49-F238E27FC236}">
-                <a16:creationId xmlns:a16="http://schemas.microsoft.com/office/drawing/2014/main" id="{D9EE0CC7-13E3-E839-CD79-3E2C824204A1}"/>
-              </a:ext>
-            </a:extLst>
-          </p:cNvPr>
-          <p:cNvSpPr>
-            <a:spLocks noGrp="1"/>
-          </p:cNvSpPr>
-          <p:nvPr>
-            <p:ph type="title"/>
-          </p:nvPr>
-        </p:nvSpPr>
-        <p:spPr/>
-        <p:txBody>
-          <a:bodyPr/>
-          <a:lstStyle/>
-          <a:p>
-            <a:endParaRPr lang="en-US"/>
-          </a:p>
-        </p:txBody>
-      </p:sp>
-      <p:sp>
-        <p:nvSpPr>
-          <p:cNvPr id="3" name="Content Placeholder 2">
-            <a:extLst>
-              <a:ext uri="{FF2B5EF4-FFF2-40B4-BE49-F238E27FC236}">
-                <a16:creationId xmlns:a16="http://schemas.microsoft.com/office/drawing/2014/main" id="{E018A355-9E85-BB63-D825-EB997BE32FE4}"/>
-              </a:ext>
-            </a:extLst>
-          </p:cNvPr>
-          <p:cNvSpPr>
-            <a:spLocks noGrp="1"/>
-          </p:cNvSpPr>
-          <p:nvPr>
-            <p:ph idx="1"/>
-          </p:nvPr>
-        </p:nvSpPr>
-        <p:spPr/>
-        <p:txBody>
-          <a:bodyPr/>
-          <a:lstStyle/>
-          <a:p>
-            <a:endParaRPr lang="en-US"/>
-          </a:p>
-        </p:txBody>
-      </p:sp>
-      <p:pic>
-        <p:nvPicPr>
-          <p:cNvPr id="4" name="Picture 3">
-            <a:extLst>
-              <a:ext uri="{FF2B5EF4-FFF2-40B4-BE49-F238E27FC236}">
-                <a16:creationId xmlns:a16="http://schemas.microsoft.com/office/drawing/2014/main" id="{016E9D6D-B1E0-2455-A1E9-5F23DFE4B619}"/>
-              </a:ext>
-            </a:extLst>
-          </p:cNvPr>
-          <p:cNvPicPr>
-            <a:picLocks noChangeAspect="1"/>
-          </p:cNvPicPr>
-          <p:nvPr/>
-        </p:nvPicPr>
-        <p:blipFill>
-          <a:blip r:embed="rId2"/>
-          <a:stretch>
-            <a:fillRect/>
-          </a:stretch>
-        </p:blipFill>
-        <p:spPr>
-          <a:xfrm>
-            <a:off x="1137146" y="0"/>
-            <a:ext cx="9917708" cy="6892496"/>
-          </a:xfrm>
-          <a:prstGeom prst="rect">
-            <a:avLst/>
-          </a:prstGeom>
-        </p:spPr>
-      </p:pic>
-    </p:spTree>
-    <p:extLst>
-      <p:ext uri="{BB962C8B-B14F-4D97-AF65-F5344CB8AC3E}">
-        <p14:creationId xmlns:p14="http://schemas.microsoft.com/office/powerpoint/2010/main" val="3720487206"/>
-      </p:ext>
-    </p:extLst>
-  </p:cSld>
-  <p:clrMapOvr>
-    <a:masterClrMapping/>
-  </p:clrMapOvr>
-</p:sld>
-</file>
-
-<file path=ppt/slides/slide9.xml><?xml version="1.0" encoding="utf-8"?>
-<p:sld xmlns:a="http://schemas.openxmlformats.org/drawingml/2006/main" xmlns:r="http://schemas.openxmlformats.org/officeDocument/2006/relationships" xmlns:p="http://schemas.openxmlformats.org/presentationml/2006/main">
-  <p:cSld>
-    <p:spTree>
-      <p:nvGrpSpPr>
-        <p:cNvPr id="1" name=""/>
-        <p:cNvGrpSpPr/>
-        <p:nvPr/>
-      </p:nvGrpSpPr>
-      <p:grpSpPr>
-        <a:xfrm>
-          <a:off x="0" y="0"/>
-          <a:ext cx="0" cy="0"/>
-          <a:chOff x="0" y="0"/>
-          <a:chExt cx="0" cy="0"/>
-        </a:xfrm>
-      </p:grpSpPr>
-      <p:sp>
-        <p:nvSpPr>
-          <p:cNvPr id="2" name="Title 1">
-            <a:extLst>
-              <a:ext uri="{FF2B5EF4-FFF2-40B4-BE49-F238E27FC236}">
-                <a16:creationId xmlns:a16="http://schemas.microsoft.com/office/drawing/2014/main" id="{7EF9860B-DFF8-D259-8D4D-4227B9F0AE3A}"/>
-              </a:ext>
-            </a:extLst>
-          </p:cNvPr>
-          <p:cNvSpPr>
-            <a:spLocks noGrp="1"/>
-          </p:cNvSpPr>
-          <p:nvPr>
-            <p:ph type="title"/>
-          </p:nvPr>
-        </p:nvSpPr>
-        <p:spPr/>
-        <p:txBody>
-          <a:bodyPr/>
-          <a:lstStyle/>
-          <a:p>
-            <a:r>
-              <a:rPr lang="en-US" dirty="0"/>
-              <a:t>Calculating Residuals</a:t>
-            </a:r>
-          </a:p>
-        </p:txBody>
-      </p:sp>
-      <p:sp>
-        <p:nvSpPr>
-          <p:cNvPr id="3" name="Content Placeholder 2">
-            <a:extLst>
-              <a:ext uri="{FF2B5EF4-FFF2-40B4-BE49-F238E27FC236}">
-                <a16:creationId xmlns:a16="http://schemas.microsoft.com/office/drawing/2014/main" id="{377B42DD-CEC8-F15F-D887-AE5B66FD5DA7}"/>
-              </a:ext>
-            </a:extLst>
-          </p:cNvPr>
-          <p:cNvSpPr>
-            <a:spLocks noGrp="1"/>
-          </p:cNvSpPr>
-          <p:nvPr>
-            <p:ph idx="1"/>
-          </p:nvPr>
-        </p:nvSpPr>
-        <p:spPr>
-          <a:xfrm>
-            <a:off x="181369" y="2015732"/>
-            <a:ext cx="4080793" cy="4120572"/>
-          </a:xfrm>
-        </p:spPr>
-        <p:txBody>
-          <a:bodyPr>
-            <a:normAutofit/>
-          </a:bodyPr>
-          <a:lstStyle/>
-          <a:p>
-            <a:r>
-              <a:rPr lang="en-US" dirty="0"/>
-              <a:t>If we have an expectation (analytical model, ML prediction, guess) and a true (empirical) value, we can calculate the residual. </a:t>
-            </a:r>
-          </a:p>
-          <a:p>
-            <a:r>
-              <a:rPr lang="en-US" dirty="0"/>
-              <a:t>At each empirical point, how accurate is the model? </a:t>
-            </a:r>
-          </a:p>
-          <a:p>
-            <a:r>
-              <a:rPr lang="en-US" dirty="0"/>
-              <a:t>We get one residual for each row of data (point):</a:t>
-            </a:r>
-          </a:p>
-          <a:p>
-            <a:pPr lvl="1"/>
-            <a:r>
-              <a:rPr lang="en-US" dirty="0" err="1"/>
-              <a:t>Y_predicted</a:t>
-            </a:r>
-            <a:r>
-              <a:rPr lang="en-US" dirty="0"/>
-              <a:t> – </a:t>
-            </a:r>
-            <a:r>
-              <a:rPr lang="en-US" dirty="0" err="1"/>
-              <a:t>Y_actual</a:t>
-            </a:r>
-            <a:endParaRPr lang="en-US" dirty="0"/>
-          </a:p>
-          <a:p>
-            <a:pPr lvl="1"/>
-            <a:endParaRPr lang="en-US" dirty="0"/>
-          </a:p>
-        </p:txBody>
-      </p:sp>
-      <p:pic>
-        <p:nvPicPr>
-          <p:cNvPr id="2050" name="Picture 2" descr="Residual Plots Unit #8 - Statistics. - ppt video online download">
-            <a:extLst>
-              <a:ext uri="{FF2B5EF4-FFF2-40B4-BE49-F238E27FC236}">
-                <a16:creationId xmlns:a16="http://schemas.microsoft.com/office/drawing/2014/main" id="{DC915E80-688C-ECF9-B4E3-140FCB08D755}"/>
+                <a16:creationId xmlns:a16="http://schemas.microsoft.com/office/drawing/2014/main" id="{4F665E50-429B-60A5-80FE-E3C709E71179}"/>
               </a:ext>
             </a:extLst>
           </p:cNvPr>
@@ -5297,13 +6440,15 @@
               </a:ext>
             </a:extLst>
           </a:blip>
-          <a:srcRect b="7548"/>
-          <a:stretch/>
+          <a:srcRect t="8261"/>
+          <a:stretch>
+            <a:fillRect/>
+          </a:stretch>
         </p:blipFill>
         <p:spPr bwMode="auto">
           <a:xfrm>
-            <a:off x="4426684" y="1473620"/>
-            <a:ext cx="7765315" cy="5384380"/>
+            <a:off x="919163" y="566530"/>
+            <a:ext cx="10353675" cy="6291470"/>
           </a:xfrm>
           <a:prstGeom prst="rect">
             <a:avLst/>
@@ -5323,7 +6468,7 @@
     </p:spTree>
     <p:extLst>
       <p:ext uri="{BB962C8B-B14F-4D97-AF65-F5344CB8AC3E}">
-        <p14:creationId xmlns:p14="http://schemas.microsoft.com/office/powerpoint/2010/main" val="1590843819"/>
+        <p14:creationId xmlns:p14="http://schemas.microsoft.com/office/powerpoint/2010/main" val="4282340740"/>
       </p:ext>
     </p:extLst>
   </p:cSld>

--- a/reference_material/slides/012_Errors.pptx
+++ b/reference_material/slides/012_Errors.pptx
@@ -6,24 +6,30 @@
   </p:sldMasterIdLst>
   <p:sldIdLst>
     <p:sldId id="263" r:id="rId2"/>
-    <p:sldId id="269" r:id="rId3"/>
-    <p:sldId id="270" r:id="rId4"/>
-    <p:sldId id="271" r:id="rId5"/>
-    <p:sldId id="256" r:id="rId6"/>
-    <p:sldId id="268" r:id="rId7"/>
-    <p:sldId id="274" r:id="rId8"/>
-    <p:sldId id="266" r:id="rId9"/>
-    <p:sldId id="272" r:id="rId10"/>
-    <p:sldId id="257" r:id="rId11"/>
-    <p:sldId id="258" r:id="rId12"/>
-    <p:sldId id="265" r:id="rId13"/>
-    <p:sldId id="264" r:id="rId14"/>
-    <p:sldId id="267" r:id="rId15"/>
-    <p:sldId id="259" r:id="rId16"/>
-    <p:sldId id="260" r:id="rId17"/>
-    <p:sldId id="273" r:id="rId18"/>
-    <p:sldId id="262" r:id="rId19"/>
-    <p:sldId id="261" r:id="rId20"/>
+    <p:sldId id="275" r:id="rId3"/>
+    <p:sldId id="276" r:id="rId4"/>
+    <p:sldId id="277" r:id="rId5"/>
+    <p:sldId id="278" r:id="rId6"/>
+    <p:sldId id="269" r:id="rId7"/>
+    <p:sldId id="270" r:id="rId8"/>
+    <p:sldId id="271" r:id="rId9"/>
+    <p:sldId id="256" r:id="rId10"/>
+    <p:sldId id="268" r:id="rId11"/>
+    <p:sldId id="274" r:id="rId12"/>
+    <p:sldId id="266" r:id="rId13"/>
+    <p:sldId id="257" r:id="rId14"/>
+    <p:sldId id="258" r:id="rId15"/>
+    <p:sldId id="272" r:id="rId16"/>
+    <p:sldId id="265" r:id="rId17"/>
+    <p:sldId id="264" r:id="rId18"/>
+    <p:sldId id="267" r:id="rId19"/>
+    <p:sldId id="259" r:id="rId20"/>
+    <p:sldId id="260" r:id="rId21"/>
+    <p:sldId id="273" r:id="rId22"/>
+    <p:sldId id="262" r:id="rId23"/>
+    <p:sldId id="280" r:id="rId24"/>
+    <p:sldId id="279" r:id="rId25"/>
+    <p:sldId id="261" r:id="rId26"/>
   </p:sldIdLst>
   <p:sldSz cx="12192000" cy="6858000"/>
   <p:notesSz cx="6858000" cy="9144000"/>
@@ -3808,7 +3814,7 @@
           <p:cNvPr id="2" name="Title 1">
             <a:extLst>
               <a:ext uri="{FF2B5EF4-FFF2-40B4-BE49-F238E27FC236}">
-                <a16:creationId xmlns:a16="http://schemas.microsoft.com/office/drawing/2014/main" id="{482C6352-913A-80C4-CF7E-B8EC17246DCA}"/>
+                <a16:creationId xmlns:a16="http://schemas.microsoft.com/office/drawing/2014/main" id="{8E6D282D-5B87-7E8C-8634-093003DF86FC}"/>
               </a:ext>
             </a:extLst>
           </p:cNvPr>
@@ -3826,7 +3832,7 @@
           <a:p>
             <a:r>
               <a:rPr lang="en-US" dirty="0"/>
-              <a:t>Errors</a:t>
+              <a:t>Data and Estimates</a:t>
             </a:r>
           </a:p>
         </p:txBody>
@@ -3836,7 +3842,7 @@
           <p:cNvPr id="3" name="Content Placeholder 2">
             <a:extLst>
               <a:ext uri="{FF2B5EF4-FFF2-40B4-BE49-F238E27FC236}">
-                <a16:creationId xmlns:a16="http://schemas.microsoft.com/office/drawing/2014/main" id="{95389208-C1D8-D820-95A6-46333A5231BD}"/>
+                <a16:creationId xmlns:a16="http://schemas.microsoft.com/office/drawing/2014/main" id="{67463E60-3095-93ED-90BF-C18284B88227}"/>
               </a:ext>
             </a:extLst>
           </p:cNvPr>
@@ -3859,49 +3865,45 @@
           <a:p>
             <a:r>
               <a:rPr lang="en-US" dirty="0"/>
-              <a:t>When matching empirical data to analytical distributions our match is never perfect. </a:t>
-            </a:r>
-          </a:p>
-          <a:p>
-            <a:r>
-              <a:rPr lang="en-US" dirty="0"/>
-              <a:t>Each point is “off” the analytical distribution by some amount. </a:t>
-            </a:r>
-          </a:p>
-          <a:p>
-            <a:r>
-              <a:rPr lang="en-US" dirty="0"/>
-              <a:t>The less the total amount of “off” is, the more closely matched the distribution. </a:t>
-            </a:r>
-          </a:p>
-          <a:p>
-            <a:endParaRPr lang="en-US" dirty="0"/>
-          </a:p>
-          <a:p>
-            <a:r>
-              <a:rPr lang="en-US" dirty="0"/>
-              <a:t>Predictions work the same way:</a:t>
-            </a:r>
-          </a:p>
-          <a:p>
-            <a:pPr lvl="1"/>
-            <a:r>
-              <a:rPr lang="en-US" dirty="0"/>
-              <a:t>Predict what a value should be. </a:t>
-            </a:r>
-          </a:p>
-          <a:p>
-            <a:pPr lvl="1"/>
-            <a:r>
-              <a:rPr lang="en-US" dirty="0"/>
-              <a:t>Measure our error.</a:t>
-            </a:r>
-          </a:p>
-          <a:p>
-            <a:pPr lvl="1"/>
-            <a:r>
-              <a:rPr lang="en-US" dirty="0"/>
-              <a:t>Summarize these errors to estimate overall accuracy. </a:t>
+              <a:t>So far we’ve looked at two main types of ”things”:</a:t>
+            </a:r>
+          </a:p>
+          <a:p>
+            <a:pPr lvl="1"/>
+            <a:r>
+              <a:rPr lang="en-US" dirty="0"/>
+              <a:t>Empirical data – real values. Generally a sample of a population. </a:t>
+            </a:r>
+          </a:p>
+          <a:p>
+            <a:pPr lvl="1"/>
+            <a:r>
+              <a:rPr lang="en-US" dirty="0"/>
+              <a:t>Models – a representation of some data. Analytical distributions and the line of best fit (regression line) are both models. </a:t>
+            </a:r>
+          </a:p>
+          <a:p>
+            <a:r>
+              <a:rPr lang="en-US" dirty="0"/>
+              <a:t>A model is a simplified representation of the data. </a:t>
+            </a:r>
+          </a:p>
+          <a:p>
+            <a:r>
+              <a:rPr lang="en-US" dirty="0"/>
+              <a:t>How good is a model? So far,  we’ve mainly looked to eyeball it.</a:t>
+            </a:r>
+          </a:p>
+          <a:p>
+            <a:r>
+              <a:rPr lang="en-US" dirty="0"/>
+              <a:t>The models always differ from the empirical data somewhat.  </a:t>
+            </a:r>
+          </a:p>
+          <a:p>
+            <a:r>
+              <a:rPr lang="en-US" dirty="0"/>
+              <a:t>How do we evaluate how good a model is? </a:t>
             </a:r>
           </a:p>
         </p:txBody>
@@ -3909,7 +3911,7 @@
     </p:spTree>
     <p:extLst>
       <p:ext uri="{BB962C8B-B14F-4D97-AF65-F5344CB8AC3E}">
-        <p14:creationId xmlns:p14="http://schemas.microsoft.com/office/powerpoint/2010/main" val="3134869059"/>
+        <p14:creationId xmlns:p14="http://schemas.microsoft.com/office/powerpoint/2010/main" val="3876072000"/>
       </p:ext>
     </p:extLst>
   </p:cSld>
@@ -3941,7 +3943,7 @@
           <p:cNvPr id="2" name="Title 1">
             <a:extLst>
               <a:ext uri="{FF2B5EF4-FFF2-40B4-BE49-F238E27FC236}">
-                <a16:creationId xmlns:a16="http://schemas.microsoft.com/office/drawing/2014/main" id="{26EF6B96-4AC2-5366-6E64-4FCABD653C4B}"/>
+                <a16:creationId xmlns:a16="http://schemas.microsoft.com/office/drawing/2014/main" id="{490857AF-E27A-214B-AEA1-7E64C3ED6145}"/>
               </a:ext>
             </a:extLst>
           </p:cNvPr>
@@ -3959,7 +3961,7 @@
           <a:p>
             <a:r>
               <a:rPr lang="en-US" dirty="0"/>
-              <a:t>Residuals</a:t>
+              <a:t>Analytical Distributions And Models</a:t>
             </a:r>
           </a:p>
         </p:txBody>
@@ -3969,7 +3971,7 @@
           <p:cNvPr id="3" name="Content Placeholder 2">
             <a:extLst>
               <a:ext uri="{FF2B5EF4-FFF2-40B4-BE49-F238E27FC236}">
-                <a16:creationId xmlns:a16="http://schemas.microsoft.com/office/drawing/2014/main" id="{5F735C24-FC39-2D6E-5A15-E5DC7C3D6B7D}"/>
+                <a16:creationId xmlns:a16="http://schemas.microsoft.com/office/drawing/2014/main" id="{768491DD-4138-2F8E-2866-D8E389DAF880}"/>
               </a:ext>
             </a:extLst>
           </p:cNvPr>
@@ -3982,75 +3984,125 @@
         </p:nvSpPr>
         <p:spPr>
           <a:xfrm>
-            <a:off x="111513" y="2015732"/>
-            <a:ext cx="4761570" cy="4037749"/>
-          </a:xfrm>
-        </p:spPr>
-        <p:txBody>
-          <a:bodyPr/>
-          <a:lstStyle/>
-          <a:p>
-            <a:r>
-              <a:rPr lang="en-US" dirty="0"/>
-              <a:t>A residual is how much one value is off from reality. </a:t>
-            </a:r>
-          </a:p>
-          <a:p>
-            <a:r>
-              <a:rPr lang="en-US" dirty="0"/>
-              <a:t>Each point in our data has its own residual – how “off” was the model vs that real value. </a:t>
-            </a:r>
-          </a:p>
-          <a:p>
-            <a:r>
-              <a:rPr lang="en-US" dirty="0"/>
-              <a:t>Here – </a:t>
-            </a:r>
-            <a:r>
-              <a:rPr lang="en-US" dirty="0" err="1"/>
-              <a:t>LoBF</a:t>
-            </a:r>
-            <a:r>
-              <a:rPr lang="en-US" dirty="0"/>
-              <a:t> is a model of the data.</a:t>
+            <a:off x="5776499" y="1853754"/>
+            <a:ext cx="6276353" cy="4199727"/>
+          </a:xfrm>
+        </p:spPr>
+        <p:txBody>
+          <a:bodyPr/>
+          <a:lstStyle/>
+          <a:p>
+            <a:r>
+              <a:rPr lang="en-US" dirty="0"/>
+              <a:t>Our analytical distributions are models. </a:t>
+            </a:r>
+          </a:p>
+          <a:p>
+            <a:pPr lvl="1"/>
+            <a:r>
+              <a:rPr lang="en-US" dirty="0"/>
+              <a:t>Mathematical representation of our data. </a:t>
+            </a:r>
+          </a:p>
+          <a:p>
+            <a:pPr lvl="1"/>
+            <a:r>
+              <a:rPr lang="en-US" dirty="0"/>
+              <a:t>Defined by some equation rather than collection of data. </a:t>
+            </a:r>
+          </a:p>
+          <a:p>
+            <a:r>
+              <a:rPr lang="en-US" dirty="0"/>
+              <a:t>Define how we expect data to fall. </a:t>
+            </a:r>
+          </a:p>
+          <a:p>
+            <a:r>
+              <a:rPr lang="en-US" dirty="0"/>
+              <a:t>Models aren’t perfect, they’re simplifications. </a:t>
+            </a:r>
+          </a:p>
+          <a:p>
+            <a:pPr lvl="1"/>
+            <a:r>
+              <a:rPr lang="en-US" dirty="0"/>
+              <a:t>We expect some difference between data and model. </a:t>
+            </a:r>
+          </a:p>
+          <a:p>
+            <a:r>
+              <a:rPr lang="en-US" dirty="0"/>
+              <a:t>Any other model works the same way. </a:t>
+            </a:r>
+          </a:p>
+          <a:p>
+            <a:pPr lvl="1"/>
+            <a:r>
+              <a:rPr lang="en-US" dirty="0"/>
+              <a:t>It gives a simple version of what we see in data. </a:t>
+            </a:r>
+          </a:p>
+          <a:p>
+            <a:pPr lvl="1"/>
+            <a:r>
+              <a:rPr lang="en-US" dirty="0"/>
+              <a:t>The model can ‘predict’ new values. </a:t>
             </a:r>
           </a:p>
         </p:txBody>
       </p:sp>
       <p:pic>
         <p:nvPicPr>
-          <p:cNvPr id="4" name="Picture 3">
+          <p:cNvPr id="8194" name="Picture 2" descr="The Ultimate Guide to Statistical Distributions: Normal, Uniform, Binomial,  Poisson &amp; More | by Rohan Mistry | Aug, 2025 | Medium">
             <a:extLst>
               <a:ext uri="{FF2B5EF4-FFF2-40B4-BE49-F238E27FC236}">
-                <a16:creationId xmlns:a16="http://schemas.microsoft.com/office/drawing/2014/main" id="{D38F8C1F-A22D-924B-1803-6143A067A40C}"/>
+                <a16:creationId xmlns:a16="http://schemas.microsoft.com/office/drawing/2014/main" id="{768A53FD-A4AC-8060-573C-E3193E459D26}"/>
               </a:ext>
             </a:extLst>
           </p:cNvPr>
           <p:cNvPicPr>
-            <a:picLocks noChangeAspect="1"/>
+            <a:picLocks noChangeAspect="1" noChangeArrowheads="1"/>
           </p:cNvPicPr>
           <p:nvPr/>
         </p:nvPicPr>
         <p:blipFill>
-          <a:blip r:embed="rId2"/>
+          <a:blip r:embed="rId2">
+            <a:extLst>
+              <a:ext uri="{28A0092B-C50C-407E-A947-70E740481C1C}">
+                <a14:useLocalDpi xmlns:a14="http://schemas.microsoft.com/office/drawing/2010/main" val="0"/>
+              </a:ext>
+            </a:extLst>
+          </a:blip>
+          <a:srcRect/>
           <a:stretch>
             <a:fillRect/>
           </a:stretch>
         </p:blipFill>
-        <p:spPr>
-          <a:xfrm>
-            <a:off x="4999492" y="1853754"/>
-            <a:ext cx="7140571" cy="4848129"/>
+        <p:spPr bwMode="auto">
+          <a:xfrm>
+            <a:off x="139148" y="1853754"/>
+            <a:ext cx="5637351" cy="3905911"/>
           </a:xfrm>
           <a:prstGeom prst="rect">
             <a:avLst/>
           </a:prstGeom>
+          <a:noFill/>
+          <a:extLst>
+            <a:ext uri="{909E8E84-426E-40DD-AFC4-6F175D3DCCD1}">
+              <a14:hiddenFill xmlns:a14="http://schemas.microsoft.com/office/drawing/2010/main">
+                <a:solidFill>
+                  <a:srgbClr val="FFFFFF"/>
+                </a:solidFill>
+              </a14:hiddenFill>
+            </a:ext>
+          </a:extLst>
         </p:spPr>
       </p:pic>
     </p:spTree>
     <p:extLst>
       <p:ext uri="{BB962C8B-B14F-4D97-AF65-F5344CB8AC3E}">
-        <p14:creationId xmlns:p14="http://schemas.microsoft.com/office/powerpoint/2010/main" val="3811981501"/>
+        <p14:creationId xmlns:p14="http://schemas.microsoft.com/office/powerpoint/2010/main" val="2301019072"/>
       </p:ext>
     </p:extLst>
   </p:cSld>
@@ -4077,141 +4129,79 @@
           <a:chExt cx="0" cy="0"/>
         </a:xfrm>
       </p:grpSpPr>
-      <p:sp>
-        <p:nvSpPr>
-          <p:cNvPr id="2" name="Title 1">
+      <p:pic>
+        <p:nvPicPr>
+          <p:cNvPr id="4" name="Picture 3">
             <a:extLst>
               <a:ext uri="{FF2B5EF4-FFF2-40B4-BE49-F238E27FC236}">
-                <a16:creationId xmlns:a16="http://schemas.microsoft.com/office/drawing/2014/main" id="{41AFA2BA-264D-E3CA-EB08-A9F10BFD3E54}"/>
+                <a16:creationId xmlns:a16="http://schemas.microsoft.com/office/drawing/2014/main" id="{1C74B564-B911-8B2C-FDD8-1DE6652204A5}"/>
               </a:ext>
             </a:extLst>
           </p:cNvPr>
-          <p:cNvSpPr>
-            <a:spLocks noGrp="1"/>
-          </p:cNvSpPr>
-          <p:nvPr>
-            <p:ph type="title"/>
-          </p:nvPr>
-        </p:nvSpPr>
-        <p:spPr/>
-        <p:txBody>
-          <a:bodyPr/>
-          <a:lstStyle/>
-          <a:p>
-            <a:r>
-              <a:rPr lang="en-US" dirty="0"/>
-              <a:t>In Analytical Distributions</a:t>
-            </a:r>
-          </a:p>
-        </p:txBody>
-      </p:sp>
-      <p:sp>
-        <p:nvSpPr>
-          <p:cNvPr id="3" name="Content Placeholder 2">
+          <p:cNvPicPr>
+            <a:picLocks noChangeAspect="1"/>
+          </p:cNvPicPr>
+          <p:nvPr/>
+        </p:nvPicPr>
+        <p:blipFill>
+          <a:blip r:embed="rId2"/>
+          <a:stretch>
+            <a:fillRect/>
+          </a:stretch>
+        </p:blipFill>
+        <p:spPr>
+          <a:xfrm>
+            <a:off x="764519" y="-22182"/>
+            <a:ext cx="10662962" cy="6902364"/>
+          </a:xfrm>
+          <a:prstGeom prst="rect">
+            <a:avLst/>
+          </a:prstGeom>
+        </p:spPr>
+      </p:pic>
+      <p:sp>
+        <p:nvSpPr>
+          <p:cNvPr id="2" name="TextBox 1">
             <a:extLst>
               <a:ext uri="{FF2B5EF4-FFF2-40B4-BE49-F238E27FC236}">
-                <a16:creationId xmlns:a16="http://schemas.microsoft.com/office/drawing/2014/main" id="{14E14678-FC62-6CF2-A4FF-346E8C4DC145}"/>
+                <a16:creationId xmlns:a16="http://schemas.microsoft.com/office/drawing/2014/main" id="{67B09457-7837-DDDE-819F-EACAED7EA4DF}"/>
               </a:ext>
             </a:extLst>
           </p:cNvPr>
-          <p:cNvSpPr>
-            <a:spLocks noGrp="1"/>
-          </p:cNvSpPr>
-          <p:nvPr>
-            <p:ph idx="1"/>
-          </p:nvPr>
+          <p:cNvSpPr txBox="1"/>
+          <p:nvPr/>
         </p:nvSpPr>
         <p:spPr>
           <a:xfrm>
-            <a:off x="1020199" y="2015732"/>
-            <a:ext cx="10034656" cy="4037749"/>
-          </a:xfrm>
-        </p:spPr>
-        <p:txBody>
-          <a:bodyPr/>
-          <a:lstStyle/>
-          <a:p>
-            <a:r>
-              <a:rPr lang="en-US" dirty="0"/>
-              <a:t>The idea of error works in the same way when matching empirical vs analytical distributions.</a:t>
-            </a:r>
-          </a:p>
-          <a:p>
-            <a:pPr lvl="1"/>
-            <a:r>
-              <a:rPr lang="en-US" dirty="0"/>
-              <a:t>Empirical is the real data. </a:t>
-            </a:r>
-          </a:p>
-          <a:p>
-            <a:pPr lvl="1"/>
-            <a:r>
-              <a:rPr lang="en-US" dirty="0"/>
-              <a:t>The analytical distribution is the prediction.</a:t>
-            </a:r>
-          </a:p>
-          <a:p>
-            <a:r>
-              <a:rPr lang="en-US" dirty="0"/>
-              <a:t>E.g. Consider matching a lognormal looking distribution to the </a:t>
-            </a:r>
-            <a:r>
-              <a:rPr lang="en-US" dirty="0" err="1"/>
-              <a:t>lognorm</a:t>
-            </a:r>
-            <a:r>
-              <a:rPr lang="en-US" dirty="0"/>
-              <a:t> analytical one:</a:t>
-            </a:r>
-          </a:p>
-          <a:p>
-            <a:pPr lvl="1"/>
-            <a:r>
-              <a:rPr lang="en-US" dirty="0"/>
-              <a:t>Empirical data tells us how many values we have in a bin. </a:t>
-            </a:r>
-          </a:p>
-          <a:p>
-            <a:pPr lvl="1"/>
-            <a:r>
-              <a:rPr lang="en-US" dirty="0"/>
-              <a:t>The analytical distribution tells us how many we expect (if the data follows that </a:t>
-            </a:r>
-            <a:r>
-              <a:rPr lang="en-US" dirty="0" err="1"/>
-              <a:t>dist</a:t>
-            </a:r>
-            <a:r>
-              <a:rPr lang="en-US" dirty="0"/>
-              <a:t>). </a:t>
-            </a:r>
-          </a:p>
-          <a:p>
-            <a:pPr lvl="1"/>
-            <a:r>
-              <a:rPr lang="en-US" dirty="0"/>
-              <a:t>The difference between the two is the residual, or amount of error. </a:t>
-            </a:r>
-          </a:p>
-          <a:p>
-            <a:r>
-              <a:rPr lang="en-US" dirty="0"/>
-              <a:t>This error is the ‘</a:t>
-            </a:r>
-            <a:r>
-              <a:rPr lang="en-US" dirty="0" err="1"/>
-              <a:t>miss’</a:t>
-            </a:r>
-            <a:r>
-              <a:rPr lang="en-US" dirty="0"/>
-              <a:t> of the model – it isn’t capturing the empirical pattern accurately. </a:t>
-            </a:r>
-          </a:p>
-          <a:p>
-            <a:pPr lvl="1"/>
-            <a:r>
-              <a:rPr lang="en-US" dirty="0"/>
-              <a:t>This could be due to the model not fitting, or due to actual variation from normal in data. </a:t>
+            <a:off x="2454965" y="815009"/>
+            <a:ext cx="4850296" cy="1077218"/>
+          </a:xfrm>
+          <a:prstGeom prst="rect">
+            <a:avLst/>
+          </a:prstGeom>
+          <a:noFill/>
+        </p:spPr>
+        <p:txBody>
+          <a:bodyPr wrap="square" rtlCol="0">
+            <a:spAutoFit/>
+          </a:bodyPr>
+          <a:lstStyle/>
+          <a:p>
+            <a:r>
+              <a:rPr lang="en-US" sz="2800" dirty="0"/>
+              <a:t>Another model:</a:t>
+            </a:r>
+          </a:p>
+          <a:p>
+            <a:r>
+              <a:rPr lang="en-US" dirty="0"/>
+              <a:t>Data – The dots. </a:t>
+            </a:r>
+          </a:p>
+          <a:p>
+            <a:r>
+              <a:rPr lang="en-US" dirty="0"/>
+              <a:t>Model – the line: y = m*x + b</a:t>
             </a:r>
           </a:p>
         </p:txBody>
@@ -4219,7 +4209,7 @@
     </p:spTree>
     <p:extLst>
       <p:ext uri="{BB962C8B-B14F-4D97-AF65-F5344CB8AC3E}">
-        <p14:creationId xmlns:p14="http://schemas.microsoft.com/office/powerpoint/2010/main" val="193075141"/>
+        <p14:creationId xmlns:p14="http://schemas.microsoft.com/office/powerpoint/2010/main" val="1434053830"/>
       </p:ext>
     </p:extLst>
   </p:cSld>
@@ -4251,7 +4241,7 @@
           <p:cNvPr id="2" name="Title 1">
             <a:extLst>
               <a:ext uri="{FF2B5EF4-FFF2-40B4-BE49-F238E27FC236}">
-                <a16:creationId xmlns:a16="http://schemas.microsoft.com/office/drawing/2014/main" id="{D9EE0CC7-13E3-E839-CD79-3E2C824204A1}"/>
+                <a16:creationId xmlns:a16="http://schemas.microsoft.com/office/drawing/2014/main" id="{482C6352-913A-80C4-CF7E-B8EC17246DCA}"/>
               </a:ext>
             </a:extLst>
           </p:cNvPr>
@@ -4267,7 +4257,10 @@
           <a:bodyPr/>
           <a:lstStyle/>
           <a:p>
-            <a:endParaRPr lang="en-US"/>
+            <a:r>
+              <a:rPr lang="en-US" dirty="0"/>
+              <a:t>Errors</a:t>
+            </a:r>
           </a:p>
         </p:txBody>
       </p:sp>
@@ -4276,7 +4269,7 @@
           <p:cNvPr id="3" name="Content Placeholder 2">
             <a:extLst>
               <a:ext uri="{FF2B5EF4-FFF2-40B4-BE49-F238E27FC236}">
-                <a16:creationId xmlns:a16="http://schemas.microsoft.com/office/drawing/2014/main" id="{E018A355-9E85-BB63-D825-EB997BE32FE4}"/>
+                <a16:creationId xmlns:a16="http://schemas.microsoft.com/office/drawing/2014/main" id="{95389208-C1D8-D820-95A6-46333A5231BD}"/>
               </a:ext>
             </a:extLst>
           </p:cNvPr>
@@ -4287,49 +4280,69 @@
             <p:ph idx="1"/>
           </p:nvPr>
         </p:nvSpPr>
-        <p:spPr/>
-        <p:txBody>
-          <a:bodyPr/>
-          <a:lstStyle/>
-          <a:p>
-            <a:endParaRPr lang="en-US"/>
-          </a:p>
-        </p:txBody>
-      </p:sp>
-      <p:pic>
-        <p:nvPicPr>
-          <p:cNvPr id="4" name="Picture 3">
-            <a:extLst>
-              <a:ext uri="{FF2B5EF4-FFF2-40B4-BE49-F238E27FC236}">
-                <a16:creationId xmlns:a16="http://schemas.microsoft.com/office/drawing/2014/main" id="{016E9D6D-B1E0-2455-A1E9-5F23DFE4B619}"/>
-              </a:ext>
-            </a:extLst>
-          </p:cNvPr>
-          <p:cNvPicPr>
-            <a:picLocks noChangeAspect="1"/>
-          </p:cNvPicPr>
-          <p:nvPr/>
-        </p:nvPicPr>
-        <p:blipFill>
-          <a:blip r:embed="rId2"/>
-          <a:stretch>
-            <a:fillRect/>
-          </a:stretch>
-        </p:blipFill>
         <p:spPr>
           <a:xfrm>
-            <a:off x="1137146" y="0"/>
-            <a:ext cx="9917708" cy="6892496"/>
-          </a:xfrm>
-          <a:prstGeom prst="rect">
-            <a:avLst/>
-          </a:prstGeom>
-        </p:spPr>
-      </p:pic>
+            <a:off x="1451579" y="2015732"/>
+            <a:ext cx="9603275" cy="4037749"/>
+          </a:xfrm>
+        </p:spPr>
+        <p:txBody>
+          <a:bodyPr/>
+          <a:lstStyle/>
+          <a:p>
+            <a:r>
+              <a:rPr lang="en-US" dirty="0"/>
+              <a:t>When matching empirical data to analytical distributions our match is never perfect. </a:t>
+            </a:r>
+          </a:p>
+          <a:p>
+            <a:r>
+              <a:rPr lang="en-US" dirty="0"/>
+              <a:t>Each point is “off” the analytical distribution by some amount. </a:t>
+            </a:r>
+          </a:p>
+          <a:p>
+            <a:r>
+              <a:rPr lang="en-US" dirty="0"/>
+              <a:t>The less the total amount of “off” is, the more closely matched the distribution. </a:t>
+            </a:r>
+          </a:p>
+          <a:p>
+            <a:endParaRPr lang="en-US" dirty="0"/>
+          </a:p>
+          <a:p>
+            <a:r>
+              <a:rPr lang="en-US" dirty="0"/>
+              <a:t>Predictions work the same way:</a:t>
+            </a:r>
+          </a:p>
+          <a:p>
+            <a:pPr lvl="1"/>
+            <a:r>
+              <a:rPr lang="en-US" dirty="0"/>
+              <a:t>Predict what a value should be. </a:t>
+            </a:r>
+          </a:p>
+          <a:p>
+            <a:pPr lvl="1"/>
+            <a:r>
+              <a:rPr lang="en-US" dirty="0"/>
+              <a:t>Measure our error.</a:t>
+            </a:r>
+          </a:p>
+          <a:p>
+            <a:pPr lvl="1"/>
+            <a:r>
+              <a:rPr lang="en-US" dirty="0"/>
+              <a:t>Summarize these errors to estimate overall accuracy. </a:t>
+            </a:r>
+          </a:p>
+        </p:txBody>
+      </p:sp>
     </p:spTree>
     <p:extLst>
       <p:ext uri="{BB962C8B-B14F-4D97-AF65-F5344CB8AC3E}">
-        <p14:creationId xmlns:p14="http://schemas.microsoft.com/office/powerpoint/2010/main" val="3720487206"/>
+        <p14:creationId xmlns:p14="http://schemas.microsoft.com/office/powerpoint/2010/main" val="3134869059"/>
       </p:ext>
     </p:extLst>
   </p:cSld>
@@ -4361,7 +4374,7 @@
           <p:cNvPr id="2" name="Title 1">
             <a:extLst>
               <a:ext uri="{FF2B5EF4-FFF2-40B4-BE49-F238E27FC236}">
-                <a16:creationId xmlns:a16="http://schemas.microsoft.com/office/drawing/2014/main" id="{7EF9860B-DFF8-D259-8D4D-4227B9F0AE3A}"/>
+                <a16:creationId xmlns:a16="http://schemas.microsoft.com/office/drawing/2014/main" id="{26EF6B96-4AC2-5366-6E64-4FCABD653C4B}"/>
               </a:ext>
             </a:extLst>
           </p:cNvPr>
@@ -4379,7 +4392,7 @@
           <a:p>
             <a:r>
               <a:rPr lang="en-US" dirty="0"/>
-              <a:t>Calculating Residuals</a:t>
+              <a:t>Residuals</a:t>
             </a:r>
           </a:p>
         </p:txBody>
@@ -4389,7 +4402,7 @@
           <p:cNvPr id="3" name="Content Placeholder 2">
             <a:extLst>
               <a:ext uri="{FF2B5EF4-FFF2-40B4-BE49-F238E27FC236}">
-                <a16:creationId xmlns:a16="http://schemas.microsoft.com/office/drawing/2014/main" id="{377B42DD-CEC8-F15F-D887-AE5B66FD5DA7}"/>
+                <a16:creationId xmlns:a16="http://schemas.microsoft.com/office/drawing/2014/main" id="{5F735C24-FC39-2D6E-5A15-E5DC7C3D6B7D}"/>
               </a:ext>
             </a:extLst>
           </p:cNvPr>
@@ -4402,104 +4415,75 @@
         </p:nvSpPr>
         <p:spPr>
           <a:xfrm>
-            <a:off x="181369" y="2015732"/>
-            <a:ext cx="4080793" cy="4120572"/>
-          </a:xfrm>
-        </p:spPr>
-        <p:txBody>
-          <a:bodyPr>
-            <a:normAutofit/>
-          </a:bodyPr>
-          <a:lstStyle/>
-          <a:p>
-            <a:r>
-              <a:rPr lang="en-US" dirty="0"/>
-              <a:t>If we have an expectation (analytical model, ML prediction, guess) and a true (empirical) value, we can calculate the residual. </a:t>
-            </a:r>
-          </a:p>
-          <a:p>
-            <a:r>
-              <a:rPr lang="en-US" dirty="0"/>
-              <a:t>At each empirical point, how accurate is the model? </a:t>
-            </a:r>
-          </a:p>
-          <a:p>
-            <a:r>
-              <a:rPr lang="en-US" dirty="0"/>
-              <a:t>We get one residual for each row of data (point):</a:t>
-            </a:r>
-          </a:p>
-          <a:p>
-            <a:pPr lvl="1"/>
+            <a:off x="111513" y="2015732"/>
+            <a:ext cx="4761570" cy="4037749"/>
+          </a:xfrm>
+        </p:spPr>
+        <p:txBody>
+          <a:bodyPr/>
+          <a:lstStyle/>
+          <a:p>
+            <a:r>
+              <a:rPr lang="en-US" dirty="0"/>
+              <a:t>A residual is how much one value is off from reality. </a:t>
+            </a:r>
+          </a:p>
+          <a:p>
+            <a:r>
+              <a:rPr lang="en-US" dirty="0"/>
+              <a:t>Each point in our data has its own residual – how “off” was the model vs that real value. </a:t>
+            </a:r>
+          </a:p>
+          <a:p>
+            <a:r>
+              <a:rPr lang="en-US" dirty="0"/>
+              <a:t>Here – </a:t>
+            </a:r>
             <a:r>
               <a:rPr lang="en-US" dirty="0" err="1"/>
-              <a:t>Y_predicted</a:t>
-            </a:r>
-            <a:r>
-              <a:rPr lang="en-US" dirty="0"/>
-              <a:t> – </a:t>
-            </a:r>
-            <a:r>
-              <a:rPr lang="en-US" dirty="0" err="1"/>
-              <a:t>Y_actual</a:t>
-            </a:r>
-            <a:endParaRPr lang="en-US" dirty="0"/>
-          </a:p>
-          <a:p>
-            <a:pPr lvl="1"/>
-            <a:endParaRPr lang="en-US" dirty="0"/>
+              <a:t>LoBF</a:t>
+            </a:r>
+            <a:r>
+              <a:rPr lang="en-US" dirty="0"/>
+              <a:t> is a model of the data.</a:t>
+            </a:r>
           </a:p>
         </p:txBody>
       </p:sp>
       <p:pic>
         <p:nvPicPr>
-          <p:cNvPr id="2050" name="Picture 2" descr="Residual Plots Unit #8 - Statistics. - ppt video online download">
+          <p:cNvPr id="4" name="Picture 3">
             <a:extLst>
               <a:ext uri="{FF2B5EF4-FFF2-40B4-BE49-F238E27FC236}">
-                <a16:creationId xmlns:a16="http://schemas.microsoft.com/office/drawing/2014/main" id="{DC915E80-688C-ECF9-B4E3-140FCB08D755}"/>
+                <a16:creationId xmlns:a16="http://schemas.microsoft.com/office/drawing/2014/main" id="{D38F8C1F-A22D-924B-1803-6143A067A40C}"/>
               </a:ext>
             </a:extLst>
           </p:cNvPr>
           <p:cNvPicPr>
-            <a:picLocks noChangeAspect="1" noChangeArrowheads="1"/>
+            <a:picLocks noChangeAspect="1"/>
           </p:cNvPicPr>
           <p:nvPr/>
         </p:nvPicPr>
-        <p:blipFill rotWithShape="1">
-          <a:blip r:embed="rId2">
-            <a:extLst>
-              <a:ext uri="{28A0092B-C50C-407E-A947-70E740481C1C}">
-                <a14:useLocalDpi xmlns:a14="http://schemas.microsoft.com/office/drawing/2010/main" val="0"/>
-              </a:ext>
-            </a:extLst>
-          </a:blip>
-          <a:srcRect b="7548"/>
-          <a:stretch/>
+        <p:blipFill>
+          <a:blip r:embed="rId2"/>
+          <a:stretch>
+            <a:fillRect/>
+          </a:stretch>
         </p:blipFill>
-        <p:spPr bwMode="auto">
-          <a:xfrm>
-            <a:off x="4426684" y="1473620"/>
-            <a:ext cx="7765315" cy="5384380"/>
+        <p:spPr>
+          <a:xfrm>
+            <a:off x="4999492" y="1853754"/>
+            <a:ext cx="7140571" cy="4848129"/>
           </a:xfrm>
           <a:prstGeom prst="rect">
             <a:avLst/>
           </a:prstGeom>
-          <a:noFill/>
-          <a:extLst>
-            <a:ext uri="{909E8E84-426E-40DD-AFC4-6F175D3DCCD1}">
-              <a14:hiddenFill xmlns:a14="http://schemas.microsoft.com/office/drawing/2010/main">
-                <a:solidFill>
-                  <a:srgbClr val="FFFFFF"/>
-                </a:solidFill>
-              </a14:hiddenFill>
-            </a:ext>
-          </a:extLst>
         </p:spPr>
       </p:pic>
     </p:spTree>
     <p:extLst>
       <p:ext uri="{BB962C8B-B14F-4D97-AF65-F5344CB8AC3E}">
-        <p14:creationId xmlns:p14="http://schemas.microsoft.com/office/powerpoint/2010/main" val="1590843819"/>
+        <p14:creationId xmlns:p14="http://schemas.microsoft.com/office/powerpoint/2010/main" val="3811981501"/>
       </p:ext>
     </p:extLst>
   </p:cSld>
@@ -4510,7 +4494,7 @@
 </file>
 
 <file path=ppt/slides/slide15.xml><?xml version="1.0" encoding="utf-8"?>
-<p:sld xmlns:a="http://schemas.openxmlformats.org/drawingml/2006/main" xmlns:r="http://schemas.openxmlformats.org/officeDocument/2006/relationships" xmlns:p="http://schemas.openxmlformats.org/presentationml/2006/main">
+<p:sld xmlns:a="http://schemas.openxmlformats.org/drawingml/2006/main" xmlns:r="http://schemas.openxmlformats.org/officeDocument/2006/relationships" xmlns:p="http://schemas.openxmlformats.org/presentationml/2006/main" show="0">
   <p:cSld>
     <p:spTree>
       <p:nvGrpSpPr>
@@ -4526,127 +4510,12 @@
           <a:chExt cx="0" cy="0"/>
         </a:xfrm>
       </p:grpSpPr>
-      <p:sp>
-        <p:nvSpPr>
-          <p:cNvPr id="2" name="Title 1">
-            <a:extLst>
-              <a:ext uri="{FF2B5EF4-FFF2-40B4-BE49-F238E27FC236}">
-                <a16:creationId xmlns:a16="http://schemas.microsoft.com/office/drawing/2014/main" id="{387B9AE9-C7BA-7C94-52F0-B3F727BF728E}"/>
-              </a:ext>
-            </a:extLst>
-          </p:cNvPr>
-          <p:cNvSpPr>
-            <a:spLocks noGrp="1"/>
-          </p:cNvSpPr>
-          <p:nvPr>
-            <p:ph type="title"/>
-          </p:nvPr>
-        </p:nvSpPr>
-        <p:spPr/>
-        <p:txBody>
-          <a:bodyPr/>
-          <a:lstStyle/>
-          <a:p>
-            <a:r>
-              <a:rPr lang="en-US" dirty="0"/>
-              <a:t>Summarization of Errors</a:t>
-            </a:r>
-          </a:p>
-        </p:txBody>
-      </p:sp>
-      <p:sp>
-        <p:nvSpPr>
-          <p:cNvPr id="3" name="Content Placeholder 2">
-            <a:extLst>
-              <a:ext uri="{FF2B5EF4-FFF2-40B4-BE49-F238E27FC236}">
-                <a16:creationId xmlns:a16="http://schemas.microsoft.com/office/drawing/2014/main" id="{3436DCAA-7675-6826-7BFF-726EC4BF5418}"/>
-              </a:ext>
-            </a:extLst>
-          </p:cNvPr>
-          <p:cNvSpPr>
-            <a:spLocks noGrp="1"/>
-          </p:cNvSpPr>
-          <p:nvPr>
-            <p:ph idx="1"/>
-          </p:nvPr>
-        </p:nvSpPr>
-        <p:spPr>
-          <a:xfrm>
-            <a:off x="144967" y="1934598"/>
-            <a:ext cx="10909888" cy="4198573"/>
-          </a:xfrm>
-        </p:spPr>
-        <p:txBody>
-          <a:bodyPr>
-            <a:normAutofit/>
-          </a:bodyPr>
-          <a:lstStyle/>
-          <a:p>
-            <a:r>
-              <a:rPr lang="en-US" dirty="0"/>
-              <a:t>When dealing with many points, a list of residuals is impractical. </a:t>
-            </a:r>
-          </a:p>
-          <a:p>
-            <a:pPr lvl="1"/>
-            <a:r>
-              <a:rPr lang="en-US" dirty="0"/>
-              <a:t>Think of a dataset with 10,000,000 rows – a list of that many residuals is impractical. </a:t>
-            </a:r>
-          </a:p>
-          <a:p>
-            <a:r>
-              <a:rPr lang="en-US" dirty="0"/>
-              <a:t>We can summarize residuals into one measure of error. </a:t>
-            </a:r>
-          </a:p>
-          <a:p>
-            <a:r>
-              <a:rPr lang="en-US" dirty="0"/>
-              <a:t>There are several ways to summarize error, e.g.</a:t>
-            </a:r>
-          </a:p>
-          <a:p>
-            <a:pPr lvl="1"/>
-            <a:r>
-              <a:rPr lang="en-US" dirty="0"/>
-              <a:t>MSE – Mean squared error. Square residuals and average them.</a:t>
-            </a:r>
-          </a:p>
-          <a:p>
-            <a:pPr lvl="1"/>
-            <a:r>
-              <a:rPr lang="en-US" dirty="0"/>
-              <a:t>RMSE – Root mean squared error. Take the square root of MSE. </a:t>
-            </a:r>
-          </a:p>
-          <a:p>
-            <a:pPr lvl="1"/>
-            <a:r>
-              <a:rPr lang="en-US" dirty="0"/>
-              <a:t>MAE – Mean absolute error. Average the absolute values of the residuals. </a:t>
-            </a:r>
-          </a:p>
-          <a:p>
-            <a:r>
-              <a:rPr lang="en-US" dirty="0"/>
-              <a:t>RMSE (or MSE) is the most common error measure for us. </a:t>
-            </a:r>
-          </a:p>
-          <a:p>
-            <a:r>
-              <a:rPr lang="en-US" dirty="0"/>
-              <a:t>Lower error amounts tell us that the model and the empirical are similar. </a:t>
-            </a:r>
-          </a:p>
-        </p:txBody>
-      </p:sp>
       <p:pic>
         <p:nvPicPr>
-          <p:cNvPr id="5122" name="Picture 2" descr="Essential Regression Evaluation Metrics: MSE, RMSE, MAE, R², and Adjusted  R² | by FARSHAD K | Medium">
+          <p:cNvPr id="4098" name="Picture 2" descr="machine learning - Linear Regression: how to discern a possible correlation  between observation errors from scatter plot - Cross Validated">
             <a:extLst>
               <a:ext uri="{FF2B5EF4-FFF2-40B4-BE49-F238E27FC236}">
-                <a16:creationId xmlns:a16="http://schemas.microsoft.com/office/drawing/2014/main" id="{0BE68346-45FF-C8FD-AD8E-1C10139C6281}"/>
+                <a16:creationId xmlns:a16="http://schemas.microsoft.com/office/drawing/2014/main" id="{4F665E50-429B-60A5-80FE-E3C709E71179}"/>
               </a:ext>
             </a:extLst>
           </p:cNvPr>
@@ -4663,15 +4532,15 @@
               </a:ext>
             </a:extLst>
           </a:blip>
-          <a:srcRect t="15073" b="18406"/>
+          <a:srcRect t="8261"/>
           <a:stretch>
             <a:fillRect/>
           </a:stretch>
         </p:blipFill>
         <p:spPr bwMode="auto">
           <a:xfrm>
-            <a:off x="7251699" y="2725189"/>
-            <a:ext cx="4940301" cy="1848585"/>
+            <a:off x="919163" y="566530"/>
+            <a:ext cx="10353675" cy="6291470"/>
           </a:xfrm>
           <a:prstGeom prst="rect">
             <a:avLst/>
@@ -4691,7 +4560,7 @@
     </p:spTree>
     <p:extLst>
       <p:ext uri="{BB962C8B-B14F-4D97-AF65-F5344CB8AC3E}">
-        <p14:creationId xmlns:p14="http://schemas.microsoft.com/office/powerpoint/2010/main" val="3737122044"/>
+        <p14:creationId xmlns:p14="http://schemas.microsoft.com/office/powerpoint/2010/main" val="4282340740"/>
       </p:ext>
     </p:extLst>
   </p:cSld>
@@ -4723,7 +4592,7 @@
           <p:cNvPr id="2" name="Title 1">
             <a:extLst>
               <a:ext uri="{FF2B5EF4-FFF2-40B4-BE49-F238E27FC236}">
-                <a16:creationId xmlns:a16="http://schemas.microsoft.com/office/drawing/2014/main" id="{E9356086-BE05-B01B-10A4-6D1976445E25}"/>
+                <a16:creationId xmlns:a16="http://schemas.microsoft.com/office/drawing/2014/main" id="{41AFA2BA-264D-E3CA-EB08-A9F10BFD3E54}"/>
               </a:ext>
             </a:extLst>
           </p:cNvPr>
@@ -4741,7 +4610,7 @@
           <a:p>
             <a:r>
               <a:rPr lang="en-US" dirty="0"/>
-              <a:t>Why Squared?</a:t>
+              <a:t>In Analytical Distributions</a:t>
             </a:r>
           </a:p>
         </p:txBody>
@@ -4751,7 +4620,7 @@
           <p:cNvPr id="3" name="Content Placeholder 2">
             <a:extLst>
               <a:ext uri="{FF2B5EF4-FFF2-40B4-BE49-F238E27FC236}">
-                <a16:creationId xmlns:a16="http://schemas.microsoft.com/office/drawing/2014/main" id="{BC34DD8C-2FBC-A875-6B61-74B2788B9CD3}"/>
+                <a16:creationId xmlns:a16="http://schemas.microsoft.com/office/drawing/2014/main" id="{14E14678-FC62-6CF2-A4FF-346E8C4DC145}"/>
               </a:ext>
             </a:extLst>
           </p:cNvPr>
@@ -4764,70 +4633,95 @@
         </p:nvSpPr>
         <p:spPr>
           <a:xfrm>
-            <a:off x="1451579" y="2015732"/>
-            <a:ext cx="9603275" cy="4037749"/>
-          </a:xfrm>
-        </p:spPr>
-        <p:txBody>
-          <a:bodyPr>
-            <a:normAutofit lnSpcReduction="10000"/>
-          </a:bodyPr>
-          <a:lstStyle/>
-          <a:p>
-            <a:r>
-              <a:rPr lang="en-US" dirty="0"/>
-              <a:t>The error measures either squared or took the absolute value of the residual. </a:t>
-            </a:r>
-          </a:p>
-          <a:p>
-            <a:r>
-              <a:rPr lang="en-US" dirty="0"/>
-              <a:t>Squaring does a couple of things:</a:t>
-            </a:r>
-          </a:p>
-          <a:p>
-            <a:pPr lvl="1"/>
-            <a:r>
-              <a:rPr lang="en-US" dirty="0"/>
-              <a:t>Eliminates negatives. We get a measure of the magnitude. (MAE* also does this.)</a:t>
-            </a:r>
-          </a:p>
-          <a:p>
-            <a:pPr lvl="1"/>
-            <a:r>
-              <a:rPr lang="en-US" dirty="0"/>
-              <a:t>Penalizes large residuals. </a:t>
-            </a:r>
-          </a:p>
-          <a:p>
-            <a:r>
-              <a:rPr lang="en-US" dirty="0"/>
-              <a:t>Having residuals that are small are good, even though they’ll never be perfect. </a:t>
-            </a:r>
-          </a:p>
-          <a:p>
-            <a:r>
-              <a:rPr lang="en-US" dirty="0"/>
-              <a:t>Having large residuals indicates massive misses. </a:t>
-            </a:r>
-          </a:p>
-          <a:p>
-            <a:r>
-              <a:rPr lang="en-US" dirty="0"/>
-              <a:t>MSE/RMSE tends to reward models without many large residuals. </a:t>
-            </a:r>
-          </a:p>
-          <a:p>
-            <a:pPr lvl="1"/>
-            <a:r>
-              <a:rPr lang="en-US" dirty="0"/>
-              <a:t>Few large misses. </a:t>
-            </a:r>
-          </a:p>
-          <a:p>
-            <a:r>
-              <a:rPr lang="en-US" dirty="0"/>
-              <a:t>*Absolute values make for weird math, which is one reason it is less common. </a:t>
+            <a:off x="1020199" y="2015732"/>
+            <a:ext cx="10034656" cy="4037749"/>
+          </a:xfrm>
+        </p:spPr>
+        <p:txBody>
+          <a:bodyPr/>
+          <a:lstStyle/>
+          <a:p>
+            <a:r>
+              <a:rPr lang="en-US" dirty="0"/>
+              <a:t>The idea of error works in the same way when matching empirical vs analytical distributions.</a:t>
+            </a:r>
+          </a:p>
+          <a:p>
+            <a:pPr lvl="1"/>
+            <a:r>
+              <a:rPr lang="en-US" dirty="0"/>
+              <a:t>Empirical is the real data. </a:t>
+            </a:r>
+          </a:p>
+          <a:p>
+            <a:pPr lvl="1"/>
+            <a:r>
+              <a:rPr lang="en-US" dirty="0"/>
+              <a:t>The analytical distribution is the prediction.</a:t>
+            </a:r>
+          </a:p>
+          <a:p>
+            <a:r>
+              <a:rPr lang="en-US" dirty="0"/>
+              <a:t>E.g. Consider matching a lognormal looking distribution to the </a:t>
+            </a:r>
+            <a:r>
+              <a:rPr lang="en-US" dirty="0" err="1"/>
+              <a:t>lognorm</a:t>
+            </a:r>
+            <a:r>
+              <a:rPr lang="en-US" dirty="0"/>
+              <a:t> analytical one:</a:t>
+            </a:r>
+          </a:p>
+          <a:p>
+            <a:pPr lvl="1"/>
+            <a:r>
+              <a:rPr lang="en-US" dirty="0"/>
+              <a:t>Empirical data tells us how many values we have in a bin. </a:t>
+            </a:r>
+          </a:p>
+          <a:p>
+            <a:pPr lvl="1"/>
+            <a:r>
+              <a:rPr lang="en-US" dirty="0"/>
+              <a:t>The analytical distribution tells us how many we expect (if the data follows that </a:t>
+            </a:r>
+            <a:r>
+              <a:rPr lang="en-US" dirty="0" err="1"/>
+              <a:t>dist</a:t>
+            </a:r>
+            <a:r>
+              <a:rPr lang="en-US" dirty="0"/>
+              <a:t>). </a:t>
+            </a:r>
+          </a:p>
+          <a:p>
+            <a:pPr lvl="1"/>
+            <a:r>
+              <a:rPr lang="en-US" dirty="0"/>
+              <a:t>The difference between the two is the residual, or amount of error. </a:t>
+            </a:r>
+          </a:p>
+          <a:p>
+            <a:r>
+              <a:rPr lang="en-US" dirty="0"/>
+              <a:t>This error is the ‘</a:t>
+            </a:r>
+            <a:r>
+              <a:rPr lang="en-US" dirty="0" err="1"/>
+              <a:t>miss’</a:t>
+            </a:r>
+            <a:r>
+              <a:rPr lang="en-US" dirty="0"/>
+              <a:t> of the model – it isn’t capturing the empirical pattern accurately. </a:t>
+            </a:r>
+          </a:p>
+          <a:p>
+            <a:pPr lvl="1"/>
+            <a:r>
+              <a:rPr lang="en-US" dirty="0"/>
+              <a:t>This could be due to the model not fitting, or due to actual variation from normal in data. </a:t>
             </a:r>
           </a:p>
         </p:txBody>
@@ -4835,7 +4729,7 @@
     </p:spTree>
     <p:extLst>
       <p:ext uri="{BB962C8B-B14F-4D97-AF65-F5344CB8AC3E}">
-        <p14:creationId xmlns:p14="http://schemas.microsoft.com/office/powerpoint/2010/main" val="3570164820"/>
+        <p14:creationId xmlns:p14="http://schemas.microsoft.com/office/powerpoint/2010/main" val="193075141"/>
       </p:ext>
     </p:extLst>
   </p:cSld>
@@ -4867,7 +4761,7 @@
           <p:cNvPr id="2" name="Title 1">
             <a:extLst>
               <a:ext uri="{FF2B5EF4-FFF2-40B4-BE49-F238E27FC236}">
-                <a16:creationId xmlns:a16="http://schemas.microsoft.com/office/drawing/2014/main" id="{F8D0BEBB-87B6-B031-54D9-7E3DD180EFBA}"/>
+                <a16:creationId xmlns:a16="http://schemas.microsoft.com/office/drawing/2014/main" id="{D9EE0CC7-13E3-E839-CD79-3E2C824204A1}"/>
               </a:ext>
             </a:extLst>
           </p:cNvPr>
@@ -4883,10 +4777,7 @@
           <a:bodyPr/>
           <a:lstStyle/>
           <a:p>
-            <a:r>
-              <a:rPr lang="en-US" dirty="0"/>
-              <a:t>Where’s the Error From?</a:t>
-            </a:r>
+            <a:endParaRPr lang="en-US"/>
           </a:p>
         </p:txBody>
       </p:sp>
@@ -4895,7 +4786,7 @@
           <p:cNvPr id="3" name="Content Placeholder 2">
             <a:extLst>
               <a:ext uri="{FF2B5EF4-FFF2-40B4-BE49-F238E27FC236}">
-                <a16:creationId xmlns:a16="http://schemas.microsoft.com/office/drawing/2014/main" id="{B6092BB6-929A-CCAA-B290-DA2EB966A7B5}"/>
+                <a16:creationId xmlns:a16="http://schemas.microsoft.com/office/drawing/2014/main" id="{E018A355-9E85-BB63-D825-EB997BE32FE4}"/>
               </a:ext>
             </a:extLst>
           </p:cNvPr>
@@ -4906,127 +4797,49 @@
             <p:ph idx="1"/>
           </p:nvPr>
         </p:nvSpPr>
-        <p:spPr>
-          <a:xfrm>
-            <a:off x="5724497" y="1853754"/>
-            <a:ext cx="6467503" cy="4199727"/>
-          </a:xfrm>
-        </p:spPr>
-        <p:txBody>
-          <a:bodyPr>
-            <a:normAutofit/>
-          </a:bodyPr>
-          <a:lstStyle/>
-          <a:p>
-            <a:r>
-              <a:rPr lang="en-US" dirty="0"/>
-              <a:t>Error is just the difference between model and empirical. </a:t>
-            </a:r>
-          </a:p>
-          <a:p>
-            <a:pPr lvl="1"/>
-            <a:r>
-              <a:rPr lang="en-US" dirty="0"/>
-              <a:t>This isn’t an absolute statement of ‘truth’. </a:t>
-            </a:r>
-          </a:p>
-          <a:p>
-            <a:pPr lvl="1"/>
-            <a:r>
-              <a:rPr lang="en-US" dirty="0"/>
-              <a:t>Models are always approximations. </a:t>
-            </a:r>
-          </a:p>
-          <a:p>
-            <a:pPr lvl="1"/>
-            <a:r>
-              <a:rPr lang="en-US" dirty="0" err="1"/>
-              <a:t>A.k.a</a:t>
-            </a:r>
-            <a:r>
-              <a:rPr lang="en-US" dirty="0"/>
-              <a:t> difference between expectation and empirical. </a:t>
-            </a:r>
-          </a:p>
-          <a:p>
-            <a:r>
-              <a:rPr lang="en-US" dirty="0"/>
-              <a:t>Still need judgement. </a:t>
-            </a:r>
-          </a:p>
-          <a:p>
-            <a:pPr lvl="1"/>
-            <a:r>
-              <a:rPr lang="en-US" dirty="0"/>
-              <a:t>Is model good and data odd, or do we have wrong model? </a:t>
-            </a:r>
-          </a:p>
-          <a:p>
-            <a:r>
-              <a:rPr lang="en-US" dirty="0"/>
-              <a:t>E.g. are there actually more 9.5 and 12-13 people in reality or did we just randomly get a few more in our sample. </a:t>
-            </a:r>
-          </a:p>
-          <a:p>
-            <a:pPr lvl="1"/>
-            <a:r>
-              <a:rPr lang="en-US" dirty="0"/>
-              <a:t>Maybe model should be slightly fatter. </a:t>
-            </a:r>
+        <p:spPr/>
+        <p:txBody>
+          <a:bodyPr/>
+          <a:lstStyle/>
+          <a:p>
+            <a:endParaRPr lang="en-US"/>
           </a:p>
         </p:txBody>
       </p:sp>
       <p:pic>
         <p:nvPicPr>
-          <p:cNvPr id="6146" name="Picture 2" descr="Distribution Of Men's Shoe Sizes | Fila Men's Galvanize Chef Providers Shoes">
+          <p:cNvPr id="4" name="Picture 3">
             <a:extLst>
               <a:ext uri="{FF2B5EF4-FFF2-40B4-BE49-F238E27FC236}">
-                <a16:creationId xmlns:a16="http://schemas.microsoft.com/office/drawing/2014/main" id="{93598D7A-D7B3-5B9D-E376-FBC20D75F549}"/>
+                <a16:creationId xmlns:a16="http://schemas.microsoft.com/office/drawing/2014/main" id="{016E9D6D-B1E0-2455-A1E9-5F23DFE4B619}"/>
               </a:ext>
             </a:extLst>
           </p:cNvPr>
           <p:cNvPicPr>
-            <a:picLocks noChangeAspect="1" noChangeArrowheads="1"/>
+            <a:picLocks noChangeAspect="1"/>
           </p:cNvPicPr>
           <p:nvPr/>
         </p:nvPicPr>
         <p:blipFill>
-          <a:blip r:embed="rId2">
-            <a:extLst>
-              <a:ext uri="{28A0092B-C50C-407E-A947-70E740481C1C}">
-                <a14:useLocalDpi xmlns:a14="http://schemas.microsoft.com/office/drawing/2010/main" val="0"/>
-              </a:ext>
-            </a:extLst>
-          </a:blip>
-          <a:srcRect/>
+          <a:blip r:embed="rId2"/>
           <a:stretch>
             <a:fillRect/>
           </a:stretch>
         </p:blipFill>
-        <p:spPr bwMode="auto">
-          <a:xfrm>
-            <a:off x="0" y="2146852"/>
-            <a:ext cx="5724497" cy="3866023"/>
+        <p:spPr>
+          <a:xfrm>
+            <a:off x="1137146" y="0"/>
+            <a:ext cx="9917708" cy="6892496"/>
           </a:xfrm>
           <a:prstGeom prst="rect">
             <a:avLst/>
           </a:prstGeom>
-          <a:noFill/>
-          <a:extLst>
-            <a:ext uri="{909E8E84-426E-40DD-AFC4-6F175D3DCCD1}">
-              <a14:hiddenFill xmlns:a14="http://schemas.microsoft.com/office/drawing/2010/main">
-                <a:solidFill>
-                  <a:srgbClr val="FFFFFF"/>
-                </a:solidFill>
-              </a14:hiddenFill>
-            </a:ext>
-          </a:extLst>
         </p:spPr>
       </p:pic>
     </p:spTree>
     <p:extLst>
       <p:ext uri="{BB962C8B-B14F-4D97-AF65-F5344CB8AC3E}">
-        <p14:creationId xmlns:p14="http://schemas.microsoft.com/office/powerpoint/2010/main" val="3150067890"/>
+        <p14:creationId xmlns:p14="http://schemas.microsoft.com/office/powerpoint/2010/main" val="3720487206"/>
       </p:ext>
     </p:extLst>
   </p:cSld>
@@ -5058,7 +4871,7 @@
           <p:cNvPr id="2" name="Title 1">
             <a:extLst>
               <a:ext uri="{FF2B5EF4-FFF2-40B4-BE49-F238E27FC236}">
-                <a16:creationId xmlns:a16="http://schemas.microsoft.com/office/drawing/2014/main" id="{0D359CE7-4693-6CD4-9424-CF2757B5ECB0}"/>
+                <a16:creationId xmlns:a16="http://schemas.microsoft.com/office/drawing/2014/main" id="{7EF9860B-DFF8-D259-8D4D-4227B9F0AE3A}"/>
               </a:ext>
             </a:extLst>
           </p:cNvPr>
@@ -5076,7 +4889,7 @@
           <a:p>
             <a:r>
               <a:rPr lang="en-US" dirty="0"/>
-              <a:t>R-Squared</a:t>
+              <a:t>Calculating Residuals</a:t>
             </a:r>
           </a:p>
         </p:txBody>
@@ -5086,7 +4899,7 @@
           <p:cNvPr id="3" name="Content Placeholder 2">
             <a:extLst>
               <a:ext uri="{FF2B5EF4-FFF2-40B4-BE49-F238E27FC236}">
-                <a16:creationId xmlns:a16="http://schemas.microsoft.com/office/drawing/2014/main" id="{7B48D358-DB04-D571-BCE4-C0FC85A2E2E6}"/>
+                <a16:creationId xmlns:a16="http://schemas.microsoft.com/office/drawing/2014/main" id="{377B42DD-CEC8-F15F-D887-AE5B66FD5DA7}"/>
               </a:ext>
             </a:extLst>
           </p:cNvPr>
@@ -5099,53 +4912,61 @@
         </p:nvSpPr>
         <p:spPr>
           <a:xfrm>
-            <a:off x="1451579" y="1853755"/>
-            <a:ext cx="9603275" cy="2251106"/>
-          </a:xfrm>
-        </p:spPr>
-        <p:txBody>
-          <a:bodyPr/>
-          <a:lstStyle/>
-          <a:p>
-            <a:r>
-              <a:rPr lang="en-US" dirty="0"/>
-              <a:t>R-squared is another measure of model quality. </a:t>
-            </a:r>
-          </a:p>
-          <a:p>
-            <a:pPr lvl="1"/>
-            <a:r>
-              <a:rPr lang="en-US" dirty="0"/>
-              <a:t>Likely to pop-up if searching about this stuff. </a:t>
-            </a:r>
-          </a:p>
-          <a:p>
-            <a:pPr lvl="1"/>
-            <a:r>
-              <a:rPr lang="en-US" dirty="0"/>
-              <a:t>Correlation squared. </a:t>
-            </a:r>
-          </a:p>
-          <a:p>
-            <a:r>
-              <a:rPr lang="en-US" dirty="0"/>
-              <a:t>We’ll deal with it later. </a:t>
-            </a:r>
-          </a:p>
-          <a:p>
-            <a:r>
-              <a:rPr lang="en-US" dirty="0"/>
-              <a:t>It is a measure of “how much” the model captures. </a:t>
-            </a:r>
+            <a:off x="181369" y="2015732"/>
+            <a:ext cx="4080793" cy="4120572"/>
+          </a:xfrm>
+        </p:spPr>
+        <p:txBody>
+          <a:bodyPr>
+            <a:normAutofit/>
+          </a:bodyPr>
+          <a:lstStyle/>
+          <a:p>
+            <a:r>
+              <a:rPr lang="en-US" dirty="0"/>
+              <a:t>If we have an expectation (analytical model, ML prediction, guess) and a true (empirical) value, we can calculate the residual. </a:t>
+            </a:r>
+          </a:p>
+          <a:p>
+            <a:r>
+              <a:rPr lang="en-US" dirty="0"/>
+              <a:t>At each empirical point, how accurate is the model? </a:t>
+            </a:r>
+          </a:p>
+          <a:p>
+            <a:r>
+              <a:rPr lang="en-US" dirty="0"/>
+              <a:t>We get one residual for each row of data (point):</a:t>
+            </a:r>
+          </a:p>
+          <a:p>
+            <a:pPr lvl="1"/>
+            <a:r>
+              <a:rPr lang="en-US" dirty="0" err="1"/>
+              <a:t>Y_predicted</a:t>
+            </a:r>
+            <a:r>
+              <a:rPr lang="en-US" dirty="0"/>
+              <a:t> – </a:t>
+            </a:r>
+            <a:r>
+              <a:rPr lang="en-US" dirty="0" err="1"/>
+              <a:t>Y_actual</a:t>
+            </a:r>
+            <a:endParaRPr lang="en-US" dirty="0"/>
+          </a:p>
+          <a:p>
+            <a:pPr lvl="1"/>
+            <a:endParaRPr lang="en-US" dirty="0"/>
           </a:p>
         </p:txBody>
       </p:sp>
       <p:pic>
         <p:nvPicPr>
-          <p:cNvPr id="7170" name="Picture 2" descr="correlation - Simple linear regression: R2 not equal to squared Pearson  coefficient - Cross Validated">
+          <p:cNvPr id="2050" name="Picture 2" descr="Residual Plots Unit #8 - Statistics. - ppt video online download">
             <a:extLst>
               <a:ext uri="{FF2B5EF4-FFF2-40B4-BE49-F238E27FC236}">
-                <a16:creationId xmlns:a16="http://schemas.microsoft.com/office/drawing/2014/main" id="{F175385C-E90F-6ECE-835F-9FF4C5382CAF}"/>
+                <a16:creationId xmlns:a16="http://schemas.microsoft.com/office/drawing/2014/main" id="{DC915E80-688C-ECF9-B4E3-140FCB08D755}"/>
               </a:ext>
             </a:extLst>
           </p:cNvPr>
@@ -5154,7 +4975,7 @@
           </p:cNvPicPr>
           <p:nvPr/>
         </p:nvPicPr>
-        <p:blipFill>
+        <p:blipFill rotWithShape="1">
           <a:blip r:embed="rId2">
             <a:extLst>
               <a:ext uri="{28A0092B-C50C-407E-A947-70E740481C1C}">
@@ -5162,15 +4983,13 @@
               </a:ext>
             </a:extLst>
           </a:blip>
-          <a:srcRect/>
-          <a:stretch>
-            <a:fillRect/>
-          </a:stretch>
+          <a:srcRect b="7548"/>
+          <a:stretch/>
         </p:blipFill>
         <p:spPr bwMode="auto">
           <a:xfrm>
-            <a:off x="2552634" y="4104860"/>
-            <a:ext cx="8187787" cy="2681287"/>
+            <a:off x="4426684" y="1473620"/>
+            <a:ext cx="7765315" cy="5384380"/>
           </a:xfrm>
           <a:prstGeom prst="rect">
             <a:avLst/>
@@ -5190,7 +5009,7 @@
     </p:spTree>
     <p:extLst>
       <p:ext uri="{BB962C8B-B14F-4D97-AF65-F5344CB8AC3E}">
-        <p14:creationId xmlns:p14="http://schemas.microsoft.com/office/powerpoint/2010/main" val="1528308286"/>
+        <p14:creationId xmlns:p14="http://schemas.microsoft.com/office/powerpoint/2010/main" val="1590843819"/>
       </p:ext>
     </p:extLst>
   </p:cSld>
@@ -5222,7 +5041,7 @@
           <p:cNvPr id="2" name="Title 1">
             <a:extLst>
               <a:ext uri="{FF2B5EF4-FFF2-40B4-BE49-F238E27FC236}">
-                <a16:creationId xmlns:a16="http://schemas.microsoft.com/office/drawing/2014/main" id="{2568E2FB-8FB8-AFFD-AF14-EB856BEDBEDD}"/>
+                <a16:creationId xmlns:a16="http://schemas.microsoft.com/office/drawing/2014/main" id="{387B9AE9-C7BA-7C94-52F0-B3F727BF728E}"/>
               </a:ext>
             </a:extLst>
           </p:cNvPr>
@@ -5240,7 +5059,7 @@
           <a:p>
             <a:r>
               <a:rPr lang="en-US" dirty="0"/>
-              <a:t>Errors</a:t>
+              <a:t>Summarization of Errors</a:t>
             </a:r>
           </a:p>
         </p:txBody>
@@ -5250,7 +5069,7 @@
           <p:cNvPr id="3" name="Content Placeholder 2">
             <a:extLst>
               <a:ext uri="{FF2B5EF4-FFF2-40B4-BE49-F238E27FC236}">
-                <a16:creationId xmlns:a16="http://schemas.microsoft.com/office/drawing/2014/main" id="{797A1AE3-CCE9-BAFD-B227-F99A3F0A09DE}"/>
+                <a16:creationId xmlns:a16="http://schemas.microsoft.com/office/drawing/2014/main" id="{3436DCAA-7675-6826-7BFF-726EC4BF5418}"/>
               </a:ext>
             </a:extLst>
           </p:cNvPr>
@@ -5261,70 +5080,175 @@
             <p:ph idx="1"/>
           </p:nvPr>
         </p:nvSpPr>
-        <p:spPr/>
+        <p:spPr>
+          <a:xfrm>
+            <a:off x="144967" y="1934598"/>
+            <a:ext cx="10909888" cy="4198573"/>
+          </a:xfrm>
+        </p:spPr>
         <p:txBody>
           <a:bodyPr>
-            <a:normAutofit lnSpcReduction="10000"/>
+            <a:normAutofit/>
           </a:bodyPr>
           <a:lstStyle/>
           <a:p>
             <a:r>
               <a:rPr lang="en-US" dirty="0"/>
-              <a:t>Moving forwards, error is a critical metric for us. </a:t>
-            </a:r>
-          </a:p>
-          <a:p>
-            <a:r>
-              <a:rPr lang="en-US" dirty="0"/>
-              <a:t>We want to build models to make predictions. </a:t>
-            </a:r>
-          </a:p>
-          <a:p>
-            <a:pPr lvl="1"/>
-            <a:r>
-              <a:rPr lang="en-US" dirty="0"/>
-              <a:t>Error indicates how well we are doing. </a:t>
-            </a:r>
-          </a:p>
-          <a:p>
-            <a:pPr lvl="1"/>
-            <a:r>
-              <a:rPr lang="en-US" dirty="0"/>
-              <a:t>Data isn’t cosmically bound to follow a distribution, we </a:t>
-            </a:r>
-            <a:r>
-              <a:rPr lang="en-US"/>
-              <a:t>are approximating. </a:t>
-            </a:r>
-            <a:endParaRPr lang="en-US" dirty="0"/>
-          </a:p>
-          <a:p>
-            <a:r>
-              <a:rPr lang="en-US" dirty="0"/>
-              <a:t>Less error = closer match between expectations and reality. </a:t>
-            </a:r>
-          </a:p>
-          <a:p>
-            <a:endParaRPr lang="en-US" dirty="0"/>
-          </a:p>
-          <a:p>
-            <a:r>
-              <a:rPr lang="en-US" dirty="0"/>
-              <a:t>We’ll build an error calculation from scratch and look at the library functions. </a:t>
-            </a:r>
-          </a:p>
-          <a:p>
-            <a:r>
-              <a:rPr lang="en-US" dirty="0"/>
-              <a:t>This stuff carries over directly to the error calculations we need for ML. </a:t>
-            </a:r>
-          </a:p>
-        </p:txBody>
-      </p:sp>
+              <a:t>When dealing with many points, a list of residuals is impractical. </a:t>
+            </a:r>
+          </a:p>
+          <a:p>
+            <a:pPr lvl="1"/>
+            <a:r>
+              <a:rPr lang="en-US" dirty="0"/>
+              <a:t>Think of a dataset with 10,000,000 rows – a list of that many residuals is impractical. </a:t>
+            </a:r>
+          </a:p>
+          <a:p>
+            <a:r>
+              <a:rPr lang="en-US" dirty="0"/>
+              <a:t>We can summarize residuals into one measure of error. </a:t>
+            </a:r>
+          </a:p>
+          <a:p>
+            <a:r>
+              <a:rPr lang="en-US" dirty="0"/>
+              <a:t>There are several ways to summarize error, e.g.</a:t>
+            </a:r>
+          </a:p>
+          <a:p>
+            <a:pPr lvl="1"/>
+            <a:r>
+              <a:rPr lang="en-US" dirty="0"/>
+              <a:t>MSE – Mean squared error. Square residuals and average them.</a:t>
+            </a:r>
+          </a:p>
+          <a:p>
+            <a:pPr lvl="1"/>
+            <a:r>
+              <a:rPr lang="en-US" dirty="0"/>
+              <a:t>RMSE – Root mean squared error. Take the square root of MSE. </a:t>
+            </a:r>
+          </a:p>
+          <a:p>
+            <a:pPr lvl="1"/>
+            <a:r>
+              <a:rPr lang="en-US" dirty="0"/>
+              <a:t>MAE – Mean absolute error. Average the absolute values of the residuals. </a:t>
+            </a:r>
+          </a:p>
+          <a:p>
+            <a:r>
+              <a:rPr lang="en-US" dirty="0"/>
+              <a:t>RMSE (or MSE) is the most common error measure for us. </a:t>
+            </a:r>
+          </a:p>
+          <a:p>
+            <a:r>
+              <a:rPr lang="en-US" dirty="0"/>
+              <a:t>Lower error amounts tell us that the model and the empirical are similar. </a:t>
+            </a:r>
+          </a:p>
+        </p:txBody>
+      </p:sp>
+      <p:pic>
+        <p:nvPicPr>
+          <p:cNvPr id="5122" name="Picture 2" descr="Essential Regression Evaluation Metrics: MSE, RMSE, MAE, R², and Adjusted  R² | by FARSHAD K | Medium">
+            <a:extLst>
+              <a:ext uri="{FF2B5EF4-FFF2-40B4-BE49-F238E27FC236}">
+                <a16:creationId xmlns:a16="http://schemas.microsoft.com/office/drawing/2014/main" id="{0BE68346-45FF-C8FD-AD8E-1C10139C6281}"/>
+              </a:ext>
+            </a:extLst>
+          </p:cNvPr>
+          <p:cNvPicPr>
+            <a:picLocks noChangeAspect="1" noChangeArrowheads="1"/>
+          </p:cNvPicPr>
+          <p:nvPr/>
+        </p:nvPicPr>
+        <p:blipFill rotWithShape="1">
+          <a:blip r:embed="rId2">
+            <a:extLst>
+              <a:ext uri="{28A0092B-C50C-407E-A947-70E740481C1C}">
+                <a14:useLocalDpi xmlns:a14="http://schemas.microsoft.com/office/drawing/2010/main" val="0"/>
+              </a:ext>
+            </a:extLst>
+          </a:blip>
+          <a:srcRect t="15073" b="18406"/>
+          <a:stretch>
+            <a:fillRect/>
+          </a:stretch>
+        </p:blipFill>
+        <p:spPr bwMode="auto">
+          <a:xfrm>
+            <a:off x="7106732" y="562092"/>
+            <a:ext cx="4940301" cy="1848585"/>
+          </a:xfrm>
+          <a:prstGeom prst="rect">
+            <a:avLst/>
+          </a:prstGeom>
+          <a:noFill/>
+          <a:extLst>
+            <a:ext uri="{909E8E84-426E-40DD-AFC4-6F175D3DCCD1}">
+              <a14:hiddenFill xmlns:a14="http://schemas.microsoft.com/office/drawing/2010/main">
+                <a:solidFill>
+                  <a:srgbClr val="FFFFFF"/>
+                </a:solidFill>
+              </a14:hiddenFill>
+            </a:ext>
+          </a:extLst>
+        </p:spPr>
+      </p:pic>
+      <p:pic>
+        <p:nvPicPr>
+          <p:cNvPr id="5124" name="Picture 4" descr="RMSE (Root Mean Squared Error)">
+            <a:extLst>
+              <a:ext uri="{FF2B5EF4-FFF2-40B4-BE49-F238E27FC236}">
+                <a16:creationId xmlns:a16="http://schemas.microsoft.com/office/drawing/2014/main" id="{58C4D5A4-F261-FC3F-067B-E2A857BFB88C}"/>
+              </a:ext>
+            </a:extLst>
+          </p:cNvPr>
+          <p:cNvPicPr>
+            <a:picLocks noChangeAspect="1" noChangeArrowheads="1"/>
+          </p:cNvPicPr>
+          <p:nvPr/>
+        </p:nvPicPr>
+        <p:blipFill>
+          <a:blip r:embed="rId3">
+            <a:extLst>
+              <a:ext uri="{28A0092B-C50C-407E-A947-70E740481C1C}">
+                <a14:useLocalDpi xmlns:a14="http://schemas.microsoft.com/office/drawing/2010/main" val="0"/>
+              </a:ext>
+            </a:extLst>
+          </a:blip>
+          <a:srcRect/>
+          <a:stretch>
+            <a:fillRect/>
+          </a:stretch>
+        </p:blipFill>
+        <p:spPr bwMode="auto">
+          <a:xfrm>
+            <a:off x="7768118" y="2759799"/>
+            <a:ext cx="4278915" cy="2706935"/>
+          </a:xfrm>
+          <a:prstGeom prst="rect">
+            <a:avLst/>
+          </a:prstGeom>
+          <a:noFill/>
+          <a:extLst>
+            <a:ext uri="{909E8E84-426E-40DD-AFC4-6F175D3DCCD1}">
+              <a14:hiddenFill xmlns:a14="http://schemas.microsoft.com/office/drawing/2010/main">
+                <a:solidFill>
+                  <a:srgbClr val="FFFFFF"/>
+                </a:solidFill>
+              </a14:hiddenFill>
+            </a:ext>
+          </a:extLst>
+        </p:spPr>
+      </p:pic>
     </p:spTree>
     <p:extLst>
       <p:ext uri="{BB962C8B-B14F-4D97-AF65-F5344CB8AC3E}">
-        <p14:creationId xmlns:p14="http://schemas.microsoft.com/office/powerpoint/2010/main" val="76767667"/>
+        <p14:creationId xmlns:p14="http://schemas.microsoft.com/office/powerpoint/2010/main" val="3737122044"/>
       </p:ext>
     </p:extLst>
   </p:cSld>
@@ -5356,7 +5280,7 @@
           <p:cNvPr id="2" name="Title 1">
             <a:extLst>
               <a:ext uri="{FF2B5EF4-FFF2-40B4-BE49-F238E27FC236}">
-                <a16:creationId xmlns:a16="http://schemas.microsoft.com/office/drawing/2014/main" id="{4494A4BB-E7D6-4328-BED4-DB9171C762B6}"/>
+                <a16:creationId xmlns:a16="http://schemas.microsoft.com/office/drawing/2014/main" id="{E0D65590-900B-2072-60A9-9E5A6CF9E408}"/>
               </a:ext>
             </a:extLst>
           </p:cNvPr>
@@ -5374,7 +5298,7 @@
           <a:p>
             <a:r>
               <a:rPr lang="en-US" dirty="0"/>
-              <a:t>Review - Correlations</a:t>
+              <a:t>Logistics</a:t>
             </a:r>
           </a:p>
         </p:txBody>
@@ -5384,7 +5308,7 @@
           <p:cNvPr id="3" name="Content Placeholder 2">
             <a:extLst>
               <a:ext uri="{FF2B5EF4-FFF2-40B4-BE49-F238E27FC236}">
-                <a16:creationId xmlns:a16="http://schemas.microsoft.com/office/drawing/2014/main" id="{7B88312E-2768-AEBF-D834-7E21833E6112}"/>
+                <a16:creationId xmlns:a16="http://schemas.microsoft.com/office/drawing/2014/main" id="{58BB1352-A87C-C1BE-A455-5771C9AFA9C7}"/>
               </a:ext>
             </a:extLst>
           </p:cNvPr>
@@ -5397,72 +5321,387 @@
         </p:nvSpPr>
         <p:spPr>
           <a:xfrm>
-            <a:off x="5295290" y="1938130"/>
-            <a:ext cx="6896710" cy="4115351"/>
-          </a:xfrm>
-        </p:spPr>
-        <p:txBody>
-          <a:bodyPr/>
-          <a:lstStyle/>
-          <a:p>
-            <a:r>
-              <a:rPr lang="en-US" dirty="0"/>
-              <a:t>Last time we looked at relationships between two numerical variables. </a:t>
-            </a:r>
-          </a:p>
-          <a:p>
-            <a:r>
-              <a:rPr lang="en-US" dirty="0"/>
-              <a:t>We can measure covariance – how much Y varies as X varies. </a:t>
-            </a:r>
-          </a:p>
-          <a:p>
-            <a:r>
-              <a:rPr lang="en-US" dirty="0"/>
-              <a:t>This can be translated into correlation. </a:t>
-            </a:r>
-          </a:p>
-          <a:p>
-            <a:pPr lvl="1"/>
-            <a:r>
-              <a:rPr lang="en-US" dirty="0"/>
-              <a:t>0 is none, -/+ 1 is perfect. </a:t>
-            </a:r>
-          </a:p>
-          <a:p>
-            <a:r>
-              <a:rPr lang="en-US" dirty="0"/>
-              <a:t>Can spot visually on scatter or calculate. </a:t>
-            </a:r>
-          </a:p>
-          <a:p>
-            <a:pPr lvl="1"/>
-            <a:r>
-              <a:rPr lang="en-US" dirty="0"/>
-              <a:t>Pearson or spearman. </a:t>
-            </a:r>
-          </a:p>
-          <a:p>
-            <a:r>
-              <a:rPr lang="en-US" dirty="0"/>
-              <a:t>Predictively – if we know X, how well do I know Y?</a:t>
-            </a:r>
-          </a:p>
-          <a:p>
-            <a:pPr lvl="1"/>
-            <a:r>
-              <a:rPr lang="en-US" dirty="0"/>
-              <a:t>How much of the variance in Y is explained? </a:t>
+            <a:off x="1451579" y="1922804"/>
+            <a:ext cx="9603275" cy="4130677"/>
+          </a:xfrm>
+        </p:spPr>
+        <p:txBody>
+          <a:bodyPr/>
+          <a:lstStyle/>
+          <a:p>
+            <a:r>
+              <a:rPr lang="en-US" dirty="0"/>
+              <a:t>Today – Errors and basic time series data. (Not directly from a chapter. Read 8 soon). </a:t>
+            </a:r>
+          </a:p>
+          <a:p>
+            <a:pPr lvl="1"/>
+            <a:r>
+              <a:rPr lang="en-US" dirty="0"/>
+              <a:t>Residuals, RMSE, MSE. </a:t>
+            </a:r>
+          </a:p>
+          <a:p>
+            <a:r>
+              <a:rPr lang="en-US" dirty="0"/>
+              <a:t>Might do an intro to estimating if there’s time, it’s more complex. </a:t>
+            </a:r>
+          </a:p>
+          <a:p>
+            <a:r>
+              <a:rPr lang="en-US" dirty="0"/>
+              <a:t>You’re supposed to have a quiz next time!</a:t>
+            </a:r>
+          </a:p>
+          <a:p>
+            <a:pPr lvl="1"/>
+            <a:r>
+              <a:rPr lang="en-US" dirty="0"/>
+              <a:t>Pretty similar to the last one that everyone did well on. </a:t>
+            </a:r>
+          </a:p>
+          <a:p>
+            <a:pPr lvl="1"/>
+            <a:r>
+              <a:rPr lang="en-US" dirty="0"/>
+              <a:t>Up to last week – </a:t>
+            </a:r>
+            <a:r>
+              <a:rPr lang="en-US" dirty="0" err="1"/>
+              <a:t>pmf</a:t>
+            </a:r>
+            <a:r>
+              <a:rPr lang="en-US" dirty="0"/>
+              <a:t>, </a:t>
+            </a:r>
+            <a:r>
+              <a:rPr lang="en-US" dirty="0" err="1"/>
+              <a:t>cdf</a:t>
+            </a:r>
+            <a:r>
+              <a:rPr lang="en-US" dirty="0"/>
+              <a:t>, distributions, analytical distributions…</a:t>
+            </a:r>
+          </a:p>
+          <a:p>
+            <a:r>
+              <a:rPr lang="en-US" dirty="0"/>
+              <a:t>There’s a test in a couple of weeks. </a:t>
+            </a:r>
+          </a:p>
+          <a:p>
+            <a:pPr lvl="1"/>
+            <a:r>
+              <a:rPr lang="en-US" dirty="0"/>
+              <a:t>This will involve some code stuff. </a:t>
+            </a:r>
+          </a:p>
+          <a:p>
+            <a:pPr lvl="1"/>
+            <a:r>
+              <a:rPr lang="en-US" dirty="0"/>
+              <a:t>Cover up to this week</a:t>
+            </a:r>
+          </a:p>
+          <a:p>
+            <a:endParaRPr lang="en-US" dirty="0"/>
+          </a:p>
+        </p:txBody>
+      </p:sp>
+    </p:spTree>
+    <p:extLst>
+      <p:ext uri="{BB962C8B-B14F-4D97-AF65-F5344CB8AC3E}">
+        <p14:creationId xmlns:p14="http://schemas.microsoft.com/office/powerpoint/2010/main" val="877748147"/>
+      </p:ext>
+    </p:extLst>
+  </p:cSld>
+  <p:clrMapOvr>
+    <a:masterClrMapping/>
+  </p:clrMapOvr>
+</p:sld>
+</file>
+
+<file path=ppt/slides/slide20.xml><?xml version="1.0" encoding="utf-8"?>
+<p:sld xmlns:a="http://schemas.openxmlformats.org/drawingml/2006/main" xmlns:r="http://schemas.openxmlformats.org/officeDocument/2006/relationships" xmlns:p="http://schemas.openxmlformats.org/presentationml/2006/main">
+  <p:cSld>
+    <p:spTree>
+      <p:nvGrpSpPr>
+        <p:cNvPr id="1" name=""/>
+        <p:cNvGrpSpPr/>
+        <p:nvPr/>
+      </p:nvGrpSpPr>
+      <p:grpSpPr>
+        <a:xfrm>
+          <a:off x="0" y="0"/>
+          <a:ext cx="0" cy="0"/>
+          <a:chOff x="0" y="0"/>
+          <a:chExt cx="0" cy="0"/>
+        </a:xfrm>
+      </p:grpSpPr>
+      <p:sp>
+        <p:nvSpPr>
+          <p:cNvPr id="2" name="Title 1">
+            <a:extLst>
+              <a:ext uri="{FF2B5EF4-FFF2-40B4-BE49-F238E27FC236}">
+                <a16:creationId xmlns:a16="http://schemas.microsoft.com/office/drawing/2014/main" id="{E9356086-BE05-B01B-10A4-6D1976445E25}"/>
+              </a:ext>
+            </a:extLst>
+          </p:cNvPr>
+          <p:cNvSpPr>
+            <a:spLocks noGrp="1"/>
+          </p:cNvSpPr>
+          <p:nvPr>
+            <p:ph type="title"/>
+          </p:nvPr>
+        </p:nvSpPr>
+        <p:spPr/>
+        <p:txBody>
+          <a:bodyPr/>
+          <a:lstStyle/>
+          <a:p>
+            <a:r>
+              <a:rPr lang="en-US" dirty="0"/>
+              <a:t>Why Squared?</a:t>
+            </a:r>
+          </a:p>
+        </p:txBody>
+      </p:sp>
+      <p:sp>
+        <p:nvSpPr>
+          <p:cNvPr id="3" name="Content Placeholder 2">
+            <a:extLst>
+              <a:ext uri="{FF2B5EF4-FFF2-40B4-BE49-F238E27FC236}">
+                <a16:creationId xmlns:a16="http://schemas.microsoft.com/office/drawing/2014/main" id="{BC34DD8C-2FBC-A875-6B61-74B2788B9CD3}"/>
+              </a:ext>
+            </a:extLst>
+          </p:cNvPr>
+          <p:cNvSpPr>
+            <a:spLocks noGrp="1"/>
+          </p:cNvSpPr>
+          <p:nvPr>
+            <p:ph idx="1"/>
+          </p:nvPr>
+        </p:nvSpPr>
+        <p:spPr>
+          <a:xfrm>
+            <a:off x="1451579" y="2015732"/>
+            <a:ext cx="9603275" cy="4037749"/>
+          </a:xfrm>
+        </p:spPr>
+        <p:txBody>
+          <a:bodyPr>
+            <a:normAutofit lnSpcReduction="10000"/>
+          </a:bodyPr>
+          <a:lstStyle/>
+          <a:p>
+            <a:r>
+              <a:rPr lang="en-US" dirty="0"/>
+              <a:t>The error measures either squared or took the absolute value of the residual. </a:t>
+            </a:r>
+          </a:p>
+          <a:p>
+            <a:r>
+              <a:rPr lang="en-US" dirty="0"/>
+              <a:t>Squaring does a couple of things:</a:t>
+            </a:r>
+          </a:p>
+          <a:p>
+            <a:pPr lvl="1"/>
+            <a:r>
+              <a:rPr lang="en-US" dirty="0"/>
+              <a:t>Eliminates negatives. We get a measure of the magnitude. (MAE* also does this.)</a:t>
+            </a:r>
+          </a:p>
+          <a:p>
+            <a:pPr lvl="1"/>
+            <a:r>
+              <a:rPr lang="en-US" dirty="0"/>
+              <a:t>Penalizes large residuals. </a:t>
+            </a:r>
+          </a:p>
+          <a:p>
+            <a:r>
+              <a:rPr lang="en-US" dirty="0"/>
+              <a:t>Having residuals that are small are good, even though they’ll never be perfect. </a:t>
+            </a:r>
+          </a:p>
+          <a:p>
+            <a:r>
+              <a:rPr lang="en-US" dirty="0"/>
+              <a:t>Having large residuals indicates massive misses. </a:t>
+            </a:r>
+          </a:p>
+          <a:p>
+            <a:r>
+              <a:rPr lang="en-US" dirty="0"/>
+              <a:t>MSE/RMSE tends to reward models without many large residuals. </a:t>
+            </a:r>
+          </a:p>
+          <a:p>
+            <a:pPr lvl="1"/>
+            <a:r>
+              <a:rPr lang="en-US" dirty="0"/>
+              <a:t>Few large misses. </a:t>
+            </a:r>
+          </a:p>
+          <a:p>
+            <a:r>
+              <a:rPr lang="en-US" dirty="0"/>
+              <a:t>*Absolute values make for weird math, which is one reason it is less common. </a:t>
+            </a:r>
+          </a:p>
+        </p:txBody>
+      </p:sp>
+    </p:spTree>
+    <p:extLst>
+      <p:ext uri="{BB962C8B-B14F-4D97-AF65-F5344CB8AC3E}">
+        <p14:creationId xmlns:p14="http://schemas.microsoft.com/office/powerpoint/2010/main" val="3570164820"/>
+      </p:ext>
+    </p:extLst>
+  </p:cSld>
+  <p:clrMapOvr>
+    <a:masterClrMapping/>
+  </p:clrMapOvr>
+</p:sld>
+</file>
+
+<file path=ppt/slides/slide21.xml><?xml version="1.0" encoding="utf-8"?>
+<p:sld xmlns:a="http://schemas.openxmlformats.org/drawingml/2006/main" xmlns:r="http://schemas.openxmlformats.org/officeDocument/2006/relationships" xmlns:p="http://schemas.openxmlformats.org/presentationml/2006/main">
+  <p:cSld>
+    <p:spTree>
+      <p:nvGrpSpPr>
+        <p:cNvPr id="1" name=""/>
+        <p:cNvGrpSpPr/>
+        <p:nvPr/>
+      </p:nvGrpSpPr>
+      <p:grpSpPr>
+        <a:xfrm>
+          <a:off x="0" y="0"/>
+          <a:ext cx="0" cy="0"/>
+          <a:chOff x="0" y="0"/>
+          <a:chExt cx="0" cy="0"/>
+        </a:xfrm>
+      </p:grpSpPr>
+      <p:sp>
+        <p:nvSpPr>
+          <p:cNvPr id="2" name="Title 1">
+            <a:extLst>
+              <a:ext uri="{FF2B5EF4-FFF2-40B4-BE49-F238E27FC236}">
+                <a16:creationId xmlns:a16="http://schemas.microsoft.com/office/drawing/2014/main" id="{F8D0BEBB-87B6-B031-54D9-7E3DD180EFBA}"/>
+              </a:ext>
+            </a:extLst>
+          </p:cNvPr>
+          <p:cNvSpPr>
+            <a:spLocks noGrp="1"/>
+          </p:cNvSpPr>
+          <p:nvPr>
+            <p:ph type="title"/>
+          </p:nvPr>
+        </p:nvSpPr>
+        <p:spPr/>
+        <p:txBody>
+          <a:bodyPr/>
+          <a:lstStyle/>
+          <a:p>
+            <a:r>
+              <a:rPr lang="en-US" dirty="0"/>
+              <a:t>Where’s the Error From?</a:t>
+            </a:r>
+          </a:p>
+        </p:txBody>
+      </p:sp>
+      <p:sp>
+        <p:nvSpPr>
+          <p:cNvPr id="3" name="Content Placeholder 2">
+            <a:extLst>
+              <a:ext uri="{FF2B5EF4-FFF2-40B4-BE49-F238E27FC236}">
+                <a16:creationId xmlns:a16="http://schemas.microsoft.com/office/drawing/2014/main" id="{B6092BB6-929A-CCAA-B290-DA2EB966A7B5}"/>
+              </a:ext>
+            </a:extLst>
+          </p:cNvPr>
+          <p:cNvSpPr>
+            <a:spLocks noGrp="1"/>
+          </p:cNvSpPr>
+          <p:nvPr>
+            <p:ph idx="1"/>
+          </p:nvPr>
+        </p:nvSpPr>
+        <p:spPr>
+          <a:xfrm>
+            <a:off x="5724497" y="1853754"/>
+            <a:ext cx="6467503" cy="4199727"/>
+          </a:xfrm>
+        </p:spPr>
+        <p:txBody>
+          <a:bodyPr>
+            <a:normAutofit/>
+          </a:bodyPr>
+          <a:lstStyle/>
+          <a:p>
+            <a:r>
+              <a:rPr lang="en-US" dirty="0"/>
+              <a:t>Error is just the difference between model and empirical. </a:t>
+            </a:r>
+          </a:p>
+          <a:p>
+            <a:pPr lvl="1"/>
+            <a:r>
+              <a:rPr lang="en-US" dirty="0"/>
+              <a:t>This isn’t an absolute statement of ‘truth’. </a:t>
+            </a:r>
+          </a:p>
+          <a:p>
+            <a:pPr lvl="1"/>
+            <a:r>
+              <a:rPr lang="en-US" dirty="0"/>
+              <a:t>Models are always approximations. </a:t>
+            </a:r>
+          </a:p>
+          <a:p>
+            <a:pPr lvl="1"/>
+            <a:r>
+              <a:rPr lang="en-US" dirty="0" err="1"/>
+              <a:t>A.k.a</a:t>
+            </a:r>
+            <a:r>
+              <a:rPr lang="en-US" dirty="0"/>
+              <a:t> difference between expectation and empirical. </a:t>
+            </a:r>
+          </a:p>
+          <a:p>
+            <a:r>
+              <a:rPr lang="en-US" dirty="0"/>
+              <a:t>Still need judgement. </a:t>
+            </a:r>
+          </a:p>
+          <a:p>
+            <a:pPr lvl="1"/>
+            <a:r>
+              <a:rPr lang="en-US" dirty="0"/>
+              <a:t>Is model good and data odd, or do we have wrong model? </a:t>
+            </a:r>
+          </a:p>
+          <a:p>
+            <a:r>
+              <a:rPr lang="en-US" dirty="0"/>
+              <a:t>E.g. are there actually more 9.5 and 12-13 people in reality or did we just randomly get a few more in our sample. </a:t>
+            </a:r>
+          </a:p>
+          <a:p>
+            <a:pPr lvl="1"/>
+            <a:r>
+              <a:rPr lang="en-US" dirty="0"/>
+              <a:t>Maybe model should be slightly fatter. </a:t>
             </a:r>
           </a:p>
         </p:txBody>
       </p:sp>
       <p:pic>
         <p:nvPicPr>
-          <p:cNvPr id="1026" name="Picture 2" descr="Correlation and Regression Analysis – Statistics Through an Equity Lens  [Revised Edition]">
+          <p:cNvPr id="6146" name="Picture 2" descr="Distribution Of Men's Shoe Sizes | Fila Men's Galvanize Chef Providers Shoes">
             <a:extLst>
               <a:ext uri="{FF2B5EF4-FFF2-40B4-BE49-F238E27FC236}">
-                <a16:creationId xmlns:a16="http://schemas.microsoft.com/office/drawing/2014/main" id="{D3BC77AA-0F42-5DF1-7B3E-DE82B441E462}"/>
+                <a16:creationId xmlns:a16="http://schemas.microsoft.com/office/drawing/2014/main" id="{93598D7A-D7B3-5B9D-E376-FBC20D75F549}"/>
               </a:ext>
             </a:extLst>
           </p:cNvPr>
@@ -5486,8 +5725,8 @@
         </p:blipFill>
         <p:spPr bwMode="auto">
           <a:xfrm>
-            <a:off x="-80909" y="1752522"/>
-            <a:ext cx="5376199" cy="4300959"/>
+            <a:off x="0" y="2146852"/>
+            <a:ext cx="5724497" cy="3866023"/>
           </a:xfrm>
           <a:prstGeom prst="rect">
             <a:avLst/>
@@ -5507,7 +5746,731 @@
     </p:spTree>
     <p:extLst>
       <p:ext uri="{BB962C8B-B14F-4D97-AF65-F5344CB8AC3E}">
-        <p14:creationId xmlns:p14="http://schemas.microsoft.com/office/powerpoint/2010/main" val="1087220410"/>
+        <p14:creationId xmlns:p14="http://schemas.microsoft.com/office/powerpoint/2010/main" val="3150067890"/>
+      </p:ext>
+    </p:extLst>
+  </p:cSld>
+  <p:clrMapOvr>
+    <a:masterClrMapping/>
+  </p:clrMapOvr>
+</p:sld>
+</file>
+
+<file path=ppt/slides/slide22.xml><?xml version="1.0" encoding="utf-8"?>
+<p:sld xmlns:a="http://schemas.openxmlformats.org/drawingml/2006/main" xmlns:r="http://schemas.openxmlformats.org/officeDocument/2006/relationships" xmlns:p="http://schemas.openxmlformats.org/presentationml/2006/main">
+  <p:cSld>
+    <p:spTree>
+      <p:nvGrpSpPr>
+        <p:cNvPr id="1" name=""/>
+        <p:cNvGrpSpPr/>
+        <p:nvPr/>
+      </p:nvGrpSpPr>
+      <p:grpSpPr>
+        <a:xfrm>
+          <a:off x="0" y="0"/>
+          <a:ext cx="0" cy="0"/>
+          <a:chOff x="0" y="0"/>
+          <a:chExt cx="0" cy="0"/>
+        </a:xfrm>
+      </p:grpSpPr>
+      <p:sp>
+        <p:nvSpPr>
+          <p:cNvPr id="2" name="Title 1">
+            <a:extLst>
+              <a:ext uri="{FF2B5EF4-FFF2-40B4-BE49-F238E27FC236}">
+                <a16:creationId xmlns:a16="http://schemas.microsoft.com/office/drawing/2014/main" id="{0D359CE7-4693-6CD4-9424-CF2757B5ECB0}"/>
+              </a:ext>
+            </a:extLst>
+          </p:cNvPr>
+          <p:cNvSpPr>
+            <a:spLocks noGrp="1"/>
+          </p:cNvSpPr>
+          <p:nvPr>
+            <p:ph type="title"/>
+          </p:nvPr>
+        </p:nvSpPr>
+        <p:spPr/>
+        <p:txBody>
+          <a:bodyPr/>
+          <a:lstStyle/>
+          <a:p>
+            <a:r>
+              <a:rPr lang="en-US" dirty="0"/>
+              <a:t>R-Squared</a:t>
+            </a:r>
+          </a:p>
+        </p:txBody>
+      </p:sp>
+      <p:sp>
+        <p:nvSpPr>
+          <p:cNvPr id="3" name="Content Placeholder 2">
+            <a:extLst>
+              <a:ext uri="{FF2B5EF4-FFF2-40B4-BE49-F238E27FC236}">
+                <a16:creationId xmlns:a16="http://schemas.microsoft.com/office/drawing/2014/main" id="{7B48D358-DB04-D571-BCE4-C0FC85A2E2E6}"/>
+              </a:ext>
+            </a:extLst>
+          </p:cNvPr>
+          <p:cNvSpPr>
+            <a:spLocks noGrp="1"/>
+          </p:cNvSpPr>
+          <p:nvPr>
+            <p:ph idx="1"/>
+          </p:nvPr>
+        </p:nvSpPr>
+        <p:spPr>
+          <a:xfrm>
+            <a:off x="1451579" y="1853755"/>
+            <a:ext cx="9603275" cy="2251106"/>
+          </a:xfrm>
+        </p:spPr>
+        <p:txBody>
+          <a:bodyPr/>
+          <a:lstStyle/>
+          <a:p>
+            <a:r>
+              <a:rPr lang="en-US" dirty="0"/>
+              <a:t>R-squared is another measure of model quality. </a:t>
+            </a:r>
+          </a:p>
+          <a:p>
+            <a:pPr lvl="1"/>
+            <a:r>
+              <a:rPr lang="en-US" dirty="0"/>
+              <a:t>Likely to pop-up if searching about this stuff. </a:t>
+            </a:r>
+          </a:p>
+          <a:p>
+            <a:pPr lvl="1"/>
+            <a:r>
+              <a:rPr lang="en-US" dirty="0"/>
+              <a:t>Correlation squared. </a:t>
+            </a:r>
+          </a:p>
+          <a:p>
+            <a:r>
+              <a:rPr lang="en-US" dirty="0"/>
+              <a:t>We’ll deal with it later. </a:t>
+            </a:r>
+          </a:p>
+          <a:p>
+            <a:r>
+              <a:rPr lang="en-US" dirty="0"/>
+              <a:t>It is a measure of “how much” the model captures. </a:t>
+            </a:r>
+          </a:p>
+        </p:txBody>
+      </p:sp>
+      <p:pic>
+        <p:nvPicPr>
+          <p:cNvPr id="7170" name="Picture 2" descr="correlation - Simple linear regression: R2 not equal to squared Pearson  coefficient - Cross Validated">
+            <a:extLst>
+              <a:ext uri="{FF2B5EF4-FFF2-40B4-BE49-F238E27FC236}">
+                <a16:creationId xmlns:a16="http://schemas.microsoft.com/office/drawing/2014/main" id="{F175385C-E90F-6ECE-835F-9FF4C5382CAF}"/>
+              </a:ext>
+            </a:extLst>
+          </p:cNvPr>
+          <p:cNvPicPr>
+            <a:picLocks noChangeAspect="1" noChangeArrowheads="1"/>
+          </p:cNvPicPr>
+          <p:nvPr/>
+        </p:nvPicPr>
+        <p:blipFill>
+          <a:blip r:embed="rId2">
+            <a:extLst>
+              <a:ext uri="{28A0092B-C50C-407E-A947-70E740481C1C}">
+                <a14:useLocalDpi xmlns:a14="http://schemas.microsoft.com/office/drawing/2010/main" val="0"/>
+              </a:ext>
+            </a:extLst>
+          </a:blip>
+          <a:srcRect/>
+          <a:stretch>
+            <a:fillRect/>
+          </a:stretch>
+        </p:blipFill>
+        <p:spPr bwMode="auto">
+          <a:xfrm>
+            <a:off x="2552634" y="4104860"/>
+            <a:ext cx="8187787" cy="2681287"/>
+          </a:xfrm>
+          <a:prstGeom prst="rect">
+            <a:avLst/>
+          </a:prstGeom>
+          <a:noFill/>
+          <a:extLst>
+            <a:ext uri="{909E8E84-426E-40DD-AFC4-6F175D3DCCD1}">
+              <a14:hiddenFill xmlns:a14="http://schemas.microsoft.com/office/drawing/2010/main">
+                <a:solidFill>
+                  <a:srgbClr val="FFFFFF"/>
+                </a:solidFill>
+              </a14:hiddenFill>
+            </a:ext>
+          </a:extLst>
+        </p:spPr>
+      </p:pic>
+    </p:spTree>
+    <p:extLst>
+      <p:ext uri="{BB962C8B-B14F-4D97-AF65-F5344CB8AC3E}">
+        <p14:creationId xmlns:p14="http://schemas.microsoft.com/office/powerpoint/2010/main" val="1528308286"/>
+      </p:ext>
+    </p:extLst>
+  </p:cSld>
+  <p:clrMapOvr>
+    <a:masterClrMapping/>
+  </p:clrMapOvr>
+</p:sld>
+</file>
+
+<file path=ppt/slides/slide23.xml><?xml version="1.0" encoding="utf-8"?>
+<p:sld xmlns:a="http://schemas.openxmlformats.org/drawingml/2006/main" xmlns:r="http://schemas.openxmlformats.org/officeDocument/2006/relationships" xmlns:p="http://schemas.openxmlformats.org/presentationml/2006/main">
+  <p:cSld>
+    <p:spTree>
+      <p:nvGrpSpPr>
+        <p:cNvPr id="1" name=""/>
+        <p:cNvGrpSpPr/>
+        <p:nvPr/>
+      </p:nvGrpSpPr>
+      <p:grpSpPr>
+        <a:xfrm>
+          <a:off x="0" y="0"/>
+          <a:ext cx="0" cy="0"/>
+          <a:chOff x="0" y="0"/>
+          <a:chExt cx="0" cy="0"/>
+        </a:xfrm>
+      </p:grpSpPr>
+      <p:sp>
+        <p:nvSpPr>
+          <p:cNvPr id="2" name="Title 1">
+            <a:extLst>
+              <a:ext uri="{FF2B5EF4-FFF2-40B4-BE49-F238E27FC236}">
+                <a16:creationId xmlns:a16="http://schemas.microsoft.com/office/drawing/2014/main" id="{BFB1EAA3-8A64-C555-8B0D-9EE76425A15A}"/>
+              </a:ext>
+            </a:extLst>
+          </p:cNvPr>
+          <p:cNvSpPr>
+            <a:spLocks noGrp="1"/>
+          </p:cNvSpPr>
+          <p:nvPr>
+            <p:ph type="title"/>
+          </p:nvPr>
+        </p:nvSpPr>
+        <p:spPr>
+          <a:xfrm>
+            <a:off x="1451579" y="804519"/>
+            <a:ext cx="5488665" cy="1049235"/>
+          </a:xfrm>
+        </p:spPr>
+        <p:txBody>
+          <a:bodyPr/>
+          <a:lstStyle/>
+          <a:p>
+            <a:r>
+              <a:rPr lang="en-US" dirty="0"/>
+              <a:t>Fit and Approximation</a:t>
+            </a:r>
+          </a:p>
+        </p:txBody>
+      </p:sp>
+      <p:sp>
+        <p:nvSpPr>
+          <p:cNvPr id="3" name="Content Placeholder 2">
+            <a:extLst>
+              <a:ext uri="{FF2B5EF4-FFF2-40B4-BE49-F238E27FC236}">
+                <a16:creationId xmlns:a16="http://schemas.microsoft.com/office/drawing/2014/main" id="{8CF99539-2BAE-1A70-D6F6-BE663EE26DEA}"/>
+              </a:ext>
+            </a:extLst>
+          </p:cNvPr>
+          <p:cNvSpPr>
+            <a:spLocks noGrp="1"/>
+          </p:cNvSpPr>
+          <p:nvPr>
+            <p:ph idx="1"/>
+          </p:nvPr>
+        </p:nvSpPr>
+        <p:spPr>
+          <a:xfrm>
+            <a:off x="108155" y="1853754"/>
+            <a:ext cx="6832089" cy="4199727"/>
+          </a:xfrm>
+        </p:spPr>
+        <p:txBody>
+          <a:bodyPr/>
+          <a:lstStyle/>
+          <a:p>
+            <a:r>
+              <a:rPr lang="en-US" dirty="0"/>
+              <a:t>In stats, these distribution patterns are the basis of inference. </a:t>
+            </a:r>
+          </a:p>
+          <a:p>
+            <a:pPr lvl="1"/>
+            <a:r>
+              <a:rPr lang="en-US" dirty="0"/>
+              <a:t>Allow us to create an ‘expectation’ for how the data should be. </a:t>
+            </a:r>
+          </a:p>
+          <a:p>
+            <a:r>
+              <a:rPr lang="en-US" dirty="0"/>
+              <a:t>These models are only approximations. </a:t>
+            </a:r>
+          </a:p>
+          <a:p>
+            <a:pPr lvl="1"/>
+            <a:r>
+              <a:rPr lang="en-US" dirty="0"/>
+              <a:t>We make a judgment of ‘good enough’ – can vary. </a:t>
+            </a:r>
+          </a:p>
+          <a:p>
+            <a:pPr lvl="1"/>
+            <a:r>
+              <a:rPr lang="en-US" dirty="0"/>
+              <a:t>That error is inherent to the model choice. </a:t>
+            </a:r>
+          </a:p>
+          <a:p>
+            <a:pPr lvl="1"/>
+            <a:r>
+              <a:rPr lang="en-US" dirty="0"/>
+              <a:t>We need one so we pick the best fit we have. </a:t>
+            </a:r>
+          </a:p>
+          <a:p>
+            <a:r>
+              <a:rPr lang="en-US" dirty="0"/>
+              <a:t>One benefit of ML is we can develop more ‘fitted’ models. </a:t>
+            </a:r>
+          </a:p>
+          <a:p>
+            <a:pPr lvl="1"/>
+            <a:r>
+              <a:rPr lang="en-US" dirty="0"/>
+              <a:t>Can capture odd patterns in data as ‘expectation’. </a:t>
+            </a:r>
+          </a:p>
+          <a:p>
+            <a:pPr lvl="1"/>
+            <a:r>
+              <a:rPr lang="en-US" dirty="0"/>
+              <a:t>More complex pattern for more complex problems. </a:t>
+            </a:r>
+          </a:p>
+        </p:txBody>
+      </p:sp>
+      <p:pic>
+        <p:nvPicPr>
+          <p:cNvPr id="11266" name="Picture 2" descr="Normal Distribution | Examples, Formulas, &amp; Uses">
+            <a:extLst>
+              <a:ext uri="{FF2B5EF4-FFF2-40B4-BE49-F238E27FC236}">
+                <a16:creationId xmlns:a16="http://schemas.microsoft.com/office/drawing/2014/main" id="{62D26EDD-4D9E-1D8E-DA01-36FB7BF6B5CE}"/>
+              </a:ext>
+            </a:extLst>
+          </p:cNvPr>
+          <p:cNvPicPr>
+            <a:picLocks noChangeAspect="1" noChangeArrowheads="1"/>
+          </p:cNvPicPr>
+          <p:nvPr/>
+        </p:nvPicPr>
+        <p:blipFill rotWithShape="1">
+          <a:blip r:embed="rId2">
+            <a:extLst>
+              <a:ext uri="{28A0092B-C50C-407E-A947-70E740481C1C}">
+                <a14:useLocalDpi xmlns:a14="http://schemas.microsoft.com/office/drawing/2010/main" val="0"/>
+              </a:ext>
+            </a:extLst>
+          </a:blip>
+          <a:srcRect l="11870" t="10609" r="12033" b="11732"/>
+          <a:stretch>
+            <a:fillRect/>
+          </a:stretch>
+        </p:blipFill>
+        <p:spPr bwMode="auto">
+          <a:xfrm>
+            <a:off x="6940244" y="0"/>
+            <a:ext cx="5251755" cy="3323303"/>
+          </a:xfrm>
+          <a:prstGeom prst="rect">
+            <a:avLst/>
+          </a:prstGeom>
+          <a:noFill/>
+          <a:extLst>
+            <a:ext uri="{909E8E84-426E-40DD-AFC4-6F175D3DCCD1}">
+              <a14:hiddenFill xmlns:a14="http://schemas.microsoft.com/office/drawing/2010/main">
+                <a:solidFill>
+                  <a:srgbClr val="FFFFFF"/>
+                </a:solidFill>
+              </a14:hiddenFill>
+            </a:ext>
+          </a:extLst>
+        </p:spPr>
+      </p:pic>
+      <p:pic>
+        <p:nvPicPr>
+          <p:cNvPr id="11268" name="Picture 4" descr="CourseKata - 6.9 Using the Normal Model to Make Predictions">
+            <a:extLst>
+              <a:ext uri="{FF2B5EF4-FFF2-40B4-BE49-F238E27FC236}">
+                <a16:creationId xmlns:a16="http://schemas.microsoft.com/office/drawing/2014/main" id="{79DD8318-BF00-D6B1-F092-94DD95217301}"/>
+              </a:ext>
+            </a:extLst>
+          </p:cNvPr>
+          <p:cNvPicPr>
+            <a:picLocks noChangeAspect="1" noChangeArrowheads="1"/>
+          </p:cNvPicPr>
+          <p:nvPr/>
+        </p:nvPicPr>
+        <p:blipFill>
+          <a:blip r:embed="rId3">
+            <a:extLst>
+              <a:ext uri="{28A0092B-C50C-407E-A947-70E740481C1C}">
+                <a14:useLocalDpi xmlns:a14="http://schemas.microsoft.com/office/drawing/2010/main" val="0"/>
+              </a:ext>
+            </a:extLst>
+          </a:blip>
+          <a:srcRect/>
+          <a:stretch>
+            <a:fillRect/>
+          </a:stretch>
+        </p:blipFill>
+        <p:spPr bwMode="auto">
+          <a:xfrm>
+            <a:off x="6978161" y="3323303"/>
+            <a:ext cx="5175920" cy="3450613"/>
+          </a:xfrm>
+          <a:prstGeom prst="rect">
+            <a:avLst/>
+          </a:prstGeom>
+          <a:noFill/>
+          <a:extLst>
+            <a:ext uri="{909E8E84-426E-40DD-AFC4-6F175D3DCCD1}">
+              <a14:hiddenFill xmlns:a14="http://schemas.microsoft.com/office/drawing/2010/main">
+                <a:solidFill>
+                  <a:srgbClr val="FFFFFF"/>
+                </a:solidFill>
+              </a14:hiddenFill>
+            </a:ext>
+          </a:extLst>
+        </p:spPr>
+      </p:pic>
+    </p:spTree>
+    <p:extLst>
+      <p:ext uri="{BB962C8B-B14F-4D97-AF65-F5344CB8AC3E}">
+        <p14:creationId xmlns:p14="http://schemas.microsoft.com/office/powerpoint/2010/main" val="639465675"/>
+      </p:ext>
+    </p:extLst>
+  </p:cSld>
+  <p:clrMapOvr>
+    <a:masterClrMapping/>
+  </p:clrMapOvr>
+</p:sld>
+</file>
+
+<file path=ppt/slides/slide24.xml><?xml version="1.0" encoding="utf-8"?>
+<p:sld xmlns:a="http://schemas.openxmlformats.org/drawingml/2006/main" xmlns:r="http://schemas.openxmlformats.org/officeDocument/2006/relationships" xmlns:p="http://schemas.openxmlformats.org/presentationml/2006/main">
+  <p:cSld>
+    <p:spTree>
+      <p:nvGrpSpPr>
+        <p:cNvPr id="1" name=""/>
+        <p:cNvGrpSpPr/>
+        <p:nvPr/>
+      </p:nvGrpSpPr>
+      <p:grpSpPr>
+        <a:xfrm>
+          <a:off x="0" y="0"/>
+          <a:ext cx="0" cy="0"/>
+          <a:chOff x="0" y="0"/>
+          <a:chExt cx="0" cy="0"/>
+        </a:xfrm>
+      </p:grpSpPr>
+      <p:sp>
+        <p:nvSpPr>
+          <p:cNvPr id="2" name="Title 1">
+            <a:extLst>
+              <a:ext uri="{FF2B5EF4-FFF2-40B4-BE49-F238E27FC236}">
+                <a16:creationId xmlns:a16="http://schemas.microsoft.com/office/drawing/2014/main" id="{AF9C8B25-E70F-5FB6-F599-526CB66B0A1B}"/>
+              </a:ext>
+            </a:extLst>
+          </p:cNvPr>
+          <p:cNvSpPr>
+            <a:spLocks noGrp="1"/>
+          </p:cNvSpPr>
+          <p:nvPr>
+            <p:ph type="title"/>
+          </p:nvPr>
+        </p:nvSpPr>
+        <p:spPr/>
+        <p:txBody>
+          <a:bodyPr/>
+          <a:lstStyle/>
+          <a:p>
+            <a:r>
+              <a:rPr lang="en-US" dirty="0"/>
+              <a:t>Calculating Errors and Time Series Data</a:t>
+            </a:r>
+          </a:p>
+        </p:txBody>
+      </p:sp>
+      <p:sp>
+        <p:nvSpPr>
+          <p:cNvPr id="3" name="Content Placeholder 2">
+            <a:extLst>
+              <a:ext uri="{FF2B5EF4-FFF2-40B4-BE49-F238E27FC236}">
+                <a16:creationId xmlns:a16="http://schemas.microsoft.com/office/drawing/2014/main" id="{23CBDAFB-7DBA-C741-11A1-0AFE6EB25CF3}"/>
+              </a:ext>
+            </a:extLst>
+          </p:cNvPr>
+          <p:cNvSpPr>
+            <a:spLocks noGrp="1"/>
+          </p:cNvSpPr>
+          <p:nvPr>
+            <p:ph idx="1"/>
+          </p:nvPr>
+        </p:nvSpPr>
+        <p:spPr>
+          <a:xfrm>
+            <a:off x="1071717" y="1853754"/>
+            <a:ext cx="6727418" cy="4199727"/>
+          </a:xfrm>
+        </p:spPr>
+        <p:txBody>
+          <a:bodyPr>
+            <a:normAutofit lnSpcReduction="10000"/>
+          </a:bodyPr>
+          <a:lstStyle/>
+          <a:p>
+            <a:r>
+              <a:rPr lang="en-US" dirty="0"/>
+              <a:t>Error calculations are the same no matter what we are dealing with. </a:t>
+            </a:r>
+          </a:p>
+          <a:p>
+            <a:pPr lvl="1"/>
+            <a:r>
+              <a:rPr lang="en-US" dirty="0"/>
+              <a:t>Residual = expectation – empirical, then we collect the residuals. </a:t>
+            </a:r>
+          </a:p>
+          <a:p>
+            <a:r>
+              <a:rPr lang="en-US" dirty="0"/>
+              <a:t>We’ll explore it with some time series data. </a:t>
+            </a:r>
+          </a:p>
+          <a:p>
+            <a:pPr lvl="1"/>
+            <a:r>
+              <a:rPr lang="en-US" dirty="0"/>
+              <a:t>Time series data just has one result every N time periods.</a:t>
+            </a:r>
+          </a:p>
+          <a:p>
+            <a:pPr lvl="1"/>
+            <a:r>
+              <a:rPr lang="en-US" dirty="0"/>
+              <a:t>It is often only one value, like a stock price. </a:t>
+            </a:r>
+          </a:p>
+          <a:p>
+            <a:r>
+              <a:rPr lang="en-US" dirty="0"/>
+              <a:t>We can make a model that calculates stock price expectation and evaluate it. </a:t>
+            </a:r>
+          </a:p>
+          <a:p>
+            <a:pPr lvl="1"/>
+            <a:r>
+              <a:rPr lang="en-US" dirty="0"/>
+              <a:t>Moving average is the analytical model. </a:t>
+            </a:r>
+          </a:p>
+          <a:p>
+            <a:pPr lvl="1"/>
+            <a:r>
+              <a:rPr lang="en-US" dirty="0"/>
+              <a:t>Amount of error is a measure for fit, or how good it is. </a:t>
+            </a:r>
+          </a:p>
+        </p:txBody>
+      </p:sp>
+      <p:pic>
+        <p:nvPicPr>
+          <p:cNvPr id="10242" name="Picture 2" descr="Time-Series Forecasting: Predicting Stock Prices Using An ARIMA Model |  Towards Data Science">
+            <a:extLst>
+              <a:ext uri="{FF2B5EF4-FFF2-40B4-BE49-F238E27FC236}">
+                <a16:creationId xmlns:a16="http://schemas.microsoft.com/office/drawing/2014/main" id="{20F92CF9-5DDD-9F01-3598-4CA96345F3AB}"/>
+              </a:ext>
+            </a:extLst>
+          </p:cNvPr>
+          <p:cNvPicPr>
+            <a:picLocks noChangeAspect="1" noChangeArrowheads="1"/>
+          </p:cNvPicPr>
+          <p:nvPr/>
+        </p:nvPicPr>
+        <p:blipFill>
+          <a:blip r:embed="rId2">
+            <a:extLst>
+              <a:ext uri="{28A0092B-C50C-407E-A947-70E740481C1C}">
+                <a14:useLocalDpi xmlns:a14="http://schemas.microsoft.com/office/drawing/2010/main" val="0"/>
+              </a:ext>
+            </a:extLst>
+          </a:blip>
+          <a:srcRect/>
+          <a:stretch>
+            <a:fillRect/>
+          </a:stretch>
+        </p:blipFill>
+        <p:spPr bwMode="auto">
+          <a:xfrm>
+            <a:off x="7799135" y="2334789"/>
+            <a:ext cx="4392865" cy="2669458"/>
+          </a:xfrm>
+          <a:prstGeom prst="rect">
+            <a:avLst/>
+          </a:prstGeom>
+          <a:noFill/>
+          <a:extLst>
+            <a:ext uri="{909E8E84-426E-40DD-AFC4-6F175D3DCCD1}">
+              <a14:hiddenFill xmlns:a14="http://schemas.microsoft.com/office/drawing/2010/main">
+                <a:solidFill>
+                  <a:srgbClr val="FFFFFF"/>
+                </a:solidFill>
+              </a14:hiddenFill>
+            </a:ext>
+          </a:extLst>
+        </p:spPr>
+      </p:pic>
+    </p:spTree>
+    <p:extLst>
+      <p:ext uri="{BB962C8B-B14F-4D97-AF65-F5344CB8AC3E}">
+        <p14:creationId xmlns:p14="http://schemas.microsoft.com/office/powerpoint/2010/main" val="3783211291"/>
+      </p:ext>
+    </p:extLst>
+  </p:cSld>
+  <p:clrMapOvr>
+    <a:masterClrMapping/>
+  </p:clrMapOvr>
+</p:sld>
+</file>
+
+<file path=ppt/slides/slide25.xml><?xml version="1.0" encoding="utf-8"?>
+<p:sld xmlns:a="http://schemas.openxmlformats.org/drawingml/2006/main" xmlns:r="http://schemas.openxmlformats.org/officeDocument/2006/relationships" xmlns:p="http://schemas.openxmlformats.org/presentationml/2006/main">
+  <p:cSld>
+    <p:spTree>
+      <p:nvGrpSpPr>
+        <p:cNvPr id="1" name=""/>
+        <p:cNvGrpSpPr/>
+        <p:nvPr/>
+      </p:nvGrpSpPr>
+      <p:grpSpPr>
+        <a:xfrm>
+          <a:off x="0" y="0"/>
+          <a:ext cx="0" cy="0"/>
+          <a:chOff x="0" y="0"/>
+          <a:chExt cx="0" cy="0"/>
+        </a:xfrm>
+      </p:grpSpPr>
+      <p:sp>
+        <p:nvSpPr>
+          <p:cNvPr id="2" name="Title 1">
+            <a:extLst>
+              <a:ext uri="{FF2B5EF4-FFF2-40B4-BE49-F238E27FC236}">
+                <a16:creationId xmlns:a16="http://schemas.microsoft.com/office/drawing/2014/main" id="{2568E2FB-8FB8-AFFD-AF14-EB856BEDBEDD}"/>
+              </a:ext>
+            </a:extLst>
+          </p:cNvPr>
+          <p:cNvSpPr>
+            <a:spLocks noGrp="1"/>
+          </p:cNvSpPr>
+          <p:nvPr>
+            <p:ph type="title"/>
+          </p:nvPr>
+        </p:nvSpPr>
+        <p:spPr/>
+        <p:txBody>
+          <a:bodyPr/>
+          <a:lstStyle/>
+          <a:p>
+            <a:r>
+              <a:rPr lang="en-US" dirty="0"/>
+              <a:t>Errors</a:t>
+            </a:r>
+          </a:p>
+        </p:txBody>
+      </p:sp>
+      <p:sp>
+        <p:nvSpPr>
+          <p:cNvPr id="3" name="Content Placeholder 2">
+            <a:extLst>
+              <a:ext uri="{FF2B5EF4-FFF2-40B4-BE49-F238E27FC236}">
+                <a16:creationId xmlns:a16="http://schemas.microsoft.com/office/drawing/2014/main" id="{797A1AE3-CCE9-BAFD-B227-F99A3F0A09DE}"/>
+              </a:ext>
+            </a:extLst>
+          </p:cNvPr>
+          <p:cNvSpPr>
+            <a:spLocks noGrp="1"/>
+          </p:cNvSpPr>
+          <p:nvPr>
+            <p:ph idx="1"/>
+          </p:nvPr>
+        </p:nvSpPr>
+        <p:spPr/>
+        <p:txBody>
+          <a:bodyPr>
+            <a:normAutofit lnSpcReduction="10000"/>
+          </a:bodyPr>
+          <a:lstStyle/>
+          <a:p>
+            <a:r>
+              <a:rPr lang="en-US" dirty="0"/>
+              <a:t>Moving forwards, error is a critical metric for us. </a:t>
+            </a:r>
+          </a:p>
+          <a:p>
+            <a:r>
+              <a:rPr lang="en-US" dirty="0"/>
+              <a:t>We want to build models to make estimates and predictions. </a:t>
+            </a:r>
+          </a:p>
+          <a:p>
+            <a:pPr lvl="1"/>
+            <a:r>
+              <a:rPr lang="en-US" dirty="0"/>
+              <a:t>Error indicates how well we are doing. </a:t>
+            </a:r>
+          </a:p>
+          <a:p>
+            <a:pPr lvl="1"/>
+            <a:r>
+              <a:rPr lang="en-US" dirty="0"/>
+              <a:t>Data isn’t cosmically bound to follow a distribution, we are approximating. </a:t>
+            </a:r>
+          </a:p>
+          <a:p>
+            <a:r>
+              <a:rPr lang="en-US" dirty="0"/>
+              <a:t>Less error = closer match between expectations and reality. </a:t>
+            </a:r>
+          </a:p>
+          <a:p>
+            <a:endParaRPr lang="en-US" dirty="0"/>
+          </a:p>
+          <a:p>
+            <a:r>
+              <a:rPr lang="en-US" dirty="0"/>
+              <a:t>We’ll build an error calculation from scratch and look at the library functions. </a:t>
+            </a:r>
+          </a:p>
+          <a:p>
+            <a:r>
+              <a:rPr lang="en-US" dirty="0"/>
+              <a:t>This stuff carries over directly to the error calculations we need for ML. </a:t>
+            </a:r>
+          </a:p>
+        </p:txBody>
+      </p:sp>
+    </p:spTree>
+    <p:extLst>
+      <p:ext uri="{BB962C8B-B14F-4D97-AF65-F5344CB8AC3E}">
+        <p14:creationId xmlns:p14="http://schemas.microsoft.com/office/powerpoint/2010/main" val="76767667"/>
       </p:ext>
     </p:extLst>
   </p:cSld>
@@ -5539,7 +6502,7 @@
           <p:cNvPr id="2" name="Title 1">
             <a:extLst>
               <a:ext uri="{FF2B5EF4-FFF2-40B4-BE49-F238E27FC236}">
-                <a16:creationId xmlns:a16="http://schemas.microsoft.com/office/drawing/2014/main" id="{5FDB7826-B72A-BF9A-0D85-6830E306042A}"/>
+                <a16:creationId xmlns:a16="http://schemas.microsoft.com/office/drawing/2014/main" id="{7CF4D192-D350-CBE9-5E1E-74470E3F50F0}"/>
               </a:ext>
             </a:extLst>
           </p:cNvPr>
@@ -5557,7 +6520,7 @@
           <a:p>
             <a:r>
               <a:rPr lang="en-US" dirty="0"/>
-              <a:t>Correlation Strength</a:t>
+              <a:t>Assignment</a:t>
             </a:r>
           </a:p>
         </p:txBody>
@@ -5567,7 +6530,7 @@
           <p:cNvPr id="3" name="Content Placeholder 2">
             <a:extLst>
               <a:ext uri="{FF2B5EF4-FFF2-40B4-BE49-F238E27FC236}">
-                <a16:creationId xmlns:a16="http://schemas.microsoft.com/office/drawing/2014/main" id="{CBDC8E43-F246-E18C-2AC2-FF72E9D0E420}"/>
+                <a16:creationId xmlns:a16="http://schemas.microsoft.com/office/drawing/2014/main" id="{9423BD7C-40B9-FC4D-2B9C-AAA5C2318CD8}"/>
               </a:ext>
             </a:extLst>
           </p:cNvPr>
@@ -5580,128 +6543,105 @@
         </p:nvSpPr>
         <p:spPr>
           <a:xfrm>
-            <a:off x="1192696" y="1958010"/>
-            <a:ext cx="5976495" cy="4020484"/>
-          </a:xfrm>
-        </p:spPr>
-        <p:txBody>
-          <a:bodyPr/>
-          <a:lstStyle/>
-          <a:p>
-            <a:r>
-              <a:rPr lang="en-US" dirty="0"/>
-              <a:t>Knowing correlation is important for several reasons. </a:t>
-            </a:r>
-          </a:p>
-          <a:p>
-            <a:r>
-              <a:rPr lang="en-US" dirty="0"/>
-              <a:t>We can see things that have a connection. </a:t>
-            </a:r>
-          </a:p>
-          <a:p>
-            <a:r>
-              <a:rPr lang="en-US" dirty="0"/>
-              <a:t>We can validate new measures. </a:t>
-            </a:r>
-          </a:p>
-          <a:p>
-            <a:r>
-              <a:rPr lang="en-US" dirty="0"/>
-              <a:t>We can predict trends. </a:t>
-            </a:r>
-          </a:p>
-          <a:p>
-            <a:r>
-              <a:rPr lang="en-US" dirty="0"/>
-              <a:t>In exploring data for ML, we want to know:</a:t>
-            </a:r>
-          </a:p>
-          <a:p>
-            <a:pPr lvl="1"/>
-            <a:r>
-              <a:rPr lang="en-US" dirty="0"/>
-              <a:t>Things correlated with target.</a:t>
-            </a:r>
-          </a:p>
-          <a:p>
-            <a:pPr lvl="1"/>
-            <a:r>
-              <a:rPr lang="en-US" dirty="0"/>
-              <a:t>Things correlated with each other. </a:t>
-            </a:r>
-          </a:p>
-          <a:p>
-            <a:r>
-              <a:rPr lang="en-US" dirty="0"/>
-              <a:t>Later in ML – how do several </a:t>
+            <a:off x="1451579" y="2015732"/>
+            <a:ext cx="9603275" cy="4037749"/>
+          </a:xfrm>
+        </p:spPr>
+        <p:txBody>
+          <a:bodyPr/>
+          <a:lstStyle/>
+          <a:p>
+            <a:r>
+              <a:rPr lang="en-US" dirty="0"/>
+              <a:t>There’s a quiz for GitHub Usernames, please do it. </a:t>
+            </a:r>
+          </a:p>
+          <a:p>
+            <a:pPr lvl="1"/>
+            <a:r>
+              <a:rPr lang="en-US" dirty="0"/>
+              <a:t>I need to match </a:t>
             </a:r>
             <a:r>
               <a:rPr lang="en-US" dirty="0" err="1"/>
-              <a:t>Xs</a:t>
-            </a:r>
-            <a:r>
-              <a:rPr lang="en-US" dirty="0"/>
-              <a:t> explain Y. </a:t>
-            </a:r>
-          </a:p>
-          <a:p>
-            <a:pPr lvl="1"/>
-            <a:endParaRPr lang="en-US" dirty="0"/>
+              <a:t>github</a:t>
+            </a:r>
+            <a:r>
+              <a:rPr lang="en-US" dirty="0"/>
+              <a:t> to </a:t>
+            </a:r>
+            <a:r>
+              <a:rPr lang="en-US" dirty="0" err="1"/>
+              <a:t>lms</a:t>
+            </a:r>
+            <a:r>
+              <a:rPr lang="en-US" dirty="0"/>
+              <a:t> accounts to enter marks. </a:t>
+            </a:r>
+          </a:p>
+          <a:p>
+            <a:r>
+              <a:rPr lang="en-US" dirty="0"/>
+              <a:t>Some notes (we can look pre-quiz in more detail)…</a:t>
+            </a:r>
+          </a:p>
+          <a:p>
+            <a:pPr lvl="1"/>
+            <a:r>
+              <a:rPr lang="en-US" dirty="0"/>
+              <a:t>Some people had only one commit, if there’s some logistics issue I’m all ears…</a:t>
+            </a:r>
+          </a:p>
+          <a:p>
+            <a:pPr lvl="1"/>
+            <a:r>
+              <a:rPr lang="en-US" dirty="0"/>
+              <a:t>Don’t move/copy the functions into the notebook, they are imported. </a:t>
+            </a:r>
+          </a:p>
+          <a:p>
+            <a:pPr lvl="1"/>
+            <a:r>
+              <a:rPr lang="en-US" dirty="0"/>
+              <a:t>I kind of wish more people tried to expand the test bits. </a:t>
+            </a:r>
           </a:p>
         </p:txBody>
       </p:sp>
       <p:pic>
         <p:nvPicPr>
-          <p:cNvPr id="2050" name="Picture 2" descr="Correlation coefficient and correlation test in R - Stats and R">
+          <p:cNvPr id="4" name="Picture 3">
             <a:extLst>
               <a:ext uri="{FF2B5EF4-FFF2-40B4-BE49-F238E27FC236}">
-                <a16:creationId xmlns:a16="http://schemas.microsoft.com/office/drawing/2014/main" id="{70FF6B6D-DB3B-8A21-FE5D-F2701694FD4D}"/>
+                <a16:creationId xmlns:a16="http://schemas.microsoft.com/office/drawing/2014/main" id="{5A561997-4314-4A5D-00F7-080BF7449AF4}"/>
               </a:ext>
             </a:extLst>
           </p:cNvPr>
           <p:cNvPicPr>
-            <a:picLocks noChangeAspect="1" noChangeArrowheads="1"/>
+            <a:picLocks noChangeAspect="1"/>
           </p:cNvPicPr>
           <p:nvPr/>
         </p:nvPicPr>
-        <p:blipFill rotWithShape="1">
-          <a:blip r:embed="rId2">
-            <a:extLst>
-              <a:ext uri="{28A0092B-C50C-407E-A947-70E740481C1C}">
-                <a14:useLocalDpi xmlns:a14="http://schemas.microsoft.com/office/drawing/2010/main" val="0"/>
-              </a:ext>
-            </a:extLst>
-          </a:blip>
-          <a:srcRect l="8143" r="8006"/>
+        <p:blipFill>
+          <a:blip r:embed="rId2"/>
           <a:stretch>
             <a:fillRect/>
           </a:stretch>
         </p:blipFill>
-        <p:spPr bwMode="auto">
-          <a:xfrm>
-            <a:off x="7169191" y="1853754"/>
-            <a:ext cx="5022809" cy="4278689"/>
+        <p:spPr>
+          <a:xfrm>
+            <a:off x="7303624" y="1"/>
+            <a:ext cx="4888375" cy="2478906"/>
           </a:xfrm>
           <a:prstGeom prst="rect">
             <a:avLst/>
           </a:prstGeom>
-          <a:noFill/>
-          <a:extLst>
-            <a:ext uri="{909E8E84-426E-40DD-AFC4-6F175D3DCCD1}">
-              <a14:hiddenFill xmlns:a14="http://schemas.microsoft.com/office/drawing/2010/main">
-                <a:solidFill>
-                  <a:srgbClr val="FFFFFF"/>
-                </a:solidFill>
-              </a14:hiddenFill>
-            </a:ext>
-          </a:extLst>
         </p:spPr>
       </p:pic>
     </p:spTree>
     <p:extLst>
       <p:ext uri="{BB962C8B-B14F-4D97-AF65-F5344CB8AC3E}">
-        <p14:creationId xmlns:p14="http://schemas.microsoft.com/office/powerpoint/2010/main" val="1712035068"/>
+        <p14:creationId xmlns:p14="http://schemas.microsoft.com/office/powerpoint/2010/main" val="3989051756"/>
       </p:ext>
     </p:extLst>
   </p:cSld>
@@ -5733,7 +6673,7 @@
           <p:cNvPr id="2" name="Title 1">
             <a:extLst>
               <a:ext uri="{FF2B5EF4-FFF2-40B4-BE49-F238E27FC236}">
-                <a16:creationId xmlns:a16="http://schemas.microsoft.com/office/drawing/2014/main" id="{7DF42489-CB19-A811-64CE-926441B1C910}"/>
+                <a16:creationId xmlns:a16="http://schemas.microsoft.com/office/drawing/2014/main" id="{83337D48-B1DF-4725-B9A4-2B5FE685ABC6}"/>
               </a:ext>
             </a:extLst>
           </p:cNvPr>
@@ -5751,7 +6691,7 @@
           <a:p>
             <a:r>
               <a:rPr lang="en-US" dirty="0"/>
-              <a:t>Explained Variance</a:t>
+              <a:t>Be OCD to Find Problems</a:t>
             </a:r>
           </a:p>
         </p:txBody>
@@ -5761,7 +6701,7 @@
           <p:cNvPr id="3" name="Content Placeholder 2">
             <a:extLst>
               <a:ext uri="{FF2B5EF4-FFF2-40B4-BE49-F238E27FC236}">
-                <a16:creationId xmlns:a16="http://schemas.microsoft.com/office/drawing/2014/main" id="{DA2EBEAE-0A15-AE03-A8A8-4B0A2395B380}"/>
+                <a16:creationId xmlns:a16="http://schemas.microsoft.com/office/drawing/2014/main" id="{79196D01-BD56-0B82-B35C-17BAB8FD7495}"/>
               </a:ext>
             </a:extLst>
           </p:cNvPr>
@@ -5774,127 +6714,91 @@
         </p:nvSpPr>
         <p:spPr>
           <a:xfrm>
-            <a:off x="5799482" y="1853754"/>
-            <a:ext cx="6297480" cy="4278689"/>
+            <a:off x="1451579" y="1853754"/>
+            <a:ext cx="9603275" cy="4265035"/>
           </a:xfrm>
         </p:spPr>
         <p:txBody>
           <a:bodyPr>
-            <a:normAutofit/>
+            <a:normAutofit lnSpcReduction="10000"/>
           </a:bodyPr>
           <a:lstStyle/>
           <a:p>
             <a:r>
               <a:rPr lang="en-US" dirty="0"/>
-              <a:t>I think its easiest to frame in terms of Variance Explained. </a:t>
-            </a:r>
-          </a:p>
-          <a:p>
-            <a:r>
-              <a:rPr lang="en-US" dirty="0"/>
-              <a:t>Each variable varies (literally) in value.</a:t>
-            </a:r>
-          </a:p>
-          <a:p>
-            <a:pPr lvl="1"/>
-            <a:r>
-              <a:rPr lang="en-US" dirty="0"/>
-              <a:t>Unchanging variable is easy to explain – just the mean. </a:t>
-            </a:r>
-          </a:p>
-          <a:p>
-            <a:pPr lvl="1"/>
-            <a:r>
-              <a:rPr lang="en-US" dirty="0"/>
-              <a:t>Variable that varies is harder – mean +/- some variation. </a:t>
-            </a:r>
-          </a:p>
-          <a:p>
-            <a:r>
-              <a:rPr lang="en-US" dirty="0"/>
-              <a:t>Correlation tells how much of that variance is explained.</a:t>
-            </a:r>
-          </a:p>
-          <a:p>
-            <a:pPr lvl="1"/>
-            <a:r>
-              <a:rPr lang="en-US" dirty="0"/>
-              <a:t>I want to know Y, Y data varies in value some amount. </a:t>
-            </a:r>
-          </a:p>
-          <a:p>
-            <a:pPr lvl="1"/>
-            <a:r>
-              <a:rPr lang="en-US" dirty="0"/>
-              <a:t>X gives us (explains) some information on Y’s value. </a:t>
-            </a:r>
-          </a:p>
-          <a:p>
-            <a:pPr lvl="1"/>
-            <a:r>
-              <a:rPr lang="en-US" dirty="0"/>
-              <a:t>If correlation is 1, X explains all of Y’s variance – we know 100% of Y’s value (no ambiguity). </a:t>
-            </a:r>
-          </a:p>
-          <a:p>
-            <a:r>
-              <a:rPr lang="en-US" dirty="0"/>
-              <a:t>Y is target, X is input – how well can we get Y from X. </a:t>
-            </a:r>
-          </a:p>
-        </p:txBody>
-      </p:sp>
-      <p:pic>
-        <p:nvPicPr>
-          <p:cNvPr id="3074" name="Picture 2" descr="Are There Any Variants of Scatter Plots ? - Advance Innovation Group - Blog">
-            <a:extLst>
-              <a:ext uri="{FF2B5EF4-FFF2-40B4-BE49-F238E27FC236}">
-                <a16:creationId xmlns:a16="http://schemas.microsoft.com/office/drawing/2014/main" id="{E8FBFD00-FF3C-2EF4-82AD-BFF37F70C5E3}"/>
-              </a:ext>
-            </a:extLst>
-          </p:cNvPr>
-          <p:cNvPicPr>
-            <a:picLocks noChangeAspect="1" noChangeArrowheads="1"/>
-          </p:cNvPicPr>
-          <p:nvPr/>
-        </p:nvPicPr>
-        <p:blipFill>
-          <a:blip r:embed="rId2">
-            <a:extLst>
-              <a:ext uri="{28A0092B-C50C-407E-A947-70E740481C1C}">
-                <a14:useLocalDpi xmlns:a14="http://schemas.microsoft.com/office/drawing/2010/main" val="0"/>
-              </a:ext>
-            </a:extLst>
-          </a:blip>
-          <a:srcRect/>
-          <a:stretch>
-            <a:fillRect/>
-          </a:stretch>
-        </p:blipFill>
-        <p:spPr bwMode="auto">
-          <a:xfrm>
-            <a:off x="95038" y="2067338"/>
-            <a:ext cx="5704444" cy="3491120"/>
-          </a:xfrm>
-          <a:prstGeom prst="rect">
-            <a:avLst/>
-          </a:prstGeom>
-          <a:noFill/>
-          <a:extLst>
-            <a:ext uri="{909E8E84-426E-40DD-AFC4-6F175D3DCCD1}">
-              <a14:hiddenFill xmlns:a14="http://schemas.microsoft.com/office/drawing/2010/main">
-                <a:solidFill>
-                  <a:srgbClr val="FFFFFF"/>
-                </a:solidFill>
-              </a14:hiddenFill>
-            </a:ext>
-          </a:extLst>
-        </p:spPr>
-      </p:pic>
+              <a:t>If in doubt, write pseudocode. </a:t>
+            </a:r>
+          </a:p>
+          <a:p>
+            <a:pPr lvl="1"/>
+            <a:r>
+              <a:rPr lang="en-US" dirty="0"/>
+              <a:t>In English, in as much detail as possible, what do I need to do?</a:t>
+            </a:r>
+          </a:p>
+          <a:p>
+            <a:pPr lvl="1"/>
+            <a:r>
+              <a:rPr lang="en-US" dirty="0"/>
+              <a:t>For each thing, we can look up how in code. </a:t>
+            </a:r>
+          </a:p>
+          <a:p>
+            <a:r>
+              <a:rPr lang="en-US" dirty="0"/>
+              <a:t>If there’s errors, be systemic to identify. </a:t>
+            </a:r>
+          </a:p>
+          <a:p>
+            <a:pPr lvl="1"/>
+            <a:r>
+              <a:rPr lang="en-US" dirty="0"/>
+              <a:t>Errors will have both a message and an indicator of line triggering it. </a:t>
+            </a:r>
+          </a:p>
+          <a:p>
+            <a:pPr lvl="1"/>
+            <a:r>
+              <a:rPr lang="en-US" dirty="0"/>
+              <a:t>Localize the error to one operation or function call, then look at docs or search. </a:t>
+            </a:r>
+          </a:p>
+          <a:p>
+            <a:r>
+              <a:rPr lang="en-US" dirty="0"/>
+              <a:t>If something is wrong, be even more systemic. </a:t>
+            </a:r>
+          </a:p>
+          <a:p>
+            <a:pPr lvl="1"/>
+            <a:r>
+              <a:rPr lang="en-US" dirty="0"/>
+              <a:t>Print/variable viewer/debug to check values line-by-line if needed. </a:t>
+            </a:r>
+          </a:p>
+          <a:p>
+            <a:pPr lvl="1"/>
+            <a:r>
+              <a:rPr lang="en-US" dirty="0"/>
+              <a:t>Narrow down what line isn’t working. </a:t>
+            </a:r>
+          </a:p>
+          <a:p>
+            <a:r>
+              <a:rPr lang="en-US" dirty="0"/>
+              <a:t>It is boring, frustrating, slow, and dull, but this is how you program. </a:t>
+            </a:r>
+          </a:p>
+          <a:p>
+            <a:pPr lvl="1"/>
+            <a:endParaRPr lang="en-US" dirty="0"/>
+          </a:p>
+        </p:txBody>
+      </p:sp>
     </p:spTree>
     <p:extLst>
       <p:ext uri="{BB962C8B-B14F-4D97-AF65-F5344CB8AC3E}">
-        <p14:creationId xmlns:p14="http://schemas.microsoft.com/office/powerpoint/2010/main" val="2597670375"/>
+        <p14:creationId xmlns:p14="http://schemas.microsoft.com/office/powerpoint/2010/main" val="2761438085"/>
       </p:ext>
     </p:extLst>
   </p:cSld>
@@ -5926,7 +6830,7 @@
           <p:cNvPr id="2" name="Title 1">
             <a:extLst>
               <a:ext uri="{FF2B5EF4-FFF2-40B4-BE49-F238E27FC236}">
-                <a16:creationId xmlns:a16="http://schemas.microsoft.com/office/drawing/2014/main" id="{3E306A6D-B04D-DFFC-21B2-BD44396FA49F}"/>
+                <a16:creationId xmlns:a16="http://schemas.microsoft.com/office/drawing/2014/main" id="{62506417-8547-3835-39A0-C8D4C5A520B7}"/>
               </a:ext>
             </a:extLst>
           </p:cNvPr>
@@ -5934,7 +6838,7 @@
             <a:spLocks noGrp="1"/>
           </p:cNvSpPr>
           <p:nvPr>
-            <p:ph type="ctrTitle"/>
+            <p:ph type="title"/>
           </p:nvPr>
         </p:nvSpPr>
         <p:spPr/>
@@ -5944,17 +6848,17 @@
           <a:p>
             <a:r>
               <a:rPr lang="en-US" dirty="0"/>
-              <a:t>Errors</a:t>
-            </a:r>
-          </a:p>
-        </p:txBody>
-      </p:sp>
-      <p:sp>
-        <p:nvSpPr>
-          <p:cNvPr id="3" name="Subtitle 2">
+              <a:t>Correlation</a:t>
+            </a:r>
+          </a:p>
+        </p:txBody>
+      </p:sp>
+      <p:sp>
+        <p:nvSpPr>
+          <p:cNvPr id="3" name="Content Placeholder 2">
             <a:extLst>
               <a:ext uri="{FF2B5EF4-FFF2-40B4-BE49-F238E27FC236}">
-                <a16:creationId xmlns:a16="http://schemas.microsoft.com/office/drawing/2014/main" id="{55636125-717A-D5AD-1708-CB7F24EC715A}"/>
+                <a16:creationId xmlns:a16="http://schemas.microsoft.com/office/drawing/2014/main" id="{C03C6F98-C37D-157E-4725-0CBC144D8B00}"/>
               </a:ext>
             </a:extLst>
           </p:cNvPr>
@@ -5962,7 +6866,7 @@
             <a:spLocks noGrp="1"/>
           </p:cNvSpPr>
           <p:nvPr>
-            <p:ph type="subTitle" idx="1"/>
+            <p:ph idx="1"/>
           </p:nvPr>
         </p:nvSpPr>
         <p:spPr/>
@@ -5974,10 +6878,104 @@
           </a:p>
         </p:txBody>
       </p:sp>
+      <p:pic>
+        <p:nvPicPr>
+          <p:cNvPr id="9218" name="Picture 2" descr="How to Read a Correlation Matrix">
+            <a:extLst>
+              <a:ext uri="{FF2B5EF4-FFF2-40B4-BE49-F238E27FC236}">
+                <a16:creationId xmlns:a16="http://schemas.microsoft.com/office/drawing/2014/main" id="{C94C3B94-69AF-F2F2-7A69-87D429F8E259}"/>
+              </a:ext>
+            </a:extLst>
+          </p:cNvPr>
+          <p:cNvPicPr>
+            <a:picLocks noChangeAspect="1" noChangeArrowheads="1"/>
+          </p:cNvPicPr>
+          <p:nvPr/>
+        </p:nvPicPr>
+        <p:blipFill>
+          <a:blip r:embed="rId2">
+            <a:extLst>
+              <a:ext uri="{28A0092B-C50C-407E-A947-70E740481C1C}">
+                <a14:useLocalDpi xmlns:a14="http://schemas.microsoft.com/office/drawing/2010/main" val="0"/>
+              </a:ext>
+            </a:extLst>
+          </a:blip>
+          <a:srcRect/>
+          <a:stretch>
+            <a:fillRect/>
+          </a:stretch>
+        </p:blipFill>
+        <p:spPr bwMode="auto">
+          <a:xfrm>
+            <a:off x="4996835" y="0"/>
+            <a:ext cx="7035800" cy="2349500"/>
+          </a:xfrm>
+          <a:prstGeom prst="rect">
+            <a:avLst/>
+          </a:prstGeom>
+          <a:noFill/>
+          <a:extLst>
+            <a:ext uri="{909E8E84-426E-40DD-AFC4-6F175D3DCCD1}">
+              <a14:hiddenFill xmlns:a14="http://schemas.microsoft.com/office/drawing/2010/main">
+                <a:solidFill>
+                  <a:srgbClr val="FFFFFF"/>
+                </a:solidFill>
+              </a14:hiddenFill>
+            </a:ext>
+          </a:extLst>
+        </p:spPr>
+      </p:pic>
+      <p:pic>
+        <p:nvPicPr>
+          <p:cNvPr id="9220" name="Picture 4" descr="What is Correlation and the Correlation Coefficient">
+            <a:extLst>
+              <a:ext uri="{FF2B5EF4-FFF2-40B4-BE49-F238E27FC236}">
+                <a16:creationId xmlns:a16="http://schemas.microsoft.com/office/drawing/2014/main" id="{12812FC0-3F0B-6E8C-EFA0-DFEB1C733507}"/>
+              </a:ext>
+            </a:extLst>
+          </p:cNvPr>
+          <p:cNvPicPr>
+            <a:picLocks noChangeAspect="1" noChangeArrowheads="1"/>
+          </p:cNvPicPr>
+          <p:nvPr/>
+        </p:nvPicPr>
+        <p:blipFill rotWithShape="1">
+          <a:blip r:embed="rId3">
+            <a:extLst>
+              <a:ext uri="{28A0092B-C50C-407E-A947-70E740481C1C}">
+                <a14:useLocalDpi xmlns:a14="http://schemas.microsoft.com/office/drawing/2010/main" val="0"/>
+              </a:ext>
+            </a:extLst>
+          </a:blip>
+          <a:srcRect t="8889" b="32871"/>
+          <a:stretch>
+            <a:fillRect/>
+          </a:stretch>
+        </p:blipFill>
+        <p:spPr bwMode="auto">
+          <a:xfrm>
+            <a:off x="0" y="2566405"/>
+            <a:ext cx="12192000" cy="3994150"/>
+          </a:xfrm>
+          <a:prstGeom prst="rect">
+            <a:avLst/>
+          </a:prstGeom>
+          <a:noFill/>
+          <a:extLst>
+            <a:ext uri="{909E8E84-426E-40DD-AFC4-6F175D3DCCD1}">
+              <a14:hiddenFill xmlns:a14="http://schemas.microsoft.com/office/drawing/2010/main">
+                <a:solidFill>
+                  <a:srgbClr val="FFFFFF"/>
+                </a:solidFill>
+              </a14:hiddenFill>
+            </a:ext>
+          </a:extLst>
+        </p:spPr>
+      </p:pic>
     </p:spTree>
     <p:extLst>
       <p:ext uri="{BB962C8B-B14F-4D97-AF65-F5344CB8AC3E}">
-        <p14:creationId xmlns:p14="http://schemas.microsoft.com/office/powerpoint/2010/main" val="2329615472"/>
+        <p14:creationId xmlns:p14="http://schemas.microsoft.com/office/powerpoint/2010/main" val="1633624888"/>
       </p:ext>
     </p:extLst>
   </p:cSld>
@@ -6009,7 +7007,7 @@
           <p:cNvPr id="2" name="Title 1">
             <a:extLst>
               <a:ext uri="{FF2B5EF4-FFF2-40B4-BE49-F238E27FC236}">
-                <a16:creationId xmlns:a16="http://schemas.microsoft.com/office/drawing/2014/main" id="{8E6D282D-5B87-7E8C-8634-093003DF86FC}"/>
+                <a16:creationId xmlns:a16="http://schemas.microsoft.com/office/drawing/2014/main" id="{4494A4BB-E7D6-4328-BED4-DB9171C762B6}"/>
               </a:ext>
             </a:extLst>
           </p:cNvPr>
@@ -6027,7 +7025,7 @@
           <a:p>
             <a:r>
               <a:rPr lang="en-US" dirty="0"/>
-              <a:t>Data and Estimates</a:t>
+              <a:t>Review - Correlations</a:t>
             </a:r>
           </a:p>
         </p:txBody>
@@ -6037,7 +7035,7 @@
           <p:cNvPr id="3" name="Content Placeholder 2">
             <a:extLst>
               <a:ext uri="{FF2B5EF4-FFF2-40B4-BE49-F238E27FC236}">
-                <a16:creationId xmlns:a16="http://schemas.microsoft.com/office/drawing/2014/main" id="{67463E60-3095-93ED-90BF-C18284B88227}"/>
+                <a16:creationId xmlns:a16="http://schemas.microsoft.com/office/drawing/2014/main" id="{7B88312E-2768-AEBF-D834-7E21833E6112}"/>
               </a:ext>
             </a:extLst>
           </p:cNvPr>
@@ -6050,63 +7048,117 @@
         </p:nvSpPr>
         <p:spPr>
           <a:xfrm>
-            <a:off x="1451579" y="2015732"/>
-            <a:ext cx="9603275" cy="4037749"/>
-          </a:xfrm>
-        </p:spPr>
-        <p:txBody>
-          <a:bodyPr/>
-          <a:lstStyle/>
-          <a:p>
-            <a:r>
-              <a:rPr lang="en-US" dirty="0"/>
-              <a:t>So far we’ve looked at two main types of ”things”:</a:t>
-            </a:r>
-          </a:p>
-          <a:p>
-            <a:pPr lvl="1"/>
-            <a:r>
-              <a:rPr lang="en-US" dirty="0"/>
-              <a:t>Empirical data – real values. Generally a sample of a population. </a:t>
-            </a:r>
-          </a:p>
-          <a:p>
-            <a:pPr lvl="1"/>
-            <a:r>
-              <a:rPr lang="en-US" dirty="0"/>
-              <a:t>Models – a representation of some data. Analytical distributions and the line of best fit (regression line) are both models. </a:t>
-            </a:r>
-          </a:p>
-          <a:p>
-            <a:r>
-              <a:rPr lang="en-US" dirty="0"/>
-              <a:t>A model is a simplified representation of the data. </a:t>
-            </a:r>
-          </a:p>
-          <a:p>
-            <a:r>
-              <a:rPr lang="en-US" dirty="0"/>
-              <a:t>How good is a model? So far,  we’ve mainly looked to eyeball it.</a:t>
-            </a:r>
-          </a:p>
-          <a:p>
-            <a:r>
-              <a:rPr lang="en-US" dirty="0"/>
-              <a:t>The models always differ from the empirical data somewhat.  </a:t>
-            </a:r>
-          </a:p>
-          <a:p>
-            <a:r>
-              <a:rPr lang="en-US" dirty="0"/>
-              <a:t>How do we evaluate how good a model is? </a:t>
-            </a:r>
-          </a:p>
-        </p:txBody>
-      </p:sp>
+            <a:off x="5295290" y="1853754"/>
+            <a:ext cx="6896710" cy="4199727"/>
+          </a:xfrm>
+        </p:spPr>
+        <p:txBody>
+          <a:bodyPr/>
+          <a:lstStyle/>
+          <a:p>
+            <a:r>
+              <a:rPr lang="en-US" dirty="0"/>
+              <a:t>Last time we looked at relationships between two numerical variables. </a:t>
+            </a:r>
+          </a:p>
+          <a:p>
+            <a:r>
+              <a:rPr lang="en-US" dirty="0"/>
+              <a:t>We can measure covariance – how much Y varies as X varies. </a:t>
+            </a:r>
+          </a:p>
+          <a:p>
+            <a:r>
+              <a:rPr lang="en-US" dirty="0"/>
+              <a:t>This can be translated into correlation. </a:t>
+            </a:r>
+          </a:p>
+          <a:p>
+            <a:pPr lvl="1"/>
+            <a:r>
+              <a:rPr lang="en-US" dirty="0"/>
+              <a:t>0 is none, -/+ 1 is perfect. </a:t>
+            </a:r>
+          </a:p>
+          <a:p>
+            <a:r>
+              <a:rPr lang="en-US" dirty="0"/>
+              <a:t>Can spot visually on scatter or calculate. </a:t>
+            </a:r>
+          </a:p>
+          <a:p>
+            <a:pPr lvl="1"/>
+            <a:r>
+              <a:rPr lang="en-US" dirty="0"/>
+              <a:t>Pearson or spearman. </a:t>
+            </a:r>
+          </a:p>
+          <a:p>
+            <a:r>
+              <a:rPr lang="en-US" dirty="0"/>
+              <a:t>Predictively – if we know X, how well do I know Y?</a:t>
+            </a:r>
+          </a:p>
+          <a:p>
+            <a:pPr lvl="1"/>
+            <a:r>
+              <a:rPr lang="en-US" dirty="0"/>
+              <a:t>How much of the variance in Y is explained? </a:t>
+            </a:r>
+          </a:p>
+        </p:txBody>
+      </p:sp>
+      <p:pic>
+        <p:nvPicPr>
+          <p:cNvPr id="1026" name="Picture 2" descr="Correlation and Regression Analysis – Statistics Through an Equity Lens  [Revised Edition]">
+            <a:extLst>
+              <a:ext uri="{FF2B5EF4-FFF2-40B4-BE49-F238E27FC236}">
+                <a16:creationId xmlns:a16="http://schemas.microsoft.com/office/drawing/2014/main" id="{D3BC77AA-0F42-5DF1-7B3E-DE82B441E462}"/>
+              </a:ext>
+            </a:extLst>
+          </p:cNvPr>
+          <p:cNvPicPr>
+            <a:picLocks noChangeAspect="1" noChangeArrowheads="1"/>
+          </p:cNvPicPr>
+          <p:nvPr/>
+        </p:nvPicPr>
+        <p:blipFill>
+          <a:blip r:embed="rId2">
+            <a:extLst>
+              <a:ext uri="{28A0092B-C50C-407E-A947-70E740481C1C}">
+                <a14:useLocalDpi xmlns:a14="http://schemas.microsoft.com/office/drawing/2010/main" val="0"/>
+              </a:ext>
+            </a:extLst>
+          </a:blip>
+          <a:srcRect/>
+          <a:stretch>
+            <a:fillRect/>
+          </a:stretch>
+        </p:blipFill>
+        <p:spPr bwMode="auto">
+          <a:xfrm>
+            <a:off x="-80909" y="1752522"/>
+            <a:ext cx="5376199" cy="4300959"/>
+          </a:xfrm>
+          <a:prstGeom prst="rect">
+            <a:avLst/>
+          </a:prstGeom>
+          <a:noFill/>
+          <a:extLst>
+            <a:ext uri="{909E8E84-426E-40DD-AFC4-6F175D3DCCD1}">
+              <a14:hiddenFill xmlns:a14="http://schemas.microsoft.com/office/drawing/2010/main">
+                <a:solidFill>
+                  <a:srgbClr val="FFFFFF"/>
+                </a:solidFill>
+              </a14:hiddenFill>
+            </a:ext>
+          </a:extLst>
+        </p:spPr>
+      </p:pic>
     </p:spTree>
     <p:extLst>
       <p:ext uri="{BB962C8B-B14F-4D97-AF65-F5344CB8AC3E}">
-        <p14:creationId xmlns:p14="http://schemas.microsoft.com/office/powerpoint/2010/main" val="3876072000"/>
+        <p14:creationId xmlns:p14="http://schemas.microsoft.com/office/powerpoint/2010/main" val="1087220410"/>
       </p:ext>
     </p:extLst>
   </p:cSld>
@@ -6138,7 +7190,7 @@
           <p:cNvPr id="2" name="Title 1">
             <a:extLst>
               <a:ext uri="{FF2B5EF4-FFF2-40B4-BE49-F238E27FC236}">
-                <a16:creationId xmlns:a16="http://schemas.microsoft.com/office/drawing/2014/main" id="{490857AF-E27A-214B-AEA1-7E64C3ED6145}"/>
+                <a16:creationId xmlns:a16="http://schemas.microsoft.com/office/drawing/2014/main" id="{5FDB7826-B72A-BF9A-0D85-6830E306042A}"/>
               </a:ext>
             </a:extLst>
           </p:cNvPr>
@@ -6156,7 +7208,7 @@
           <a:p>
             <a:r>
               <a:rPr lang="en-US" dirty="0"/>
-              <a:t>Analytical Distributions And Models</a:t>
+              <a:t>Correlation Strength</a:t>
             </a:r>
           </a:p>
         </p:txBody>
@@ -6166,7 +7218,7 @@
           <p:cNvPr id="3" name="Content Placeholder 2">
             <a:extLst>
               <a:ext uri="{FF2B5EF4-FFF2-40B4-BE49-F238E27FC236}">
-                <a16:creationId xmlns:a16="http://schemas.microsoft.com/office/drawing/2014/main" id="{768491DD-4138-2F8E-2866-D8E389DAF880}"/>
+                <a16:creationId xmlns:a16="http://schemas.microsoft.com/office/drawing/2014/main" id="{CBDC8E43-F246-E18C-2AC2-FF72E9D0E420}"/>
               </a:ext>
             </a:extLst>
           </p:cNvPr>
@@ -6179,67 +7231,83 @@
         </p:nvSpPr>
         <p:spPr>
           <a:xfrm>
-            <a:off x="5776499" y="2015732"/>
-            <a:ext cx="6276353" cy="4037749"/>
-          </a:xfrm>
-        </p:spPr>
-        <p:txBody>
-          <a:bodyPr/>
-          <a:lstStyle/>
-          <a:p>
-            <a:r>
-              <a:rPr lang="en-US" dirty="0"/>
-              <a:t>Our analytical distributions are models. </a:t>
-            </a:r>
-          </a:p>
-          <a:p>
-            <a:pPr lvl="1"/>
-            <a:r>
-              <a:rPr lang="en-US" dirty="0"/>
-              <a:t>Mathematical representation of our data. </a:t>
-            </a:r>
-          </a:p>
-          <a:p>
-            <a:pPr lvl="1"/>
-            <a:r>
-              <a:rPr lang="en-US" dirty="0"/>
-              <a:t>Defined by some equation rather than collection of data. </a:t>
-            </a:r>
-          </a:p>
-          <a:p>
-            <a:r>
-              <a:rPr lang="en-US" dirty="0"/>
-              <a:t>Models aren’t perfect, they’re simplifications. </a:t>
-            </a:r>
-          </a:p>
-          <a:p>
-            <a:pPr lvl="1"/>
-            <a:r>
-              <a:rPr lang="en-US" dirty="0"/>
-              <a:t>We expect some difference between data and model. </a:t>
-            </a:r>
-          </a:p>
-          <a:p>
-            <a:r>
-              <a:rPr lang="en-US" dirty="0"/>
-              <a:t>Any other model works the same way. </a:t>
-            </a:r>
-          </a:p>
-          <a:p>
-            <a:pPr lvl="1"/>
-            <a:r>
-              <a:rPr lang="en-US" dirty="0"/>
-              <a:t>It gives a simple version of what we see in data. </a:t>
-            </a:r>
+            <a:off x="1192696" y="1958010"/>
+            <a:ext cx="5976495" cy="4020484"/>
+          </a:xfrm>
+        </p:spPr>
+        <p:txBody>
+          <a:bodyPr/>
+          <a:lstStyle/>
+          <a:p>
+            <a:r>
+              <a:rPr lang="en-US" dirty="0"/>
+              <a:t>Knowing correlation is important for several reasons. </a:t>
+            </a:r>
+          </a:p>
+          <a:p>
+            <a:r>
+              <a:rPr lang="en-US" dirty="0"/>
+              <a:t>We can see things that have a connection. </a:t>
+            </a:r>
+          </a:p>
+          <a:p>
+            <a:r>
+              <a:rPr lang="en-US" dirty="0"/>
+              <a:t>We can validate new measures. </a:t>
+            </a:r>
+          </a:p>
+          <a:p>
+            <a:r>
+              <a:rPr lang="en-US" dirty="0"/>
+              <a:t>We can predict trends. </a:t>
+            </a:r>
+          </a:p>
+          <a:p>
+            <a:r>
+              <a:rPr lang="en-US" dirty="0"/>
+              <a:t>In exploring data for ML, we want to know:</a:t>
+            </a:r>
+          </a:p>
+          <a:p>
+            <a:pPr lvl="1"/>
+            <a:r>
+              <a:rPr lang="en-US" dirty="0"/>
+              <a:t>Things correlated with target.</a:t>
+            </a:r>
+          </a:p>
+          <a:p>
+            <a:pPr lvl="1"/>
+            <a:r>
+              <a:rPr lang="en-US" dirty="0"/>
+              <a:t>Things correlated with each other. </a:t>
+            </a:r>
+          </a:p>
+          <a:p>
+            <a:r>
+              <a:rPr lang="en-US" dirty="0"/>
+              <a:t>Later in ML – how do several </a:t>
+            </a:r>
+            <a:r>
+              <a:rPr lang="en-US" dirty="0" err="1"/>
+              <a:t>Xs</a:t>
+            </a:r>
+            <a:r>
+              <a:rPr lang="en-US" dirty="0"/>
+              <a:t> explain Y. </a:t>
+            </a:r>
+          </a:p>
+          <a:p>
+            <a:pPr lvl="1"/>
+            <a:endParaRPr lang="en-US" dirty="0"/>
           </a:p>
         </p:txBody>
       </p:sp>
       <p:pic>
         <p:nvPicPr>
-          <p:cNvPr id="8194" name="Picture 2" descr="The Ultimate Guide to Statistical Distributions: Normal, Uniform, Binomial,  Poisson &amp; More | by Rohan Mistry | Aug, 2025 | Medium">
+          <p:cNvPr id="2050" name="Picture 2" descr="Correlation coefficient and correlation test in R - Stats and R">
             <a:extLst>
               <a:ext uri="{FF2B5EF4-FFF2-40B4-BE49-F238E27FC236}">
-                <a16:creationId xmlns:a16="http://schemas.microsoft.com/office/drawing/2014/main" id="{768A53FD-A4AC-8060-573C-E3193E459D26}"/>
+                <a16:creationId xmlns:a16="http://schemas.microsoft.com/office/drawing/2014/main" id="{70FF6B6D-DB3B-8A21-FE5D-F2701694FD4D}"/>
               </a:ext>
             </a:extLst>
           </p:cNvPr>
@@ -6248,7 +7316,7 @@
           </p:cNvPicPr>
           <p:nvPr/>
         </p:nvPicPr>
-        <p:blipFill>
+        <p:blipFill rotWithShape="1">
           <a:blip r:embed="rId2">
             <a:extLst>
               <a:ext uri="{28A0092B-C50C-407E-A947-70E740481C1C}">
@@ -6256,15 +7324,15 @@
               </a:ext>
             </a:extLst>
           </a:blip>
-          <a:srcRect/>
+          <a:srcRect l="8143" r="8006"/>
           <a:stretch>
             <a:fillRect/>
           </a:stretch>
         </p:blipFill>
         <p:spPr bwMode="auto">
           <a:xfrm>
-            <a:off x="139148" y="1853754"/>
-            <a:ext cx="5637351" cy="3905911"/>
+            <a:off x="7169191" y="1853754"/>
+            <a:ext cx="5022809" cy="4278689"/>
           </a:xfrm>
           <a:prstGeom prst="rect">
             <a:avLst/>
@@ -6284,7 +7352,7 @@
     </p:spTree>
     <p:extLst>
       <p:ext uri="{BB962C8B-B14F-4D97-AF65-F5344CB8AC3E}">
-        <p14:creationId xmlns:p14="http://schemas.microsoft.com/office/powerpoint/2010/main" val="2301019072"/>
+        <p14:creationId xmlns:p14="http://schemas.microsoft.com/office/powerpoint/2010/main" val="1712035068"/>
       </p:ext>
     </p:extLst>
   </p:cSld>
@@ -6311,87 +7379,173 @@
           <a:chExt cx="0" cy="0"/>
         </a:xfrm>
       </p:grpSpPr>
+      <p:sp>
+        <p:nvSpPr>
+          <p:cNvPr id="2" name="Title 1">
+            <a:extLst>
+              <a:ext uri="{FF2B5EF4-FFF2-40B4-BE49-F238E27FC236}">
+                <a16:creationId xmlns:a16="http://schemas.microsoft.com/office/drawing/2014/main" id="{7DF42489-CB19-A811-64CE-926441B1C910}"/>
+              </a:ext>
+            </a:extLst>
+          </p:cNvPr>
+          <p:cNvSpPr>
+            <a:spLocks noGrp="1"/>
+          </p:cNvSpPr>
+          <p:nvPr>
+            <p:ph type="title"/>
+          </p:nvPr>
+        </p:nvSpPr>
+        <p:spPr/>
+        <p:txBody>
+          <a:bodyPr/>
+          <a:lstStyle/>
+          <a:p>
+            <a:r>
+              <a:rPr lang="en-US" dirty="0"/>
+              <a:t>Explained Variance</a:t>
+            </a:r>
+          </a:p>
+        </p:txBody>
+      </p:sp>
+      <p:sp>
+        <p:nvSpPr>
+          <p:cNvPr id="3" name="Content Placeholder 2">
+            <a:extLst>
+              <a:ext uri="{FF2B5EF4-FFF2-40B4-BE49-F238E27FC236}">
+                <a16:creationId xmlns:a16="http://schemas.microsoft.com/office/drawing/2014/main" id="{DA2EBEAE-0A15-AE03-A8A8-4B0A2395B380}"/>
+              </a:ext>
+            </a:extLst>
+          </p:cNvPr>
+          <p:cNvSpPr>
+            <a:spLocks noGrp="1"/>
+          </p:cNvSpPr>
+          <p:nvPr>
+            <p:ph idx="1"/>
+          </p:nvPr>
+        </p:nvSpPr>
+        <p:spPr>
+          <a:xfrm>
+            <a:off x="5799482" y="1853754"/>
+            <a:ext cx="6297480" cy="4278689"/>
+          </a:xfrm>
+        </p:spPr>
+        <p:txBody>
+          <a:bodyPr>
+            <a:normAutofit/>
+          </a:bodyPr>
+          <a:lstStyle/>
+          <a:p>
+            <a:r>
+              <a:rPr lang="en-US" dirty="0"/>
+              <a:t>I think its easiest to frame in terms of Variance Explained. </a:t>
+            </a:r>
+          </a:p>
+          <a:p>
+            <a:r>
+              <a:rPr lang="en-US" dirty="0"/>
+              <a:t>Each variable varies (literally) in value.</a:t>
+            </a:r>
+          </a:p>
+          <a:p>
+            <a:pPr lvl="1"/>
+            <a:r>
+              <a:rPr lang="en-US" dirty="0"/>
+              <a:t>Unchanging variable is easy to explain – just the mean. </a:t>
+            </a:r>
+          </a:p>
+          <a:p>
+            <a:pPr lvl="1"/>
+            <a:r>
+              <a:rPr lang="en-US" dirty="0"/>
+              <a:t>Variable that varies is harder – mean +/- some variation. </a:t>
+            </a:r>
+          </a:p>
+          <a:p>
+            <a:r>
+              <a:rPr lang="en-US" dirty="0"/>
+              <a:t>Correlation tells how much of that variance is explained.</a:t>
+            </a:r>
+          </a:p>
+          <a:p>
+            <a:pPr lvl="1"/>
+            <a:r>
+              <a:rPr lang="en-US" dirty="0"/>
+              <a:t>I want to know Y, Y data varies in value some amount. </a:t>
+            </a:r>
+          </a:p>
+          <a:p>
+            <a:pPr lvl="1"/>
+            <a:r>
+              <a:rPr lang="en-US" dirty="0"/>
+              <a:t>X gives us (explains) some information on Y’s value. </a:t>
+            </a:r>
+          </a:p>
+          <a:p>
+            <a:pPr lvl="1"/>
+            <a:r>
+              <a:rPr lang="en-US" dirty="0"/>
+              <a:t>If correlation is 1, X explains all of Y’s variance – we know 100% of Y’s value (no ambiguity). </a:t>
+            </a:r>
+          </a:p>
+          <a:p>
+            <a:r>
+              <a:rPr lang="en-US" dirty="0"/>
+              <a:t>Y is target, X is input – how well can we get Y from X. </a:t>
+            </a:r>
+          </a:p>
+        </p:txBody>
+      </p:sp>
       <p:pic>
         <p:nvPicPr>
-          <p:cNvPr id="4" name="Picture 3">
+          <p:cNvPr id="3074" name="Picture 2" descr="Are There Any Variants of Scatter Plots ? - Advance Innovation Group - Blog">
             <a:extLst>
               <a:ext uri="{FF2B5EF4-FFF2-40B4-BE49-F238E27FC236}">
-                <a16:creationId xmlns:a16="http://schemas.microsoft.com/office/drawing/2014/main" id="{1C74B564-B911-8B2C-FDD8-1DE6652204A5}"/>
+                <a16:creationId xmlns:a16="http://schemas.microsoft.com/office/drawing/2014/main" id="{E8FBFD00-FF3C-2EF4-82AD-BFF37F70C5E3}"/>
               </a:ext>
             </a:extLst>
           </p:cNvPr>
           <p:cNvPicPr>
-            <a:picLocks noChangeAspect="1"/>
+            <a:picLocks noChangeAspect="1" noChangeArrowheads="1"/>
           </p:cNvPicPr>
           <p:nvPr/>
         </p:nvPicPr>
         <p:blipFill>
-          <a:blip r:embed="rId2"/>
+          <a:blip r:embed="rId2">
+            <a:extLst>
+              <a:ext uri="{28A0092B-C50C-407E-A947-70E740481C1C}">
+                <a14:useLocalDpi xmlns:a14="http://schemas.microsoft.com/office/drawing/2010/main" val="0"/>
+              </a:ext>
+            </a:extLst>
+          </a:blip>
+          <a:srcRect/>
           <a:stretch>
             <a:fillRect/>
           </a:stretch>
         </p:blipFill>
-        <p:spPr>
-          <a:xfrm>
-            <a:off x="764519" y="-22182"/>
-            <a:ext cx="10662962" cy="6902364"/>
-          </a:xfrm>
-          <a:prstGeom prst="rect">
-            <a:avLst/>
-          </a:prstGeom>
-        </p:spPr>
-      </p:pic>
-      <p:sp>
-        <p:nvSpPr>
-          <p:cNvPr id="2" name="TextBox 1">
-            <a:extLst>
-              <a:ext uri="{FF2B5EF4-FFF2-40B4-BE49-F238E27FC236}">
-                <a16:creationId xmlns:a16="http://schemas.microsoft.com/office/drawing/2014/main" id="{67B09457-7837-DDDE-819F-EACAED7EA4DF}"/>
-              </a:ext>
-            </a:extLst>
-          </p:cNvPr>
-          <p:cNvSpPr txBox="1"/>
-          <p:nvPr/>
-        </p:nvSpPr>
-        <p:spPr>
-          <a:xfrm>
-            <a:off x="2454965" y="815009"/>
-            <a:ext cx="4850296" cy="1077218"/>
+        <p:spPr bwMode="auto">
+          <a:xfrm>
+            <a:off x="95038" y="2067338"/>
+            <a:ext cx="5704444" cy="3491120"/>
           </a:xfrm>
           <a:prstGeom prst="rect">
             <a:avLst/>
           </a:prstGeom>
           <a:noFill/>
-        </p:spPr>
-        <p:txBody>
-          <a:bodyPr wrap="square" rtlCol="0">
-            <a:spAutoFit/>
-          </a:bodyPr>
-          <a:lstStyle/>
-          <a:p>
-            <a:r>
-              <a:rPr lang="en-US" sz="2800" dirty="0"/>
-              <a:t>Another model:</a:t>
-            </a:r>
-          </a:p>
-          <a:p>
-            <a:r>
-              <a:rPr lang="en-US" dirty="0"/>
-              <a:t>Data – The dots. </a:t>
-            </a:r>
-          </a:p>
-          <a:p>
-            <a:r>
-              <a:rPr lang="en-US" dirty="0"/>
-              <a:t>Model – the line: y = m*x + b</a:t>
-            </a:r>
-          </a:p>
-        </p:txBody>
-      </p:sp>
+          <a:extLst>
+            <a:ext uri="{909E8E84-426E-40DD-AFC4-6F175D3DCCD1}">
+              <a14:hiddenFill xmlns:a14="http://schemas.microsoft.com/office/drawing/2010/main">
+                <a:solidFill>
+                  <a:srgbClr val="FFFFFF"/>
+                </a:solidFill>
+              </a14:hiddenFill>
+            </a:ext>
+          </a:extLst>
+        </p:spPr>
+      </p:pic>
     </p:spTree>
     <p:extLst>
       <p:ext uri="{BB962C8B-B14F-4D97-AF65-F5344CB8AC3E}">
-        <p14:creationId xmlns:p14="http://schemas.microsoft.com/office/powerpoint/2010/main" val="1434053830"/>
+        <p14:creationId xmlns:p14="http://schemas.microsoft.com/office/powerpoint/2010/main" val="2597670375"/>
       </p:ext>
     </p:extLst>
   </p:cSld>
@@ -6402,7 +7556,7 @@
 </file>
 
 <file path=ppt/slides/slide9.xml><?xml version="1.0" encoding="utf-8"?>
-<p:sld xmlns:a="http://schemas.openxmlformats.org/drawingml/2006/main" xmlns:r="http://schemas.openxmlformats.org/officeDocument/2006/relationships" xmlns:p="http://schemas.openxmlformats.org/presentationml/2006/main" show="0">
+<p:sld xmlns:a="http://schemas.openxmlformats.org/drawingml/2006/main" xmlns:r="http://schemas.openxmlformats.org/officeDocument/2006/relationships" xmlns:p="http://schemas.openxmlformats.org/presentationml/2006/main">
   <p:cSld>
     <p:spTree>
       <p:nvGrpSpPr>
@@ -6418,57 +7572,63 @@
           <a:chExt cx="0" cy="0"/>
         </a:xfrm>
       </p:grpSpPr>
-      <p:pic>
-        <p:nvPicPr>
-          <p:cNvPr id="4098" name="Picture 2" descr="machine learning - Linear Regression: how to discern a possible correlation  between observation errors from scatter plot - Cross Validated">
+      <p:sp>
+        <p:nvSpPr>
+          <p:cNvPr id="2" name="Title 1">
             <a:extLst>
               <a:ext uri="{FF2B5EF4-FFF2-40B4-BE49-F238E27FC236}">
-                <a16:creationId xmlns:a16="http://schemas.microsoft.com/office/drawing/2014/main" id="{4F665E50-429B-60A5-80FE-E3C709E71179}"/>
+                <a16:creationId xmlns:a16="http://schemas.microsoft.com/office/drawing/2014/main" id="{3E306A6D-B04D-DFFC-21B2-BD44396FA49F}"/>
               </a:ext>
             </a:extLst>
           </p:cNvPr>
-          <p:cNvPicPr>
-            <a:picLocks noChangeAspect="1" noChangeArrowheads="1"/>
-          </p:cNvPicPr>
-          <p:nvPr/>
-        </p:nvPicPr>
-        <p:blipFill rotWithShape="1">
-          <a:blip r:embed="rId2">
-            <a:extLst>
-              <a:ext uri="{28A0092B-C50C-407E-A947-70E740481C1C}">
-                <a14:useLocalDpi xmlns:a14="http://schemas.microsoft.com/office/drawing/2010/main" val="0"/>
-              </a:ext>
-            </a:extLst>
-          </a:blip>
-          <a:srcRect t="8261"/>
-          <a:stretch>
-            <a:fillRect/>
-          </a:stretch>
-        </p:blipFill>
-        <p:spPr bwMode="auto">
-          <a:xfrm>
-            <a:off x="919163" y="566530"/>
-            <a:ext cx="10353675" cy="6291470"/>
-          </a:xfrm>
-          <a:prstGeom prst="rect">
-            <a:avLst/>
-          </a:prstGeom>
-          <a:noFill/>
-          <a:extLst>
-            <a:ext uri="{909E8E84-426E-40DD-AFC4-6F175D3DCCD1}">
-              <a14:hiddenFill xmlns:a14="http://schemas.microsoft.com/office/drawing/2010/main">
-                <a:solidFill>
-                  <a:srgbClr val="FFFFFF"/>
-                </a:solidFill>
-              </a14:hiddenFill>
-            </a:ext>
-          </a:extLst>
-        </p:spPr>
-      </p:pic>
+          <p:cNvSpPr>
+            <a:spLocks noGrp="1"/>
+          </p:cNvSpPr>
+          <p:nvPr>
+            <p:ph type="ctrTitle"/>
+          </p:nvPr>
+        </p:nvSpPr>
+        <p:spPr/>
+        <p:txBody>
+          <a:bodyPr/>
+          <a:lstStyle/>
+          <a:p>
+            <a:r>
+              <a:rPr lang="en-US" dirty="0"/>
+              <a:t>Errors</a:t>
+            </a:r>
+          </a:p>
+        </p:txBody>
+      </p:sp>
+      <p:sp>
+        <p:nvSpPr>
+          <p:cNvPr id="3" name="Subtitle 2">
+            <a:extLst>
+              <a:ext uri="{FF2B5EF4-FFF2-40B4-BE49-F238E27FC236}">
+                <a16:creationId xmlns:a16="http://schemas.microsoft.com/office/drawing/2014/main" id="{55636125-717A-D5AD-1708-CB7F24EC715A}"/>
+              </a:ext>
+            </a:extLst>
+          </p:cNvPr>
+          <p:cNvSpPr>
+            <a:spLocks noGrp="1"/>
+          </p:cNvSpPr>
+          <p:nvPr>
+            <p:ph type="subTitle" idx="1"/>
+          </p:nvPr>
+        </p:nvSpPr>
+        <p:spPr/>
+        <p:txBody>
+          <a:bodyPr/>
+          <a:lstStyle/>
+          <a:p>
+            <a:endParaRPr lang="en-US"/>
+          </a:p>
+        </p:txBody>
+      </p:sp>
     </p:spTree>
     <p:extLst>
       <p:ext uri="{BB962C8B-B14F-4D97-AF65-F5344CB8AC3E}">
-        <p14:creationId xmlns:p14="http://schemas.microsoft.com/office/powerpoint/2010/main" val="4282340740"/>
+        <p14:creationId xmlns:p14="http://schemas.microsoft.com/office/powerpoint/2010/main" val="2329615472"/>
       </p:ext>
     </p:extLst>
   </p:cSld>

--- a/reference_material/slides/012_Errors.pptx
+++ b/reference_material/slides/012_Errors.pptx
@@ -6580,6 +6580,13 @@
             </a:r>
           </a:p>
           <a:p>
+            <a:pPr lvl="1"/>
+            <a:r>
+              <a:rPr lang="en-US" dirty="0"/>
+              <a:t>Once I have a list to translate, I can enter the marks. </a:t>
+            </a:r>
+          </a:p>
+          <a:p>
             <a:r>
               <a:rPr lang="en-US" dirty="0"/>
               <a:t>Some notes (we can look pre-quiz in more detail)…</a:t>
@@ -6590,6 +6597,17 @@
             <a:r>
               <a:rPr lang="en-US" dirty="0"/>
               <a:t>Some people had only one commit, if there’s some logistics issue I’m all ears…</a:t>
+            </a:r>
+          </a:p>
+          <a:p>
+            <a:pPr lvl="1"/>
+            <a:r>
+              <a:rPr lang="en-US" dirty="0" err="1"/>
+              <a:t>Github</a:t>
+            </a:r>
+            <a:r>
+              <a:rPr lang="en-US" dirty="0"/>
+              <a:t> can be annoying, but it’s the same every time, so lets sort it now. </a:t>
             </a:r>
           </a:p>
           <a:p>
